--- a/E-Commerce-Data-Warehouse-ETL-Pipeline-Implementation.pptx
+++ b/E-Commerce-Data-Warehouse-ETL-Pipeline-Implementation.pptx
@@ -20,14 +20,27 @@
     <p:sldId id="265" r:id="rId15"/>
     <p:sldId id="266" r:id="rId16"/>
     <p:sldId id="267" r:id="rId17"/>
+    <p:sldId id="268" r:id="rId18"/>
+    <p:sldId id="269" r:id="rId19"/>
+    <p:sldId id="270" r:id="rId20"/>
+    <p:sldId id="271" r:id="rId21"/>
+    <p:sldId id="272" r:id="rId22"/>
+    <p:sldId id="273" r:id="rId23"/>
+    <p:sldId id="274" r:id="rId24"/>
+    <p:sldId id="275" r:id="rId25"/>
+    <p:sldId id="276" r:id="rId26"/>
+    <p:sldId id="277" r:id="rId27"/>
+    <p:sldId id="278" r:id="rId28"/>
+    <p:sldId id="279" r:id="rId29"/>
+    <p:sldId id="280" r:id="rId30"/>
   </p:sldIdLst>
   <p:sldSz cy="8229600" cx="14630400"/>
   <p:notesSz cx="8229600" cy="14630400"/>
   <p:embeddedFontLst>
     <p:embeddedFont>
       <p:font typeface="Montserrat"/>
-      <p:bold r:id="rId18"/>
-      <p:boldItalic r:id="rId19"/>
+      <p:bold r:id="rId31"/>
+      <p:boldItalic r:id="rId32"/>
     </p:embeddedFont>
   </p:embeddedFontLst>
   <p:defaultTextStyle>
@@ -261,7 +274,7 @@
   </p:defaultTextStyle>
   <p:extLst>
     <p:ext uri="GoogleSlidesCustomDataVersion2">
-      <go:slidesCustomData xmlns:go="http://customooxmlschemas.google.com/" r:id="rId20" roundtripDataSignature="AMtx7mid9fIz9LrRUStxPSrAVIISH+KpBQ=="/>
+      <go:slidesCustomData xmlns:go="http://customooxmlschemas.google.com/" r:id="rId33" roundtripDataSignature="AMtx7mjmEaGX1wL1+BKmZjf8Y3P4OJMnOQ=="/>
     </p:ext>
   </p:extLst>
 </p:presentation>
@@ -1307,7 +1320,7 @@
   <p:cSld>
     <p:spTree>
       <p:nvGrpSpPr>
-        <p:cNvPr id="172" name="Shape 172"/>
+        <p:cNvPr id="171" name="Shape 171"/>
         <p:cNvGrpSpPr/>
         <p:nvPr/>
       </p:nvGrpSpPr>
@@ -1321,7 +1334,1965 @@
       </p:grpSpPr>
       <p:sp>
         <p:nvSpPr>
-          <p:cNvPr id="173" name="Google Shape;173;p7:notes"/>
+          <p:cNvPr id="172" name="Google Shape;172;g33b2a244876_0_0:notes"/>
+          <p:cNvSpPr/>
+          <p:nvPr>
+            <p:ph idx="2" type="sldImg"/>
+          </p:nvPr>
+        </p:nvSpPr>
+        <p:spPr>
+          <a:xfrm>
+            <a:off x="685800" y="1143000"/>
+            <a:ext cx="5486400" cy="3086100"/>
+          </a:xfrm>
+          <a:custGeom>
+            <a:rect b="b" l="l" r="r" t="t"/>
+            <a:pathLst>
+              <a:path extrusionOk="0" h="120000" w="120000">
+                <a:moveTo>
+                  <a:pt x="0" y="0"/>
+                </a:moveTo>
+                <a:lnTo>
+                  <a:pt x="120000" y="0"/>
+                </a:lnTo>
+                <a:lnTo>
+                  <a:pt x="120000" y="120000"/>
+                </a:lnTo>
+                <a:lnTo>
+                  <a:pt x="0" y="120000"/>
+                </a:lnTo>
+                <a:close/>
+              </a:path>
+            </a:pathLst>
+          </a:custGeom>
+        </p:spPr>
+      </p:sp>
+      <p:sp>
+        <p:nvSpPr>
+          <p:cNvPr id="173" name="Google Shape;173;g33b2a244876_0_0:notes"/>
+          <p:cNvSpPr txBox="1"/>
+          <p:nvPr>
+            <p:ph idx="1" type="body"/>
+          </p:nvPr>
+        </p:nvSpPr>
+        <p:spPr>
+          <a:xfrm>
+            <a:off x="685800" y="4400550"/>
+            <a:ext cx="5486400" cy="3600600"/>
+          </a:xfrm>
+          <a:prstGeom prst="rect">
+            <a:avLst/>
+          </a:prstGeom>
+        </p:spPr>
+        <p:txBody>
+          <a:bodyPr anchorCtr="0" anchor="t" bIns="45700" lIns="91425" spcFirstLastPara="1" rIns="91425" wrap="square" tIns="45700">
+            <a:noAutofit/>
+          </a:bodyPr>
+          <a:lstStyle/>
+          <a:p>
+            <a:pPr indent="0" lvl="0" marL="0" rtl="0" algn="l">
+              <a:spcBef>
+                <a:spcPts val="0"/>
+              </a:spcBef>
+              <a:spcAft>
+                <a:spcPts val="0"/>
+              </a:spcAft>
+              <a:buNone/>
+            </a:pPr>
+            <a:r>
+              <a:t/>
+            </a:r>
+            <a:endParaRPr/>
+          </a:p>
+        </p:txBody>
+      </p:sp>
+      <p:sp>
+        <p:nvSpPr>
+          <p:cNvPr id="174" name="Google Shape;174;g33b2a244876_0_0:notes"/>
+          <p:cNvSpPr txBox="1"/>
+          <p:nvPr>
+            <p:ph idx="12" type="sldNum"/>
+          </p:nvPr>
+        </p:nvSpPr>
+        <p:spPr>
+          <a:xfrm>
+            <a:off x="3884613" y="8685213"/>
+            <a:ext cx="2971800" cy="458700"/>
+          </a:xfrm>
+          <a:prstGeom prst="rect">
+            <a:avLst/>
+          </a:prstGeom>
+        </p:spPr>
+        <p:txBody>
+          <a:bodyPr anchorCtr="0" anchor="b" bIns="45700" lIns="91425" spcFirstLastPara="1" rIns="91425" wrap="square" tIns="45700">
+            <a:noAutofit/>
+          </a:bodyPr>
+          <a:lstStyle/>
+          <a:p>
+            <a:pPr indent="0" lvl="0" marL="0" rtl="0" algn="r">
+              <a:spcBef>
+                <a:spcPts val="0"/>
+              </a:spcBef>
+              <a:spcAft>
+                <a:spcPts val="0"/>
+              </a:spcAft>
+              <a:buClr>
+                <a:srgbClr val="000000"/>
+              </a:buClr>
+              <a:buFont typeface="Arial"/>
+              <a:buNone/>
+            </a:pPr>
+            <a:fld id="{00000000-1234-1234-1234-123412341234}" type="slidenum">
+              <a:rPr lang="en-US"/>
+              <a:t>‹#›</a:t>
+            </a:fld>
+            <a:endParaRPr/>
+          </a:p>
+        </p:txBody>
+      </p:sp>
+    </p:spTree>
+  </p:cSld>
+  <p:clrMapOvr>
+    <a:masterClrMapping/>
+  </p:clrMapOvr>
+</p:notes>
+</file>
+
+<file path=ppt/notesSlides/notesSlide11.xml><?xml version="1.0" encoding="utf-8"?>
+<p:notes xmlns:a="http://schemas.openxmlformats.org/drawingml/2006/main" xmlns:r="http://schemas.openxmlformats.org/officeDocument/2006/relationships" xmlns:mc="http://schemas.openxmlformats.org/markup-compatibility/2006" xmlns:mv="urn:schemas-microsoft-com:mac:vml" xmlns:p="http://schemas.openxmlformats.org/presentationml/2006/main" xmlns:c="http://schemas.openxmlformats.org/drawingml/2006/chart" xmlns:dgm="http://schemas.openxmlformats.org/drawingml/2006/diagram" xmlns:o="urn:schemas-microsoft-com:office:office" xmlns:v="urn:schemas-microsoft-com:vml" xmlns:pvml="urn:schemas-microsoft-com:office:powerpoint" xmlns:com="http://schemas.openxmlformats.org/drawingml/2006/compatibility" xmlns:p14="http://schemas.microsoft.com/office/powerpoint/2010/main" xmlns:p15="http://schemas.microsoft.com/office/powerpoint/2012/main" xmlns:ahyp="http://schemas.microsoft.com/office/drawing/2018/hyperlinkcolor" showMasterPhAnim="0" showMasterSp="0">
+  <p:cSld>
+    <p:spTree>
+      <p:nvGrpSpPr>
+        <p:cNvPr id="177" name="Shape 177"/>
+        <p:cNvGrpSpPr/>
+        <p:nvPr/>
+      </p:nvGrpSpPr>
+      <p:grpSpPr>
+        <a:xfrm>
+          <a:off x="0" y="0"/>
+          <a:ext cx="0" cy="0"/>
+          <a:chOff x="0" y="0"/>
+          <a:chExt cx="0" cy="0"/>
+        </a:xfrm>
+      </p:grpSpPr>
+      <p:sp>
+        <p:nvSpPr>
+          <p:cNvPr id="178" name="Google Shape;178;g33b2a244876_0_5:notes"/>
+          <p:cNvSpPr/>
+          <p:nvPr>
+            <p:ph idx="2" type="sldImg"/>
+          </p:nvPr>
+        </p:nvSpPr>
+        <p:spPr>
+          <a:xfrm>
+            <a:off x="685800" y="1143000"/>
+            <a:ext cx="5486400" cy="3086100"/>
+          </a:xfrm>
+          <a:custGeom>
+            <a:rect b="b" l="l" r="r" t="t"/>
+            <a:pathLst>
+              <a:path extrusionOk="0" h="120000" w="120000">
+                <a:moveTo>
+                  <a:pt x="0" y="0"/>
+                </a:moveTo>
+                <a:lnTo>
+                  <a:pt x="120000" y="0"/>
+                </a:lnTo>
+                <a:lnTo>
+                  <a:pt x="120000" y="120000"/>
+                </a:lnTo>
+                <a:lnTo>
+                  <a:pt x="0" y="120000"/>
+                </a:lnTo>
+                <a:close/>
+              </a:path>
+            </a:pathLst>
+          </a:custGeom>
+        </p:spPr>
+      </p:sp>
+      <p:sp>
+        <p:nvSpPr>
+          <p:cNvPr id="179" name="Google Shape;179;g33b2a244876_0_5:notes"/>
+          <p:cNvSpPr txBox="1"/>
+          <p:nvPr>
+            <p:ph idx="1" type="body"/>
+          </p:nvPr>
+        </p:nvSpPr>
+        <p:spPr>
+          <a:xfrm>
+            <a:off x="685800" y="4400550"/>
+            <a:ext cx="5486400" cy="3600600"/>
+          </a:xfrm>
+          <a:prstGeom prst="rect">
+            <a:avLst/>
+          </a:prstGeom>
+        </p:spPr>
+        <p:txBody>
+          <a:bodyPr anchorCtr="0" anchor="t" bIns="45700" lIns="91425" spcFirstLastPara="1" rIns="91425" wrap="square" tIns="45700">
+            <a:noAutofit/>
+          </a:bodyPr>
+          <a:lstStyle/>
+          <a:p>
+            <a:pPr indent="0" lvl="0" marL="0" rtl="0" algn="l">
+              <a:spcBef>
+                <a:spcPts val="0"/>
+              </a:spcBef>
+              <a:spcAft>
+                <a:spcPts val="0"/>
+              </a:spcAft>
+              <a:buNone/>
+            </a:pPr>
+            <a:r>
+              <a:t/>
+            </a:r>
+            <a:endParaRPr/>
+          </a:p>
+        </p:txBody>
+      </p:sp>
+      <p:sp>
+        <p:nvSpPr>
+          <p:cNvPr id="180" name="Google Shape;180;g33b2a244876_0_5:notes"/>
+          <p:cNvSpPr txBox="1"/>
+          <p:nvPr>
+            <p:ph idx="12" type="sldNum"/>
+          </p:nvPr>
+        </p:nvSpPr>
+        <p:spPr>
+          <a:xfrm>
+            <a:off x="3884613" y="8685213"/>
+            <a:ext cx="2971800" cy="458700"/>
+          </a:xfrm>
+          <a:prstGeom prst="rect">
+            <a:avLst/>
+          </a:prstGeom>
+        </p:spPr>
+        <p:txBody>
+          <a:bodyPr anchorCtr="0" anchor="b" bIns="45700" lIns="91425" spcFirstLastPara="1" rIns="91425" wrap="square" tIns="45700">
+            <a:noAutofit/>
+          </a:bodyPr>
+          <a:lstStyle/>
+          <a:p>
+            <a:pPr indent="0" lvl="0" marL="0" rtl="0" algn="r">
+              <a:spcBef>
+                <a:spcPts val="0"/>
+              </a:spcBef>
+              <a:spcAft>
+                <a:spcPts val="0"/>
+              </a:spcAft>
+              <a:buClr>
+                <a:srgbClr val="000000"/>
+              </a:buClr>
+              <a:buFont typeface="Arial"/>
+              <a:buNone/>
+            </a:pPr>
+            <a:fld id="{00000000-1234-1234-1234-123412341234}" type="slidenum">
+              <a:rPr lang="en-US"/>
+              <a:t>‹#›</a:t>
+            </a:fld>
+            <a:endParaRPr/>
+          </a:p>
+        </p:txBody>
+      </p:sp>
+    </p:spTree>
+  </p:cSld>
+  <p:clrMapOvr>
+    <a:masterClrMapping/>
+  </p:clrMapOvr>
+</p:notes>
+</file>
+
+<file path=ppt/notesSlides/notesSlide12.xml><?xml version="1.0" encoding="utf-8"?>
+<p:notes xmlns:a="http://schemas.openxmlformats.org/drawingml/2006/main" xmlns:r="http://schemas.openxmlformats.org/officeDocument/2006/relationships" xmlns:mc="http://schemas.openxmlformats.org/markup-compatibility/2006" xmlns:mv="urn:schemas-microsoft-com:mac:vml" xmlns:p="http://schemas.openxmlformats.org/presentationml/2006/main" xmlns:c="http://schemas.openxmlformats.org/drawingml/2006/chart" xmlns:dgm="http://schemas.openxmlformats.org/drawingml/2006/diagram" xmlns:o="urn:schemas-microsoft-com:office:office" xmlns:v="urn:schemas-microsoft-com:vml" xmlns:pvml="urn:schemas-microsoft-com:office:powerpoint" xmlns:com="http://schemas.openxmlformats.org/drawingml/2006/compatibility" xmlns:p14="http://schemas.microsoft.com/office/powerpoint/2010/main" xmlns:p15="http://schemas.microsoft.com/office/powerpoint/2012/main" xmlns:ahyp="http://schemas.microsoft.com/office/drawing/2018/hyperlinkcolor" showMasterPhAnim="0" showMasterSp="0">
+  <p:cSld>
+    <p:spTree>
+      <p:nvGrpSpPr>
+        <p:cNvPr id="183" name="Shape 183"/>
+        <p:cNvGrpSpPr/>
+        <p:nvPr/>
+      </p:nvGrpSpPr>
+      <p:grpSpPr>
+        <a:xfrm>
+          <a:off x="0" y="0"/>
+          <a:ext cx="0" cy="0"/>
+          <a:chOff x="0" y="0"/>
+          <a:chExt cx="0" cy="0"/>
+        </a:xfrm>
+      </p:grpSpPr>
+      <p:sp>
+        <p:nvSpPr>
+          <p:cNvPr id="184" name="Google Shape;184;g33b2a244876_0_10:notes"/>
+          <p:cNvSpPr/>
+          <p:nvPr>
+            <p:ph idx="2" type="sldImg"/>
+          </p:nvPr>
+        </p:nvSpPr>
+        <p:spPr>
+          <a:xfrm>
+            <a:off x="685800" y="1143000"/>
+            <a:ext cx="5486400" cy="3086100"/>
+          </a:xfrm>
+          <a:custGeom>
+            <a:rect b="b" l="l" r="r" t="t"/>
+            <a:pathLst>
+              <a:path extrusionOk="0" h="120000" w="120000">
+                <a:moveTo>
+                  <a:pt x="0" y="0"/>
+                </a:moveTo>
+                <a:lnTo>
+                  <a:pt x="120000" y="0"/>
+                </a:lnTo>
+                <a:lnTo>
+                  <a:pt x="120000" y="120000"/>
+                </a:lnTo>
+                <a:lnTo>
+                  <a:pt x="0" y="120000"/>
+                </a:lnTo>
+                <a:close/>
+              </a:path>
+            </a:pathLst>
+          </a:custGeom>
+        </p:spPr>
+      </p:sp>
+      <p:sp>
+        <p:nvSpPr>
+          <p:cNvPr id="185" name="Google Shape;185;g33b2a244876_0_10:notes"/>
+          <p:cNvSpPr txBox="1"/>
+          <p:nvPr>
+            <p:ph idx="1" type="body"/>
+          </p:nvPr>
+        </p:nvSpPr>
+        <p:spPr>
+          <a:xfrm>
+            <a:off x="685800" y="4400550"/>
+            <a:ext cx="5486400" cy="3600600"/>
+          </a:xfrm>
+          <a:prstGeom prst="rect">
+            <a:avLst/>
+          </a:prstGeom>
+        </p:spPr>
+        <p:txBody>
+          <a:bodyPr anchorCtr="0" anchor="t" bIns="45700" lIns="91425" spcFirstLastPara="1" rIns="91425" wrap="square" tIns="45700">
+            <a:noAutofit/>
+          </a:bodyPr>
+          <a:lstStyle/>
+          <a:p>
+            <a:pPr indent="0" lvl="0" marL="0" rtl="0" algn="l">
+              <a:spcBef>
+                <a:spcPts val="0"/>
+              </a:spcBef>
+              <a:spcAft>
+                <a:spcPts val="0"/>
+              </a:spcAft>
+              <a:buNone/>
+            </a:pPr>
+            <a:r>
+              <a:t/>
+            </a:r>
+            <a:endParaRPr/>
+          </a:p>
+        </p:txBody>
+      </p:sp>
+      <p:sp>
+        <p:nvSpPr>
+          <p:cNvPr id="186" name="Google Shape;186;g33b2a244876_0_10:notes"/>
+          <p:cNvSpPr txBox="1"/>
+          <p:nvPr>
+            <p:ph idx="12" type="sldNum"/>
+          </p:nvPr>
+        </p:nvSpPr>
+        <p:spPr>
+          <a:xfrm>
+            <a:off x="3884613" y="8685213"/>
+            <a:ext cx="2971800" cy="458700"/>
+          </a:xfrm>
+          <a:prstGeom prst="rect">
+            <a:avLst/>
+          </a:prstGeom>
+        </p:spPr>
+        <p:txBody>
+          <a:bodyPr anchorCtr="0" anchor="b" bIns="45700" lIns="91425" spcFirstLastPara="1" rIns="91425" wrap="square" tIns="45700">
+            <a:noAutofit/>
+          </a:bodyPr>
+          <a:lstStyle/>
+          <a:p>
+            <a:pPr indent="0" lvl="0" marL="0" rtl="0" algn="r">
+              <a:spcBef>
+                <a:spcPts val="0"/>
+              </a:spcBef>
+              <a:spcAft>
+                <a:spcPts val="0"/>
+              </a:spcAft>
+              <a:buClr>
+                <a:srgbClr val="000000"/>
+              </a:buClr>
+              <a:buFont typeface="Arial"/>
+              <a:buNone/>
+            </a:pPr>
+            <a:fld id="{00000000-1234-1234-1234-123412341234}" type="slidenum">
+              <a:rPr lang="en-US"/>
+              <a:t>‹#›</a:t>
+            </a:fld>
+            <a:endParaRPr/>
+          </a:p>
+        </p:txBody>
+      </p:sp>
+    </p:spTree>
+  </p:cSld>
+  <p:clrMapOvr>
+    <a:masterClrMapping/>
+  </p:clrMapOvr>
+</p:notes>
+</file>
+
+<file path=ppt/notesSlides/notesSlide13.xml><?xml version="1.0" encoding="utf-8"?>
+<p:notes xmlns:a="http://schemas.openxmlformats.org/drawingml/2006/main" xmlns:r="http://schemas.openxmlformats.org/officeDocument/2006/relationships" xmlns:mc="http://schemas.openxmlformats.org/markup-compatibility/2006" xmlns:mv="urn:schemas-microsoft-com:mac:vml" xmlns:p="http://schemas.openxmlformats.org/presentationml/2006/main" xmlns:c="http://schemas.openxmlformats.org/drawingml/2006/chart" xmlns:dgm="http://schemas.openxmlformats.org/drawingml/2006/diagram" xmlns:o="urn:schemas-microsoft-com:office:office" xmlns:v="urn:schemas-microsoft-com:vml" xmlns:pvml="urn:schemas-microsoft-com:office:powerpoint" xmlns:com="http://schemas.openxmlformats.org/drawingml/2006/compatibility" xmlns:p14="http://schemas.microsoft.com/office/powerpoint/2010/main" xmlns:p15="http://schemas.microsoft.com/office/powerpoint/2012/main" xmlns:ahyp="http://schemas.microsoft.com/office/drawing/2018/hyperlinkcolor" showMasterPhAnim="0" showMasterSp="0">
+  <p:cSld>
+    <p:spTree>
+      <p:nvGrpSpPr>
+        <p:cNvPr id="190" name="Shape 190"/>
+        <p:cNvGrpSpPr/>
+        <p:nvPr/>
+      </p:nvGrpSpPr>
+      <p:grpSpPr>
+        <a:xfrm>
+          <a:off x="0" y="0"/>
+          <a:ext cx="0" cy="0"/>
+          <a:chOff x="0" y="0"/>
+          <a:chExt cx="0" cy="0"/>
+        </a:xfrm>
+      </p:grpSpPr>
+      <p:sp>
+        <p:nvSpPr>
+          <p:cNvPr id="191" name="Google Shape;191;g33b2a244876_0_16:notes"/>
+          <p:cNvSpPr/>
+          <p:nvPr>
+            <p:ph idx="2" type="sldImg"/>
+          </p:nvPr>
+        </p:nvSpPr>
+        <p:spPr>
+          <a:xfrm>
+            <a:off x="685800" y="1143000"/>
+            <a:ext cx="5486400" cy="3086100"/>
+          </a:xfrm>
+          <a:custGeom>
+            <a:rect b="b" l="l" r="r" t="t"/>
+            <a:pathLst>
+              <a:path extrusionOk="0" h="120000" w="120000">
+                <a:moveTo>
+                  <a:pt x="0" y="0"/>
+                </a:moveTo>
+                <a:lnTo>
+                  <a:pt x="120000" y="0"/>
+                </a:lnTo>
+                <a:lnTo>
+                  <a:pt x="120000" y="120000"/>
+                </a:lnTo>
+                <a:lnTo>
+                  <a:pt x="0" y="120000"/>
+                </a:lnTo>
+                <a:close/>
+              </a:path>
+            </a:pathLst>
+          </a:custGeom>
+        </p:spPr>
+      </p:sp>
+      <p:sp>
+        <p:nvSpPr>
+          <p:cNvPr id="192" name="Google Shape;192;g33b2a244876_0_16:notes"/>
+          <p:cNvSpPr txBox="1"/>
+          <p:nvPr>
+            <p:ph idx="1" type="body"/>
+          </p:nvPr>
+        </p:nvSpPr>
+        <p:spPr>
+          <a:xfrm>
+            <a:off x="685800" y="4400550"/>
+            <a:ext cx="5486400" cy="3600600"/>
+          </a:xfrm>
+          <a:prstGeom prst="rect">
+            <a:avLst/>
+          </a:prstGeom>
+        </p:spPr>
+        <p:txBody>
+          <a:bodyPr anchorCtr="0" anchor="t" bIns="45700" lIns="91425" spcFirstLastPara="1" rIns="91425" wrap="square" tIns="45700">
+            <a:noAutofit/>
+          </a:bodyPr>
+          <a:lstStyle/>
+          <a:p>
+            <a:pPr indent="0" lvl="0" marL="0" rtl="0" algn="l">
+              <a:spcBef>
+                <a:spcPts val="0"/>
+              </a:spcBef>
+              <a:spcAft>
+                <a:spcPts val="0"/>
+              </a:spcAft>
+              <a:buNone/>
+            </a:pPr>
+            <a:r>
+              <a:t/>
+            </a:r>
+            <a:endParaRPr/>
+          </a:p>
+        </p:txBody>
+      </p:sp>
+      <p:sp>
+        <p:nvSpPr>
+          <p:cNvPr id="193" name="Google Shape;193;g33b2a244876_0_16:notes"/>
+          <p:cNvSpPr txBox="1"/>
+          <p:nvPr>
+            <p:ph idx="12" type="sldNum"/>
+          </p:nvPr>
+        </p:nvSpPr>
+        <p:spPr>
+          <a:xfrm>
+            <a:off x="3884613" y="8685213"/>
+            <a:ext cx="2971800" cy="458700"/>
+          </a:xfrm>
+          <a:prstGeom prst="rect">
+            <a:avLst/>
+          </a:prstGeom>
+        </p:spPr>
+        <p:txBody>
+          <a:bodyPr anchorCtr="0" anchor="b" bIns="45700" lIns="91425" spcFirstLastPara="1" rIns="91425" wrap="square" tIns="45700">
+            <a:noAutofit/>
+          </a:bodyPr>
+          <a:lstStyle/>
+          <a:p>
+            <a:pPr indent="0" lvl="0" marL="0" rtl="0" algn="r">
+              <a:spcBef>
+                <a:spcPts val="0"/>
+              </a:spcBef>
+              <a:spcAft>
+                <a:spcPts val="0"/>
+              </a:spcAft>
+              <a:buClr>
+                <a:srgbClr val="000000"/>
+              </a:buClr>
+              <a:buFont typeface="Arial"/>
+              <a:buNone/>
+            </a:pPr>
+            <a:fld id="{00000000-1234-1234-1234-123412341234}" type="slidenum">
+              <a:rPr lang="en-US"/>
+              <a:t>‹#›</a:t>
+            </a:fld>
+            <a:endParaRPr/>
+          </a:p>
+        </p:txBody>
+      </p:sp>
+    </p:spTree>
+  </p:cSld>
+  <p:clrMapOvr>
+    <a:masterClrMapping/>
+  </p:clrMapOvr>
+</p:notes>
+</file>
+
+<file path=ppt/notesSlides/notesSlide14.xml><?xml version="1.0" encoding="utf-8"?>
+<p:notes xmlns:a="http://schemas.openxmlformats.org/drawingml/2006/main" xmlns:r="http://schemas.openxmlformats.org/officeDocument/2006/relationships" xmlns:mc="http://schemas.openxmlformats.org/markup-compatibility/2006" xmlns:mv="urn:schemas-microsoft-com:mac:vml" xmlns:p="http://schemas.openxmlformats.org/presentationml/2006/main" xmlns:c="http://schemas.openxmlformats.org/drawingml/2006/chart" xmlns:dgm="http://schemas.openxmlformats.org/drawingml/2006/diagram" xmlns:o="urn:schemas-microsoft-com:office:office" xmlns:v="urn:schemas-microsoft-com:vml" xmlns:pvml="urn:schemas-microsoft-com:office:powerpoint" xmlns:com="http://schemas.openxmlformats.org/drawingml/2006/compatibility" xmlns:p14="http://schemas.microsoft.com/office/powerpoint/2010/main" xmlns:p15="http://schemas.microsoft.com/office/powerpoint/2012/main" xmlns:ahyp="http://schemas.microsoft.com/office/drawing/2018/hyperlinkcolor" showMasterPhAnim="0" showMasterSp="0">
+  <p:cSld>
+    <p:spTree>
+      <p:nvGrpSpPr>
+        <p:cNvPr id="197" name="Shape 197"/>
+        <p:cNvGrpSpPr/>
+        <p:nvPr/>
+      </p:nvGrpSpPr>
+      <p:grpSpPr>
+        <a:xfrm>
+          <a:off x="0" y="0"/>
+          <a:ext cx="0" cy="0"/>
+          <a:chOff x="0" y="0"/>
+          <a:chExt cx="0" cy="0"/>
+        </a:xfrm>
+      </p:grpSpPr>
+      <p:sp>
+        <p:nvSpPr>
+          <p:cNvPr id="198" name="Google Shape;198;g33b2a244876_0_22:notes"/>
+          <p:cNvSpPr/>
+          <p:nvPr>
+            <p:ph idx="2" type="sldImg"/>
+          </p:nvPr>
+        </p:nvSpPr>
+        <p:spPr>
+          <a:xfrm>
+            <a:off x="685800" y="1143000"/>
+            <a:ext cx="5486400" cy="3086100"/>
+          </a:xfrm>
+          <a:custGeom>
+            <a:rect b="b" l="l" r="r" t="t"/>
+            <a:pathLst>
+              <a:path extrusionOk="0" h="120000" w="120000">
+                <a:moveTo>
+                  <a:pt x="0" y="0"/>
+                </a:moveTo>
+                <a:lnTo>
+                  <a:pt x="120000" y="0"/>
+                </a:lnTo>
+                <a:lnTo>
+                  <a:pt x="120000" y="120000"/>
+                </a:lnTo>
+                <a:lnTo>
+                  <a:pt x="0" y="120000"/>
+                </a:lnTo>
+                <a:close/>
+              </a:path>
+            </a:pathLst>
+          </a:custGeom>
+        </p:spPr>
+      </p:sp>
+      <p:sp>
+        <p:nvSpPr>
+          <p:cNvPr id="199" name="Google Shape;199;g33b2a244876_0_22:notes"/>
+          <p:cNvSpPr txBox="1"/>
+          <p:nvPr>
+            <p:ph idx="1" type="body"/>
+          </p:nvPr>
+        </p:nvSpPr>
+        <p:spPr>
+          <a:xfrm>
+            <a:off x="685800" y="4400550"/>
+            <a:ext cx="5486400" cy="3600600"/>
+          </a:xfrm>
+          <a:prstGeom prst="rect">
+            <a:avLst/>
+          </a:prstGeom>
+        </p:spPr>
+        <p:txBody>
+          <a:bodyPr anchorCtr="0" anchor="t" bIns="45700" lIns="91425" spcFirstLastPara="1" rIns="91425" wrap="square" tIns="45700">
+            <a:noAutofit/>
+          </a:bodyPr>
+          <a:lstStyle/>
+          <a:p>
+            <a:pPr indent="0" lvl="0" marL="0" rtl="0" algn="l">
+              <a:spcBef>
+                <a:spcPts val="0"/>
+              </a:spcBef>
+              <a:spcAft>
+                <a:spcPts val="0"/>
+              </a:spcAft>
+              <a:buNone/>
+            </a:pPr>
+            <a:r>
+              <a:t/>
+            </a:r>
+            <a:endParaRPr/>
+          </a:p>
+        </p:txBody>
+      </p:sp>
+      <p:sp>
+        <p:nvSpPr>
+          <p:cNvPr id="200" name="Google Shape;200;g33b2a244876_0_22:notes"/>
+          <p:cNvSpPr txBox="1"/>
+          <p:nvPr>
+            <p:ph idx="12" type="sldNum"/>
+          </p:nvPr>
+        </p:nvSpPr>
+        <p:spPr>
+          <a:xfrm>
+            <a:off x="3884613" y="8685213"/>
+            <a:ext cx="2971800" cy="458700"/>
+          </a:xfrm>
+          <a:prstGeom prst="rect">
+            <a:avLst/>
+          </a:prstGeom>
+        </p:spPr>
+        <p:txBody>
+          <a:bodyPr anchorCtr="0" anchor="b" bIns="45700" lIns="91425" spcFirstLastPara="1" rIns="91425" wrap="square" tIns="45700">
+            <a:noAutofit/>
+          </a:bodyPr>
+          <a:lstStyle/>
+          <a:p>
+            <a:pPr indent="0" lvl="0" marL="0" rtl="0" algn="r">
+              <a:spcBef>
+                <a:spcPts val="0"/>
+              </a:spcBef>
+              <a:spcAft>
+                <a:spcPts val="0"/>
+              </a:spcAft>
+              <a:buClr>
+                <a:srgbClr val="000000"/>
+              </a:buClr>
+              <a:buFont typeface="Arial"/>
+              <a:buNone/>
+            </a:pPr>
+            <a:fld id="{00000000-1234-1234-1234-123412341234}" type="slidenum">
+              <a:rPr lang="en-US"/>
+              <a:t>‹#›</a:t>
+            </a:fld>
+            <a:endParaRPr/>
+          </a:p>
+        </p:txBody>
+      </p:sp>
+    </p:spTree>
+  </p:cSld>
+  <p:clrMapOvr>
+    <a:masterClrMapping/>
+  </p:clrMapOvr>
+</p:notes>
+</file>
+
+<file path=ppt/notesSlides/notesSlide15.xml><?xml version="1.0" encoding="utf-8"?>
+<p:notes xmlns:a="http://schemas.openxmlformats.org/drawingml/2006/main" xmlns:r="http://schemas.openxmlformats.org/officeDocument/2006/relationships" xmlns:mc="http://schemas.openxmlformats.org/markup-compatibility/2006" xmlns:mv="urn:schemas-microsoft-com:mac:vml" xmlns:p="http://schemas.openxmlformats.org/presentationml/2006/main" xmlns:c="http://schemas.openxmlformats.org/drawingml/2006/chart" xmlns:dgm="http://schemas.openxmlformats.org/drawingml/2006/diagram" xmlns:o="urn:schemas-microsoft-com:office:office" xmlns:v="urn:schemas-microsoft-com:vml" xmlns:pvml="urn:schemas-microsoft-com:office:powerpoint" xmlns:com="http://schemas.openxmlformats.org/drawingml/2006/compatibility" xmlns:p14="http://schemas.microsoft.com/office/powerpoint/2010/main" xmlns:p15="http://schemas.microsoft.com/office/powerpoint/2012/main" xmlns:ahyp="http://schemas.microsoft.com/office/drawing/2018/hyperlinkcolor" showMasterPhAnim="0" showMasterSp="0">
+  <p:cSld>
+    <p:spTree>
+      <p:nvGrpSpPr>
+        <p:cNvPr id="204" name="Shape 204"/>
+        <p:cNvGrpSpPr/>
+        <p:nvPr/>
+      </p:nvGrpSpPr>
+      <p:grpSpPr>
+        <a:xfrm>
+          <a:off x="0" y="0"/>
+          <a:ext cx="0" cy="0"/>
+          <a:chOff x="0" y="0"/>
+          <a:chExt cx="0" cy="0"/>
+        </a:xfrm>
+      </p:grpSpPr>
+      <p:sp>
+        <p:nvSpPr>
+          <p:cNvPr id="205" name="Google Shape;205;g33b2a244876_0_28:notes"/>
+          <p:cNvSpPr/>
+          <p:nvPr>
+            <p:ph idx="2" type="sldImg"/>
+          </p:nvPr>
+        </p:nvSpPr>
+        <p:spPr>
+          <a:xfrm>
+            <a:off x="685800" y="1143000"/>
+            <a:ext cx="5486400" cy="3086100"/>
+          </a:xfrm>
+          <a:custGeom>
+            <a:rect b="b" l="l" r="r" t="t"/>
+            <a:pathLst>
+              <a:path extrusionOk="0" h="120000" w="120000">
+                <a:moveTo>
+                  <a:pt x="0" y="0"/>
+                </a:moveTo>
+                <a:lnTo>
+                  <a:pt x="120000" y="0"/>
+                </a:lnTo>
+                <a:lnTo>
+                  <a:pt x="120000" y="120000"/>
+                </a:lnTo>
+                <a:lnTo>
+                  <a:pt x="0" y="120000"/>
+                </a:lnTo>
+                <a:close/>
+              </a:path>
+            </a:pathLst>
+          </a:custGeom>
+        </p:spPr>
+      </p:sp>
+      <p:sp>
+        <p:nvSpPr>
+          <p:cNvPr id="206" name="Google Shape;206;g33b2a244876_0_28:notes"/>
+          <p:cNvSpPr txBox="1"/>
+          <p:nvPr>
+            <p:ph idx="1" type="body"/>
+          </p:nvPr>
+        </p:nvSpPr>
+        <p:spPr>
+          <a:xfrm>
+            <a:off x="685800" y="4400550"/>
+            <a:ext cx="5486400" cy="3600600"/>
+          </a:xfrm>
+          <a:prstGeom prst="rect">
+            <a:avLst/>
+          </a:prstGeom>
+        </p:spPr>
+        <p:txBody>
+          <a:bodyPr anchorCtr="0" anchor="t" bIns="45700" lIns="91425" spcFirstLastPara="1" rIns="91425" wrap="square" tIns="45700">
+            <a:noAutofit/>
+          </a:bodyPr>
+          <a:lstStyle/>
+          <a:p>
+            <a:pPr indent="0" lvl="0" marL="0" rtl="0" algn="l">
+              <a:spcBef>
+                <a:spcPts val="0"/>
+              </a:spcBef>
+              <a:spcAft>
+                <a:spcPts val="0"/>
+              </a:spcAft>
+              <a:buNone/>
+            </a:pPr>
+            <a:r>
+              <a:t/>
+            </a:r>
+            <a:endParaRPr/>
+          </a:p>
+        </p:txBody>
+      </p:sp>
+      <p:sp>
+        <p:nvSpPr>
+          <p:cNvPr id="207" name="Google Shape;207;g33b2a244876_0_28:notes"/>
+          <p:cNvSpPr txBox="1"/>
+          <p:nvPr>
+            <p:ph idx="12" type="sldNum"/>
+          </p:nvPr>
+        </p:nvSpPr>
+        <p:spPr>
+          <a:xfrm>
+            <a:off x="3884613" y="8685213"/>
+            <a:ext cx="2971800" cy="458700"/>
+          </a:xfrm>
+          <a:prstGeom prst="rect">
+            <a:avLst/>
+          </a:prstGeom>
+        </p:spPr>
+        <p:txBody>
+          <a:bodyPr anchorCtr="0" anchor="b" bIns="45700" lIns="91425" spcFirstLastPara="1" rIns="91425" wrap="square" tIns="45700">
+            <a:noAutofit/>
+          </a:bodyPr>
+          <a:lstStyle/>
+          <a:p>
+            <a:pPr indent="0" lvl="0" marL="0" rtl="0" algn="r">
+              <a:spcBef>
+                <a:spcPts val="0"/>
+              </a:spcBef>
+              <a:spcAft>
+                <a:spcPts val="0"/>
+              </a:spcAft>
+              <a:buClr>
+                <a:srgbClr val="000000"/>
+              </a:buClr>
+              <a:buFont typeface="Arial"/>
+              <a:buNone/>
+            </a:pPr>
+            <a:fld id="{00000000-1234-1234-1234-123412341234}" type="slidenum">
+              <a:rPr lang="en-US"/>
+              <a:t>‹#›</a:t>
+            </a:fld>
+            <a:endParaRPr/>
+          </a:p>
+        </p:txBody>
+      </p:sp>
+    </p:spTree>
+  </p:cSld>
+  <p:clrMapOvr>
+    <a:masterClrMapping/>
+  </p:clrMapOvr>
+</p:notes>
+</file>
+
+<file path=ppt/notesSlides/notesSlide16.xml><?xml version="1.0" encoding="utf-8"?>
+<p:notes xmlns:a="http://schemas.openxmlformats.org/drawingml/2006/main" xmlns:r="http://schemas.openxmlformats.org/officeDocument/2006/relationships" xmlns:mc="http://schemas.openxmlformats.org/markup-compatibility/2006" xmlns:mv="urn:schemas-microsoft-com:mac:vml" xmlns:p="http://schemas.openxmlformats.org/presentationml/2006/main" xmlns:c="http://schemas.openxmlformats.org/drawingml/2006/chart" xmlns:dgm="http://schemas.openxmlformats.org/drawingml/2006/diagram" xmlns:o="urn:schemas-microsoft-com:office:office" xmlns:v="urn:schemas-microsoft-com:vml" xmlns:pvml="urn:schemas-microsoft-com:office:powerpoint" xmlns:com="http://schemas.openxmlformats.org/drawingml/2006/compatibility" xmlns:p14="http://schemas.microsoft.com/office/powerpoint/2010/main" xmlns:p15="http://schemas.microsoft.com/office/powerpoint/2012/main" xmlns:ahyp="http://schemas.microsoft.com/office/drawing/2018/hyperlinkcolor" showMasterPhAnim="0" showMasterSp="0">
+  <p:cSld>
+    <p:spTree>
+      <p:nvGrpSpPr>
+        <p:cNvPr id="211" name="Shape 211"/>
+        <p:cNvGrpSpPr/>
+        <p:nvPr/>
+      </p:nvGrpSpPr>
+      <p:grpSpPr>
+        <a:xfrm>
+          <a:off x="0" y="0"/>
+          <a:ext cx="0" cy="0"/>
+          <a:chOff x="0" y="0"/>
+          <a:chExt cx="0" cy="0"/>
+        </a:xfrm>
+      </p:grpSpPr>
+      <p:sp>
+        <p:nvSpPr>
+          <p:cNvPr id="212" name="Google Shape;212;g33b2a244876_1_0:notes"/>
+          <p:cNvSpPr/>
+          <p:nvPr>
+            <p:ph idx="2" type="sldImg"/>
+          </p:nvPr>
+        </p:nvSpPr>
+        <p:spPr>
+          <a:xfrm>
+            <a:off x="685800" y="1143000"/>
+            <a:ext cx="5486400" cy="3086100"/>
+          </a:xfrm>
+          <a:custGeom>
+            <a:rect b="b" l="l" r="r" t="t"/>
+            <a:pathLst>
+              <a:path extrusionOk="0" h="120000" w="120000">
+                <a:moveTo>
+                  <a:pt x="0" y="0"/>
+                </a:moveTo>
+                <a:lnTo>
+                  <a:pt x="120000" y="0"/>
+                </a:lnTo>
+                <a:lnTo>
+                  <a:pt x="120000" y="120000"/>
+                </a:lnTo>
+                <a:lnTo>
+                  <a:pt x="0" y="120000"/>
+                </a:lnTo>
+                <a:close/>
+              </a:path>
+            </a:pathLst>
+          </a:custGeom>
+        </p:spPr>
+      </p:sp>
+      <p:sp>
+        <p:nvSpPr>
+          <p:cNvPr id="213" name="Google Shape;213;g33b2a244876_1_0:notes"/>
+          <p:cNvSpPr txBox="1"/>
+          <p:nvPr>
+            <p:ph idx="1" type="body"/>
+          </p:nvPr>
+        </p:nvSpPr>
+        <p:spPr>
+          <a:xfrm>
+            <a:off x="685800" y="4400550"/>
+            <a:ext cx="5486400" cy="3600600"/>
+          </a:xfrm>
+          <a:prstGeom prst="rect">
+            <a:avLst/>
+          </a:prstGeom>
+        </p:spPr>
+        <p:txBody>
+          <a:bodyPr anchorCtr="0" anchor="t" bIns="45700" lIns="91425" spcFirstLastPara="1" rIns="91425" wrap="square" tIns="45700">
+            <a:noAutofit/>
+          </a:bodyPr>
+          <a:lstStyle/>
+          <a:p>
+            <a:pPr indent="0" lvl="0" marL="0" rtl="0" algn="l">
+              <a:spcBef>
+                <a:spcPts val="0"/>
+              </a:spcBef>
+              <a:spcAft>
+                <a:spcPts val="0"/>
+              </a:spcAft>
+              <a:buNone/>
+            </a:pPr>
+            <a:r>
+              <a:t/>
+            </a:r>
+            <a:endParaRPr/>
+          </a:p>
+        </p:txBody>
+      </p:sp>
+      <p:sp>
+        <p:nvSpPr>
+          <p:cNvPr id="214" name="Google Shape;214;g33b2a244876_1_0:notes"/>
+          <p:cNvSpPr txBox="1"/>
+          <p:nvPr>
+            <p:ph idx="12" type="sldNum"/>
+          </p:nvPr>
+        </p:nvSpPr>
+        <p:spPr>
+          <a:xfrm>
+            <a:off x="3884613" y="8685213"/>
+            <a:ext cx="2971800" cy="458700"/>
+          </a:xfrm>
+          <a:prstGeom prst="rect">
+            <a:avLst/>
+          </a:prstGeom>
+        </p:spPr>
+        <p:txBody>
+          <a:bodyPr anchorCtr="0" anchor="b" bIns="45700" lIns="91425" spcFirstLastPara="1" rIns="91425" wrap="square" tIns="45700">
+            <a:noAutofit/>
+          </a:bodyPr>
+          <a:lstStyle/>
+          <a:p>
+            <a:pPr indent="0" lvl="0" marL="0" rtl="0" algn="r">
+              <a:spcBef>
+                <a:spcPts val="0"/>
+              </a:spcBef>
+              <a:spcAft>
+                <a:spcPts val="0"/>
+              </a:spcAft>
+              <a:buClr>
+                <a:srgbClr val="000000"/>
+              </a:buClr>
+              <a:buFont typeface="Arial"/>
+              <a:buNone/>
+            </a:pPr>
+            <a:fld id="{00000000-1234-1234-1234-123412341234}" type="slidenum">
+              <a:rPr lang="en-US"/>
+              <a:t>‹#›</a:t>
+            </a:fld>
+            <a:endParaRPr/>
+          </a:p>
+        </p:txBody>
+      </p:sp>
+    </p:spTree>
+  </p:cSld>
+  <p:clrMapOvr>
+    <a:masterClrMapping/>
+  </p:clrMapOvr>
+</p:notes>
+</file>
+
+<file path=ppt/notesSlides/notesSlide17.xml><?xml version="1.0" encoding="utf-8"?>
+<p:notes xmlns:a="http://schemas.openxmlformats.org/drawingml/2006/main" xmlns:r="http://schemas.openxmlformats.org/officeDocument/2006/relationships" xmlns:mc="http://schemas.openxmlformats.org/markup-compatibility/2006" xmlns:mv="urn:schemas-microsoft-com:mac:vml" xmlns:p="http://schemas.openxmlformats.org/presentationml/2006/main" xmlns:c="http://schemas.openxmlformats.org/drawingml/2006/chart" xmlns:dgm="http://schemas.openxmlformats.org/drawingml/2006/diagram" xmlns:o="urn:schemas-microsoft-com:office:office" xmlns:v="urn:schemas-microsoft-com:vml" xmlns:pvml="urn:schemas-microsoft-com:office:powerpoint" xmlns:com="http://schemas.openxmlformats.org/drawingml/2006/compatibility" xmlns:p14="http://schemas.microsoft.com/office/powerpoint/2010/main" xmlns:p15="http://schemas.microsoft.com/office/powerpoint/2012/main" xmlns:ahyp="http://schemas.microsoft.com/office/drawing/2018/hyperlinkcolor" showMasterPhAnim="0" showMasterSp="0">
+  <p:cSld>
+    <p:spTree>
+      <p:nvGrpSpPr>
+        <p:cNvPr id="219" name="Shape 219"/>
+        <p:cNvGrpSpPr/>
+        <p:nvPr/>
+      </p:nvGrpSpPr>
+      <p:grpSpPr>
+        <a:xfrm>
+          <a:off x="0" y="0"/>
+          <a:ext cx="0" cy="0"/>
+          <a:chOff x="0" y="0"/>
+          <a:chExt cx="0" cy="0"/>
+        </a:xfrm>
+      </p:grpSpPr>
+      <p:sp>
+        <p:nvSpPr>
+          <p:cNvPr id="220" name="Google Shape;220;g33b2a244876_1_7:notes"/>
+          <p:cNvSpPr/>
+          <p:nvPr>
+            <p:ph idx="2" type="sldImg"/>
+          </p:nvPr>
+        </p:nvSpPr>
+        <p:spPr>
+          <a:xfrm>
+            <a:off x="685800" y="1143000"/>
+            <a:ext cx="5486400" cy="3086100"/>
+          </a:xfrm>
+          <a:custGeom>
+            <a:rect b="b" l="l" r="r" t="t"/>
+            <a:pathLst>
+              <a:path extrusionOk="0" h="120000" w="120000">
+                <a:moveTo>
+                  <a:pt x="0" y="0"/>
+                </a:moveTo>
+                <a:lnTo>
+                  <a:pt x="120000" y="0"/>
+                </a:lnTo>
+                <a:lnTo>
+                  <a:pt x="120000" y="120000"/>
+                </a:lnTo>
+                <a:lnTo>
+                  <a:pt x="0" y="120000"/>
+                </a:lnTo>
+                <a:close/>
+              </a:path>
+            </a:pathLst>
+          </a:custGeom>
+        </p:spPr>
+      </p:sp>
+      <p:sp>
+        <p:nvSpPr>
+          <p:cNvPr id="221" name="Google Shape;221;g33b2a244876_1_7:notes"/>
+          <p:cNvSpPr txBox="1"/>
+          <p:nvPr>
+            <p:ph idx="1" type="body"/>
+          </p:nvPr>
+        </p:nvSpPr>
+        <p:spPr>
+          <a:xfrm>
+            <a:off x="685800" y="4400550"/>
+            <a:ext cx="5486400" cy="3600600"/>
+          </a:xfrm>
+          <a:prstGeom prst="rect">
+            <a:avLst/>
+          </a:prstGeom>
+        </p:spPr>
+        <p:txBody>
+          <a:bodyPr anchorCtr="0" anchor="t" bIns="45700" lIns="91425" spcFirstLastPara="1" rIns="91425" wrap="square" tIns="45700">
+            <a:noAutofit/>
+          </a:bodyPr>
+          <a:lstStyle/>
+          <a:p>
+            <a:pPr indent="0" lvl="0" marL="0" rtl="0" algn="l">
+              <a:spcBef>
+                <a:spcPts val="0"/>
+              </a:spcBef>
+              <a:spcAft>
+                <a:spcPts val="0"/>
+              </a:spcAft>
+              <a:buNone/>
+            </a:pPr>
+            <a:r>
+              <a:t/>
+            </a:r>
+            <a:endParaRPr/>
+          </a:p>
+        </p:txBody>
+      </p:sp>
+      <p:sp>
+        <p:nvSpPr>
+          <p:cNvPr id="222" name="Google Shape;222;g33b2a244876_1_7:notes"/>
+          <p:cNvSpPr txBox="1"/>
+          <p:nvPr>
+            <p:ph idx="12" type="sldNum"/>
+          </p:nvPr>
+        </p:nvSpPr>
+        <p:spPr>
+          <a:xfrm>
+            <a:off x="3884613" y="8685213"/>
+            <a:ext cx="2971800" cy="458700"/>
+          </a:xfrm>
+          <a:prstGeom prst="rect">
+            <a:avLst/>
+          </a:prstGeom>
+        </p:spPr>
+        <p:txBody>
+          <a:bodyPr anchorCtr="0" anchor="b" bIns="45700" lIns="91425" spcFirstLastPara="1" rIns="91425" wrap="square" tIns="45700">
+            <a:noAutofit/>
+          </a:bodyPr>
+          <a:lstStyle/>
+          <a:p>
+            <a:pPr indent="0" lvl="0" marL="0" rtl="0" algn="r">
+              <a:spcBef>
+                <a:spcPts val="0"/>
+              </a:spcBef>
+              <a:spcAft>
+                <a:spcPts val="0"/>
+              </a:spcAft>
+              <a:buClr>
+                <a:srgbClr val="000000"/>
+              </a:buClr>
+              <a:buFont typeface="Arial"/>
+              <a:buNone/>
+            </a:pPr>
+            <a:fld id="{00000000-1234-1234-1234-123412341234}" type="slidenum">
+              <a:rPr lang="en-US"/>
+              <a:t>‹#›</a:t>
+            </a:fld>
+            <a:endParaRPr/>
+          </a:p>
+        </p:txBody>
+      </p:sp>
+    </p:spTree>
+  </p:cSld>
+  <p:clrMapOvr>
+    <a:masterClrMapping/>
+  </p:clrMapOvr>
+</p:notes>
+</file>
+
+<file path=ppt/notesSlides/notesSlide18.xml><?xml version="1.0" encoding="utf-8"?>
+<p:notes xmlns:a="http://schemas.openxmlformats.org/drawingml/2006/main" xmlns:r="http://schemas.openxmlformats.org/officeDocument/2006/relationships" xmlns:mc="http://schemas.openxmlformats.org/markup-compatibility/2006" xmlns:mv="urn:schemas-microsoft-com:mac:vml" xmlns:p="http://schemas.openxmlformats.org/presentationml/2006/main" xmlns:c="http://schemas.openxmlformats.org/drawingml/2006/chart" xmlns:dgm="http://schemas.openxmlformats.org/drawingml/2006/diagram" xmlns:o="urn:schemas-microsoft-com:office:office" xmlns:v="urn:schemas-microsoft-com:vml" xmlns:pvml="urn:schemas-microsoft-com:office:powerpoint" xmlns:com="http://schemas.openxmlformats.org/drawingml/2006/compatibility" xmlns:p14="http://schemas.microsoft.com/office/powerpoint/2010/main" xmlns:p15="http://schemas.microsoft.com/office/powerpoint/2012/main" xmlns:ahyp="http://schemas.microsoft.com/office/drawing/2018/hyperlinkcolor" showMasterPhAnim="0" showMasterSp="0">
+  <p:cSld>
+    <p:spTree>
+      <p:nvGrpSpPr>
+        <p:cNvPr id="227" name="Shape 227"/>
+        <p:cNvGrpSpPr/>
+        <p:nvPr/>
+      </p:nvGrpSpPr>
+      <p:grpSpPr>
+        <a:xfrm>
+          <a:off x="0" y="0"/>
+          <a:ext cx="0" cy="0"/>
+          <a:chOff x="0" y="0"/>
+          <a:chExt cx="0" cy="0"/>
+        </a:xfrm>
+      </p:grpSpPr>
+      <p:sp>
+        <p:nvSpPr>
+          <p:cNvPr id="228" name="Google Shape;228;g33b2a244876_1_17:notes"/>
+          <p:cNvSpPr/>
+          <p:nvPr>
+            <p:ph idx="2" type="sldImg"/>
+          </p:nvPr>
+        </p:nvSpPr>
+        <p:spPr>
+          <a:xfrm>
+            <a:off x="685800" y="1143000"/>
+            <a:ext cx="5486400" cy="3086100"/>
+          </a:xfrm>
+          <a:custGeom>
+            <a:rect b="b" l="l" r="r" t="t"/>
+            <a:pathLst>
+              <a:path extrusionOk="0" h="120000" w="120000">
+                <a:moveTo>
+                  <a:pt x="0" y="0"/>
+                </a:moveTo>
+                <a:lnTo>
+                  <a:pt x="120000" y="0"/>
+                </a:lnTo>
+                <a:lnTo>
+                  <a:pt x="120000" y="120000"/>
+                </a:lnTo>
+                <a:lnTo>
+                  <a:pt x="0" y="120000"/>
+                </a:lnTo>
+                <a:close/>
+              </a:path>
+            </a:pathLst>
+          </a:custGeom>
+        </p:spPr>
+      </p:sp>
+      <p:sp>
+        <p:nvSpPr>
+          <p:cNvPr id="229" name="Google Shape;229;g33b2a244876_1_17:notes"/>
+          <p:cNvSpPr txBox="1"/>
+          <p:nvPr>
+            <p:ph idx="1" type="body"/>
+          </p:nvPr>
+        </p:nvSpPr>
+        <p:spPr>
+          <a:xfrm>
+            <a:off x="685800" y="4400550"/>
+            <a:ext cx="5486400" cy="3600600"/>
+          </a:xfrm>
+          <a:prstGeom prst="rect">
+            <a:avLst/>
+          </a:prstGeom>
+        </p:spPr>
+        <p:txBody>
+          <a:bodyPr anchorCtr="0" anchor="t" bIns="45700" lIns="91425" spcFirstLastPara="1" rIns="91425" wrap="square" tIns="45700">
+            <a:noAutofit/>
+          </a:bodyPr>
+          <a:lstStyle/>
+          <a:p>
+            <a:pPr indent="0" lvl="0" marL="0" rtl="0" algn="l">
+              <a:spcBef>
+                <a:spcPts val="0"/>
+              </a:spcBef>
+              <a:spcAft>
+                <a:spcPts val="0"/>
+              </a:spcAft>
+              <a:buNone/>
+            </a:pPr>
+            <a:r>
+              <a:t/>
+            </a:r>
+            <a:endParaRPr/>
+          </a:p>
+        </p:txBody>
+      </p:sp>
+      <p:sp>
+        <p:nvSpPr>
+          <p:cNvPr id="230" name="Google Shape;230;g33b2a244876_1_17:notes"/>
+          <p:cNvSpPr txBox="1"/>
+          <p:nvPr>
+            <p:ph idx="12" type="sldNum"/>
+          </p:nvPr>
+        </p:nvSpPr>
+        <p:spPr>
+          <a:xfrm>
+            <a:off x="3884613" y="8685213"/>
+            <a:ext cx="2971800" cy="458700"/>
+          </a:xfrm>
+          <a:prstGeom prst="rect">
+            <a:avLst/>
+          </a:prstGeom>
+        </p:spPr>
+        <p:txBody>
+          <a:bodyPr anchorCtr="0" anchor="b" bIns="45700" lIns="91425" spcFirstLastPara="1" rIns="91425" wrap="square" tIns="45700">
+            <a:noAutofit/>
+          </a:bodyPr>
+          <a:lstStyle/>
+          <a:p>
+            <a:pPr indent="0" lvl="0" marL="0" rtl="0" algn="r">
+              <a:spcBef>
+                <a:spcPts val="0"/>
+              </a:spcBef>
+              <a:spcAft>
+                <a:spcPts val="0"/>
+              </a:spcAft>
+              <a:buClr>
+                <a:srgbClr val="000000"/>
+              </a:buClr>
+              <a:buFont typeface="Arial"/>
+              <a:buNone/>
+            </a:pPr>
+            <a:fld id="{00000000-1234-1234-1234-123412341234}" type="slidenum">
+              <a:rPr lang="en-US"/>
+              <a:t>‹#›</a:t>
+            </a:fld>
+            <a:endParaRPr/>
+          </a:p>
+        </p:txBody>
+      </p:sp>
+    </p:spTree>
+  </p:cSld>
+  <p:clrMapOvr>
+    <a:masterClrMapping/>
+  </p:clrMapOvr>
+</p:notes>
+</file>
+
+<file path=ppt/notesSlides/notesSlide19.xml><?xml version="1.0" encoding="utf-8"?>
+<p:notes xmlns:a="http://schemas.openxmlformats.org/drawingml/2006/main" xmlns:r="http://schemas.openxmlformats.org/officeDocument/2006/relationships" xmlns:mc="http://schemas.openxmlformats.org/markup-compatibility/2006" xmlns:mv="urn:schemas-microsoft-com:mac:vml" xmlns:p="http://schemas.openxmlformats.org/presentationml/2006/main" xmlns:c="http://schemas.openxmlformats.org/drawingml/2006/chart" xmlns:dgm="http://schemas.openxmlformats.org/drawingml/2006/diagram" xmlns:o="urn:schemas-microsoft-com:office:office" xmlns:v="urn:schemas-microsoft-com:vml" xmlns:pvml="urn:schemas-microsoft-com:office:powerpoint" xmlns:com="http://schemas.openxmlformats.org/drawingml/2006/compatibility" xmlns:p14="http://schemas.microsoft.com/office/powerpoint/2010/main" xmlns:p15="http://schemas.microsoft.com/office/powerpoint/2012/main" xmlns:ahyp="http://schemas.microsoft.com/office/drawing/2018/hyperlinkcolor" showMasterPhAnim="0" showMasterSp="0">
+  <p:cSld>
+    <p:spTree>
+      <p:nvGrpSpPr>
+        <p:cNvPr id="234" name="Shape 234"/>
+        <p:cNvGrpSpPr/>
+        <p:nvPr/>
+      </p:nvGrpSpPr>
+      <p:grpSpPr>
+        <a:xfrm>
+          <a:off x="0" y="0"/>
+          <a:ext cx="0" cy="0"/>
+          <a:chOff x="0" y="0"/>
+          <a:chExt cx="0" cy="0"/>
+        </a:xfrm>
+      </p:grpSpPr>
+      <p:sp>
+        <p:nvSpPr>
+          <p:cNvPr id="235" name="Google Shape;235;g33b2a244876_1_23:notes"/>
+          <p:cNvSpPr/>
+          <p:nvPr>
+            <p:ph idx="2" type="sldImg"/>
+          </p:nvPr>
+        </p:nvSpPr>
+        <p:spPr>
+          <a:xfrm>
+            <a:off x="685800" y="1143000"/>
+            <a:ext cx="5486400" cy="3086100"/>
+          </a:xfrm>
+          <a:custGeom>
+            <a:rect b="b" l="l" r="r" t="t"/>
+            <a:pathLst>
+              <a:path extrusionOk="0" h="120000" w="120000">
+                <a:moveTo>
+                  <a:pt x="0" y="0"/>
+                </a:moveTo>
+                <a:lnTo>
+                  <a:pt x="120000" y="0"/>
+                </a:lnTo>
+                <a:lnTo>
+                  <a:pt x="120000" y="120000"/>
+                </a:lnTo>
+                <a:lnTo>
+                  <a:pt x="0" y="120000"/>
+                </a:lnTo>
+                <a:close/>
+              </a:path>
+            </a:pathLst>
+          </a:custGeom>
+        </p:spPr>
+      </p:sp>
+      <p:sp>
+        <p:nvSpPr>
+          <p:cNvPr id="236" name="Google Shape;236;g33b2a244876_1_23:notes"/>
+          <p:cNvSpPr txBox="1"/>
+          <p:nvPr>
+            <p:ph idx="1" type="body"/>
+          </p:nvPr>
+        </p:nvSpPr>
+        <p:spPr>
+          <a:xfrm>
+            <a:off x="685800" y="4400550"/>
+            <a:ext cx="5486400" cy="3600600"/>
+          </a:xfrm>
+          <a:prstGeom prst="rect">
+            <a:avLst/>
+          </a:prstGeom>
+        </p:spPr>
+        <p:txBody>
+          <a:bodyPr anchorCtr="0" anchor="t" bIns="45700" lIns="91425" spcFirstLastPara="1" rIns="91425" wrap="square" tIns="45700">
+            <a:noAutofit/>
+          </a:bodyPr>
+          <a:lstStyle/>
+          <a:p>
+            <a:pPr indent="0" lvl="0" marL="0" rtl="0" algn="l">
+              <a:spcBef>
+                <a:spcPts val="0"/>
+              </a:spcBef>
+              <a:spcAft>
+                <a:spcPts val="0"/>
+              </a:spcAft>
+              <a:buNone/>
+            </a:pPr>
+            <a:r>
+              <a:t/>
+            </a:r>
+            <a:endParaRPr/>
+          </a:p>
+        </p:txBody>
+      </p:sp>
+      <p:sp>
+        <p:nvSpPr>
+          <p:cNvPr id="237" name="Google Shape;237;g33b2a244876_1_23:notes"/>
+          <p:cNvSpPr txBox="1"/>
+          <p:nvPr>
+            <p:ph idx="12" type="sldNum"/>
+          </p:nvPr>
+        </p:nvSpPr>
+        <p:spPr>
+          <a:xfrm>
+            <a:off x="3884613" y="8685213"/>
+            <a:ext cx="2971800" cy="458700"/>
+          </a:xfrm>
+          <a:prstGeom prst="rect">
+            <a:avLst/>
+          </a:prstGeom>
+        </p:spPr>
+        <p:txBody>
+          <a:bodyPr anchorCtr="0" anchor="b" bIns="45700" lIns="91425" spcFirstLastPara="1" rIns="91425" wrap="square" tIns="45700">
+            <a:noAutofit/>
+          </a:bodyPr>
+          <a:lstStyle/>
+          <a:p>
+            <a:pPr indent="0" lvl="0" marL="0" rtl="0" algn="r">
+              <a:spcBef>
+                <a:spcPts val="0"/>
+              </a:spcBef>
+              <a:spcAft>
+                <a:spcPts val="0"/>
+              </a:spcAft>
+              <a:buClr>
+                <a:srgbClr val="000000"/>
+              </a:buClr>
+              <a:buFont typeface="Arial"/>
+              <a:buNone/>
+            </a:pPr>
+            <a:fld id="{00000000-1234-1234-1234-123412341234}" type="slidenum">
+              <a:rPr lang="en-US"/>
+              <a:t>‹#›</a:t>
+            </a:fld>
+            <a:endParaRPr/>
+          </a:p>
+        </p:txBody>
+      </p:sp>
+    </p:spTree>
+  </p:cSld>
+  <p:clrMapOvr>
+    <a:masterClrMapping/>
+  </p:clrMapOvr>
+</p:notes>
+</file>
+
+<file path=ppt/notesSlides/notesSlide2.xml><?xml version="1.0" encoding="utf-8"?>
+<p:notes xmlns:a="http://schemas.openxmlformats.org/drawingml/2006/main" xmlns:r="http://schemas.openxmlformats.org/officeDocument/2006/relationships" xmlns:mc="http://schemas.openxmlformats.org/markup-compatibility/2006" xmlns:mv="urn:schemas-microsoft-com:mac:vml" xmlns:p="http://schemas.openxmlformats.org/presentationml/2006/main" xmlns:c="http://schemas.openxmlformats.org/drawingml/2006/chart" xmlns:dgm="http://schemas.openxmlformats.org/drawingml/2006/diagram" xmlns:o="urn:schemas-microsoft-com:office:office" xmlns:v="urn:schemas-microsoft-com:vml" xmlns:pvml="urn:schemas-microsoft-com:office:powerpoint" xmlns:com="http://schemas.openxmlformats.org/drawingml/2006/compatibility" xmlns:p14="http://schemas.microsoft.com/office/powerpoint/2010/main" xmlns:p15="http://schemas.microsoft.com/office/powerpoint/2012/main" xmlns:ahyp="http://schemas.microsoft.com/office/drawing/2018/hyperlinkcolor" showMasterPhAnim="0" showMasterSp="0">
+  <p:cSld>
+    <p:spTree>
+      <p:nvGrpSpPr>
+        <p:cNvPr id="68" name="Shape 68"/>
+        <p:cNvGrpSpPr/>
+        <p:nvPr/>
+      </p:nvGrpSpPr>
+      <p:grpSpPr>
+        <a:xfrm>
+          <a:off x="0" y="0"/>
+          <a:ext cx="0" cy="0"/>
+          <a:chOff x="0" y="0"/>
+          <a:chExt cx="0" cy="0"/>
+        </a:xfrm>
+      </p:grpSpPr>
+      <p:sp>
+        <p:nvSpPr>
+          <p:cNvPr id="69" name="Google Shape;69;g33b135bed8a_2_0:notes"/>
+          <p:cNvSpPr txBox="1"/>
+          <p:nvPr>
+            <p:ph idx="1" type="body"/>
+          </p:nvPr>
+        </p:nvSpPr>
+        <p:spPr>
+          <a:xfrm>
+            <a:off x="822960" y="7040880"/>
+            <a:ext cx="6583800" cy="5760900"/>
+          </a:xfrm>
+          <a:prstGeom prst="rect">
+            <a:avLst/>
+          </a:prstGeom>
+        </p:spPr>
+        <p:txBody>
+          <a:bodyPr anchorCtr="0" anchor="t" bIns="45700" lIns="91425" spcFirstLastPara="1" rIns="91425" wrap="square" tIns="45700">
+            <a:noAutofit/>
+          </a:bodyPr>
+          <a:lstStyle/>
+          <a:p>
+            <a:pPr indent="0" lvl="0" marL="0" rtl="0" algn="l">
+              <a:spcBef>
+                <a:spcPts val="0"/>
+              </a:spcBef>
+              <a:spcAft>
+                <a:spcPts val="0"/>
+              </a:spcAft>
+              <a:buNone/>
+            </a:pPr>
+            <a:r>
+              <a:t/>
+            </a:r>
+            <a:endParaRPr/>
+          </a:p>
+        </p:txBody>
+      </p:sp>
+      <p:sp>
+        <p:nvSpPr>
+          <p:cNvPr id="70" name="Google Shape;70;g33b135bed8a_2_0:notes"/>
+          <p:cNvSpPr/>
+          <p:nvPr>
+            <p:ph idx="2" type="sldImg"/>
+          </p:nvPr>
+        </p:nvSpPr>
+        <p:spPr>
+          <a:xfrm>
+            <a:off x="822960" y="1828800"/>
+            <a:ext cx="6583800" cy="4937700"/>
+          </a:xfrm>
+          <a:custGeom>
+            <a:rect b="b" l="l" r="r" t="t"/>
+            <a:pathLst>
+              <a:path extrusionOk="0" h="120000" w="120000">
+                <a:moveTo>
+                  <a:pt x="0" y="0"/>
+                </a:moveTo>
+                <a:lnTo>
+                  <a:pt x="120000" y="0"/>
+                </a:lnTo>
+                <a:lnTo>
+                  <a:pt x="120000" y="120000"/>
+                </a:lnTo>
+                <a:lnTo>
+                  <a:pt x="0" y="120000"/>
+                </a:lnTo>
+                <a:close/>
+              </a:path>
+            </a:pathLst>
+          </a:custGeom>
+        </p:spPr>
+      </p:sp>
+    </p:spTree>
+  </p:cSld>
+  <p:clrMapOvr>
+    <a:masterClrMapping/>
+  </p:clrMapOvr>
+</p:notes>
+</file>
+
+<file path=ppt/notesSlides/notesSlide20.xml><?xml version="1.0" encoding="utf-8"?>
+<p:notes xmlns:a="http://schemas.openxmlformats.org/drawingml/2006/main" xmlns:r="http://schemas.openxmlformats.org/officeDocument/2006/relationships" xmlns:mc="http://schemas.openxmlformats.org/markup-compatibility/2006" xmlns:mv="urn:schemas-microsoft-com:mac:vml" xmlns:p="http://schemas.openxmlformats.org/presentationml/2006/main" xmlns:c="http://schemas.openxmlformats.org/drawingml/2006/chart" xmlns:dgm="http://schemas.openxmlformats.org/drawingml/2006/diagram" xmlns:o="urn:schemas-microsoft-com:office:office" xmlns:v="urn:schemas-microsoft-com:vml" xmlns:pvml="urn:schemas-microsoft-com:office:powerpoint" xmlns:com="http://schemas.openxmlformats.org/drawingml/2006/compatibility" xmlns:p14="http://schemas.microsoft.com/office/powerpoint/2010/main" xmlns:p15="http://schemas.microsoft.com/office/powerpoint/2012/main" xmlns:ahyp="http://schemas.microsoft.com/office/drawing/2018/hyperlinkcolor" showMasterPhAnim="0" showMasterSp="0">
+  <p:cSld>
+    <p:spTree>
+      <p:nvGrpSpPr>
+        <p:cNvPr id="241" name="Shape 241"/>
+        <p:cNvGrpSpPr/>
+        <p:nvPr/>
+      </p:nvGrpSpPr>
+      <p:grpSpPr>
+        <a:xfrm>
+          <a:off x="0" y="0"/>
+          <a:ext cx="0" cy="0"/>
+          <a:chOff x="0" y="0"/>
+          <a:chExt cx="0" cy="0"/>
+        </a:xfrm>
+      </p:grpSpPr>
+      <p:sp>
+        <p:nvSpPr>
+          <p:cNvPr id="242" name="Google Shape;242;g33b2a244876_1_31:notes"/>
+          <p:cNvSpPr/>
+          <p:nvPr>
+            <p:ph idx="2" type="sldImg"/>
+          </p:nvPr>
+        </p:nvSpPr>
+        <p:spPr>
+          <a:xfrm>
+            <a:off x="685800" y="1143000"/>
+            <a:ext cx="5486400" cy="3086100"/>
+          </a:xfrm>
+          <a:custGeom>
+            <a:rect b="b" l="l" r="r" t="t"/>
+            <a:pathLst>
+              <a:path extrusionOk="0" h="120000" w="120000">
+                <a:moveTo>
+                  <a:pt x="0" y="0"/>
+                </a:moveTo>
+                <a:lnTo>
+                  <a:pt x="120000" y="0"/>
+                </a:lnTo>
+                <a:lnTo>
+                  <a:pt x="120000" y="120000"/>
+                </a:lnTo>
+                <a:lnTo>
+                  <a:pt x="0" y="120000"/>
+                </a:lnTo>
+                <a:close/>
+              </a:path>
+            </a:pathLst>
+          </a:custGeom>
+        </p:spPr>
+      </p:sp>
+      <p:sp>
+        <p:nvSpPr>
+          <p:cNvPr id="243" name="Google Shape;243;g33b2a244876_1_31:notes"/>
+          <p:cNvSpPr txBox="1"/>
+          <p:nvPr>
+            <p:ph idx="1" type="body"/>
+          </p:nvPr>
+        </p:nvSpPr>
+        <p:spPr>
+          <a:xfrm>
+            <a:off x="685800" y="4400550"/>
+            <a:ext cx="5486400" cy="3600600"/>
+          </a:xfrm>
+          <a:prstGeom prst="rect">
+            <a:avLst/>
+          </a:prstGeom>
+        </p:spPr>
+        <p:txBody>
+          <a:bodyPr anchorCtr="0" anchor="t" bIns="45700" lIns="91425" spcFirstLastPara="1" rIns="91425" wrap="square" tIns="45700">
+            <a:noAutofit/>
+          </a:bodyPr>
+          <a:lstStyle/>
+          <a:p>
+            <a:pPr indent="0" lvl="0" marL="0" rtl="0" algn="l">
+              <a:spcBef>
+                <a:spcPts val="0"/>
+              </a:spcBef>
+              <a:spcAft>
+                <a:spcPts val="0"/>
+              </a:spcAft>
+              <a:buNone/>
+            </a:pPr>
+            <a:r>
+              <a:t/>
+            </a:r>
+            <a:endParaRPr/>
+          </a:p>
+        </p:txBody>
+      </p:sp>
+      <p:sp>
+        <p:nvSpPr>
+          <p:cNvPr id="244" name="Google Shape;244;g33b2a244876_1_31:notes"/>
+          <p:cNvSpPr txBox="1"/>
+          <p:nvPr>
+            <p:ph idx="12" type="sldNum"/>
+          </p:nvPr>
+        </p:nvSpPr>
+        <p:spPr>
+          <a:xfrm>
+            <a:off x="3884613" y="8685213"/>
+            <a:ext cx="2971800" cy="458700"/>
+          </a:xfrm>
+          <a:prstGeom prst="rect">
+            <a:avLst/>
+          </a:prstGeom>
+        </p:spPr>
+        <p:txBody>
+          <a:bodyPr anchorCtr="0" anchor="b" bIns="45700" lIns="91425" spcFirstLastPara="1" rIns="91425" wrap="square" tIns="45700">
+            <a:noAutofit/>
+          </a:bodyPr>
+          <a:lstStyle/>
+          <a:p>
+            <a:pPr indent="0" lvl="0" marL="0" rtl="0" algn="r">
+              <a:spcBef>
+                <a:spcPts val="0"/>
+              </a:spcBef>
+              <a:spcAft>
+                <a:spcPts val="0"/>
+              </a:spcAft>
+              <a:buClr>
+                <a:srgbClr val="000000"/>
+              </a:buClr>
+              <a:buFont typeface="Arial"/>
+              <a:buNone/>
+            </a:pPr>
+            <a:fld id="{00000000-1234-1234-1234-123412341234}" type="slidenum">
+              <a:rPr lang="en-US"/>
+              <a:t>‹#›</a:t>
+            </a:fld>
+            <a:endParaRPr/>
+          </a:p>
+        </p:txBody>
+      </p:sp>
+    </p:spTree>
+  </p:cSld>
+  <p:clrMapOvr>
+    <a:masterClrMapping/>
+  </p:clrMapOvr>
+</p:notes>
+</file>
+
+<file path=ppt/notesSlides/notesSlide21.xml><?xml version="1.0" encoding="utf-8"?>
+<p:notes xmlns:a="http://schemas.openxmlformats.org/drawingml/2006/main" xmlns:r="http://schemas.openxmlformats.org/officeDocument/2006/relationships" xmlns:mc="http://schemas.openxmlformats.org/markup-compatibility/2006" xmlns:mv="urn:schemas-microsoft-com:mac:vml" xmlns:p="http://schemas.openxmlformats.org/presentationml/2006/main" xmlns:c="http://schemas.openxmlformats.org/drawingml/2006/chart" xmlns:dgm="http://schemas.openxmlformats.org/drawingml/2006/diagram" xmlns:o="urn:schemas-microsoft-com:office:office" xmlns:v="urn:schemas-microsoft-com:vml" xmlns:pvml="urn:schemas-microsoft-com:office:powerpoint" xmlns:com="http://schemas.openxmlformats.org/drawingml/2006/compatibility" xmlns:p14="http://schemas.microsoft.com/office/powerpoint/2010/main" xmlns:p15="http://schemas.microsoft.com/office/powerpoint/2012/main" xmlns:ahyp="http://schemas.microsoft.com/office/drawing/2018/hyperlinkcolor" showMasterPhAnim="0" showMasterSp="0">
+  <p:cSld>
+    <p:spTree>
+      <p:nvGrpSpPr>
+        <p:cNvPr id="248" name="Shape 248"/>
+        <p:cNvGrpSpPr/>
+        <p:nvPr/>
+      </p:nvGrpSpPr>
+      <p:grpSpPr>
+        <a:xfrm>
+          <a:off x="0" y="0"/>
+          <a:ext cx="0" cy="0"/>
+          <a:chOff x="0" y="0"/>
+          <a:chExt cx="0" cy="0"/>
+        </a:xfrm>
+      </p:grpSpPr>
+      <p:sp>
+        <p:nvSpPr>
+          <p:cNvPr id="249" name="Google Shape;249;g33b2a244876_1_37:notes"/>
+          <p:cNvSpPr/>
+          <p:nvPr>
+            <p:ph idx="2" type="sldImg"/>
+          </p:nvPr>
+        </p:nvSpPr>
+        <p:spPr>
+          <a:xfrm>
+            <a:off x="685800" y="1143000"/>
+            <a:ext cx="5486400" cy="3086100"/>
+          </a:xfrm>
+          <a:custGeom>
+            <a:rect b="b" l="l" r="r" t="t"/>
+            <a:pathLst>
+              <a:path extrusionOk="0" h="120000" w="120000">
+                <a:moveTo>
+                  <a:pt x="0" y="0"/>
+                </a:moveTo>
+                <a:lnTo>
+                  <a:pt x="120000" y="0"/>
+                </a:lnTo>
+                <a:lnTo>
+                  <a:pt x="120000" y="120000"/>
+                </a:lnTo>
+                <a:lnTo>
+                  <a:pt x="0" y="120000"/>
+                </a:lnTo>
+                <a:close/>
+              </a:path>
+            </a:pathLst>
+          </a:custGeom>
+        </p:spPr>
+      </p:sp>
+      <p:sp>
+        <p:nvSpPr>
+          <p:cNvPr id="250" name="Google Shape;250;g33b2a244876_1_37:notes"/>
+          <p:cNvSpPr txBox="1"/>
+          <p:nvPr>
+            <p:ph idx="1" type="body"/>
+          </p:nvPr>
+        </p:nvSpPr>
+        <p:spPr>
+          <a:xfrm>
+            <a:off x="685800" y="4400550"/>
+            <a:ext cx="5486400" cy="3600600"/>
+          </a:xfrm>
+          <a:prstGeom prst="rect">
+            <a:avLst/>
+          </a:prstGeom>
+        </p:spPr>
+        <p:txBody>
+          <a:bodyPr anchorCtr="0" anchor="t" bIns="45700" lIns="91425" spcFirstLastPara="1" rIns="91425" wrap="square" tIns="45700">
+            <a:noAutofit/>
+          </a:bodyPr>
+          <a:lstStyle/>
+          <a:p>
+            <a:pPr indent="0" lvl="0" marL="0" rtl="0" algn="l">
+              <a:spcBef>
+                <a:spcPts val="0"/>
+              </a:spcBef>
+              <a:spcAft>
+                <a:spcPts val="0"/>
+              </a:spcAft>
+              <a:buNone/>
+            </a:pPr>
+            <a:r>
+              <a:t/>
+            </a:r>
+            <a:endParaRPr/>
+          </a:p>
+        </p:txBody>
+      </p:sp>
+      <p:sp>
+        <p:nvSpPr>
+          <p:cNvPr id="251" name="Google Shape;251;g33b2a244876_1_37:notes"/>
+          <p:cNvSpPr txBox="1"/>
+          <p:nvPr>
+            <p:ph idx="12" type="sldNum"/>
+          </p:nvPr>
+        </p:nvSpPr>
+        <p:spPr>
+          <a:xfrm>
+            <a:off x="3884613" y="8685213"/>
+            <a:ext cx="2971800" cy="458700"/>
+          </a:xfrm>
+          <a:prstGeom prst="rect">
+            <a:avLst/>
+          </a:prstGeom>
+        </p:spPr>
+        <p:txBody>
+          <a:bodyPr anchorCtr="0" anchor="b" bIns="45700" lIns="91425" spcFirstLastPara="1" rIns="91425" wrap="square" tIns="45700">
+            <a:noAutofit/>
+          </a:bodyPr>
+          <a:lstStyle/>
+          <a:p>
+            <a:pPr indent="0" lvl="0" marL="0" rtl="0" algn="r">
+              <a:spcBef>
+                <a:spcPts val="0"/>
+              </a:spcBef>
+              <a:spcAft>
+                <a:spcPts val="0"/>
+              </a:spcAft>
+              <a:buClr>
+                <a:srgbClr val="000000"/>
+              </a:buClr>
+              <a:buFont typeface="Arial"/>
+              <a:buNone/>
+            </a:pPr>
+            <a:fld id="{00000000-1234-1234-1234-123412341234}" type="slidenum">
+              <a:rPr lang="en-US"/>
+              <a:t>‹#›</a:t>
+            </a:fld>
+            <a:endParaRPr/>
+          </a:p>
+        </p:txBody>
+      </p:sp>
+    </p:spTree>
+  </p:cSld>
+  <p:clrMapOvr>
+    <a:masterClrMapping/>
+  </p:clrMapOvr>
+</p:notes>
+</file>
+
+<file path=ppt/notesSlides/notesSlide22.xml><?xml version="1.0" encoding="utf-8"?>
+<p:notes xmlns:a="http://schemas.openxmlformats.org/drawingml/2006/main" xmlns:r="http://schemas.openxmlformats.org/officeDocument/2006/relationships" xmlns:mc="http://schemas.openxmlformats.org/markup-compatibility/2006" xmlns:mv="urn:schemas-microsoft-com:mac:vml" xmlns:p="http://schemas.openxmlformats.org/presentationml/2006/main" xmlns:c="http://schemas.openxmlformats.org/drawingml/2006/chart" xmlns:dgm="http://schemas.openxmlformats.org/drawingml/2006/diagram" xmlns:o="urn:schemas-microsoft-com:office:office" xmlns:v="urn:schemas-microsoft-com:vml" xmlns:pvml="urn:schemas-microsoft-com:office:powerpoint" xmlns:com="http://schemas.openxmlformats.org/drawingml/2006/compatibility" xmlns:p14="http://schemas.microsoft.com/office/powerpoint/2010/main" xmlns:p15="http://schemas.microsoft.com/office/powerpoint/2012/main" xmlns:ahyp="http://schemas.microsoft.com/office/drawing/2018/hyperlinkcolor" showMasterPhAnim="0" showMasterSp="0">
+  <p:cSld>
+    <p:spTree>
+      <p:nvGrpSpPr>
+        <p:cNvPr id="256" name="Shape 256"/>
+        <p:cNvGrpSpPr/>
+        <p:nvPr/>
+      </p:nvGrpSpPr>
+      <p:grpSpPr>
+        <a:xfrm>
+          <a:off x="0" y="0"/>
+          <a:ext cx="0" cy="0"/>
+          <a:chOff x="0" y="0"/>
+          <a:chExt cx="0" cy="0"/>
+        </a:xfrm>
+      </p:grpSpPr>
+      <p:sp>
+        <p:nvSpPr>
+          <p:cNvPr id="257" name="Google Shape;257;g33b2a244876_1_44:notes"/>
+          <p:cNvSpPr/>
+          <p:nvPr>
+            <p:ph idx="2" type="sldImg"/>
+          </p:nvPr>
+        </p:nvSpPr>
+        <p:spPr>
+          <a:xfrm>
+            <a:off x="685800" y="1143000"/>
+            <a:ext cx="5486400" cy="3086100"/>
+          </a:xfrm>
+          <a:custGeom>
+            <a:rect b="b" l="l" r="r" t="t"/>
+            <a:pathLst>
+              <a:path extrusionOk="0" h="120000" w="120000">
+                <a:moveTo>
+                  <a:pt x="0" y="0"/>
+                </a:moveTo>
+                <a:lnTo>
+                  <a:pt x="120000" y="0"/>
+                </a:lnTo>
+                <a:lnTo>
+                  <a:pt x="120000" y="120000"/>
+                </a:lnTo>
+                <a:lnTo>
+                  <a:pt x="0" y="120000"/>
+                </a:lnTo>
+                <a:close/>
+              </a:path>
+            </a:pathLst>
+          </a:custGeom>
+        </p:spPr>
+      </p:sp>
+      <p:sp>
+        <p:nvSpPr>
+          <p:cNvPr id="258" name="Google Shape;258;g33b2a244876_1_44:notes"/>
+          <p:cNvSpPr txBox="1"/>
+          <p:nvPr>
+            <p:ph idx="1" type="body"/>
+          </p:nvPr>
+        </p:nvSpPr>
+        <p:spPr>
+          <a:xfrm>
+            <a:off x="685800" y="4400550"/>
+            <a:ext cx="5486400" cy="3600600"/>
+          </a:xfrm>
+          <a:prstGeom prst="rect">
+            <a:avLst/>
+          </a:prstGeom>
+        </p:spPr>
+        <p:txBody>
+          <a:bodyPr anchorCtr="0" anchor="t" bIns="45700" lIns="91425" spcFirstLastPara="1" rIns="91425" wrap="square" tIns="45700">
+            <a:noAutofit/>
+          </a:bodyPr>
+          <a:lstStyle/>
+          <a:p>
+            <a:pPr indent="0" lvl="0" marL="0" rtl="0" algn="l">
+              <a:spcBef>
+                <a:spcPts val="0"/>
+              </a:spcBef>
+              <a:spcAft>
+                <a:spcPts val="0"/>
+              </a:spcAft>
+              <a:buNone/>
+            </a:pPr>
+            <a:r>
+              <a:t/>
+            </a:r>
+            <a:endParaRPr/>
+          </a:p>
+        </p:txBody>
+      </p:sp>
+      <p:sp>
+        <p:nvSpPr>
+          <p:cNvPr id="259" name="Google Shape;259;g33b2a244876_1_44:notes"/>
+          <p:cNvSpPr txBox="1"/>
+          <p:nvPr>
+            <p:ph idx="12" type="sldNum"/>
+          </p:nvPr>
+        </p:nvSpPr>
+        <p:spPr>
+          <a:xfrm>
+            <a:off x="3884613" y="8685213"/>
+            <a:ext cx="2971800" cy="458700"/>
+          </a:xfrm>
+          <a:prstGeom prst="rect">
+            <a:avLst/>
+          </a:prstGeom>
+        </p:spPr>
+        <p:txBody>
+          <a:bodyPr anchorCtr="0" anchor="b" bIns="45700" lIns="91425" spcFirstLastPara="1" rIns="91425" wrap="square" tIns="45700">
+            <a:noAutofit/>
+          </a:bodyPr>
+          <a:lstStyle/>
+          <a:p>
+            <a:pPr indent="0" lvl="0" marL="0" rtl="0" algn="r">
+              <a:spcBef>
+                <a:spcPts val="0"/>
+              </a:spcBef>
+              <a:spcAft>
+                <a:spcPts val="0"/>
+              </a:spcAft>
+              <a:buClr>
+                <a:srgbClr val="000000"/>
+              </a:buClr>
+              <a:buFont typeface="Arial"/>
+              <a:buNone/>
+            </a:pPr>
+            <a:fld id="{00000000-1234-1234-1234-123412341234}" type="slidenum">
+              <a:rPr lang="en-US"/>
+              <a:t>‹#›</a:t>
+            </a:fld>
+            <a:endParaRPr/>
+          </a:p>
+        </p:txBody>
+      </p:sp>
+    </p:spTree>
+  </p:cSld>
+  <p:clrMapOvr>
+    <a:masterClrMapping/>
+  </p:clrMapOvr>
+</p:notes>
+</file>
+
+<file path=ppt/notesSlides/notesSlide23.xml><?xml version="1.0" encoding="utf-8"?>
+<p:notes xmlns:a="http://schemas.openxmlformats.org/drawingml/2006/main" xmlns:r="http://schemas.openxmlformats.org/officeDocument/2006/relationships" xmlns:mc="http://schemas.openxmlformats.org/markup-compatibility/2006" xmlns:mv="urn:schemas-microsoft-com:mac:vml" xmlns:p="http://schemas.openxmlformats.org/presentationml/2006/main" xmlns:c="http://schemas.openxmlformats.org/drawingml/2006/chart" xmlns:dgm="http://schemas.openxmlformats.org/drawingml/2006/diagram" xmlns:o="urn:schemas-microsoft-com:office:office" xmlns:v="urn:schemas-microsoft-com:vml" xmlns:pvml="urn:schemas-microsoft-com:office:powerpoint" xmlns:com="http://schemas.openxmlformats.org/drawingml/2006/compatibility" xmlns:p14="http://schemas.microsoft.com/office/powerpoint/2010/main" xmlns:p15="http://schemas.microsoft.com/office/powerpoint/2012/main" xmlns:ahyp="http://schemas.microsoft.com/office/drawing/2018/hyperlinkcolor" showMasterPhAnim="0" showMasterSp="0">
+  <p:cSld>
+    <p:spTree>
+      <p:nvGrpSpPr>
+        <p:cNvPr id="263" name="Shape 263"/>
+        <p:cNvGrpSpPr/>
+        <p:nvPr/>
+      </p:nvGrpSpPr>
+      <p:grpSpPr>
+        <a:xfrm>
+          <a:off x="0" y="0"/>
+          <a:ext cx="0" cy="0"/>
+          <a:chOff x="0" y="0"/>
+          <a:chExt cx="0" cy="0"/>
+        </a:xfrm>
+      </p:grpSpPr>
+      <p:sp>
+        <p:nvSpPr>
+          <p:cNvPr id="264" name="Google Shape;264;p7:notes"/>
           <p:cNvSpPr/>
           <p:nvPr>
             <p:ph idx="2" type="sldImg"/>
@@ -1366,7 +3337,7 @@
       </p:sp>
       <p:sp>
         <p:nvSpPr>
-          <p:cNvPr id="174" name="Google Shape;174;p7:notes"/>
+          <p:cNvPr id="265" name="Google Shape;265;p7:notes"/>
           <p:cNvSpPr txBox="1"/>
           <p:nvPr>
             <p:ph idx="1" type="body"/>
@@ -1409,7 +3380,7 @@
       </p:sp>
       <p:sp>
         <p:nvSpPr>
-          <p:cNvPr id="175" name="Google Shape;175;p7:notes"/>
+          <p:cNvPr id="266" name="Google Shape;266;p7:notes"/>
           <p:cNvSpPr txBox="1"/>
           <p:nvPr>
             <p:ph idx="12" type="sldNum"/>
@@ -1459,12 +3430,12 @@
 </p:notes>
 </file>
 
-<file path=ppt/notesSlides/notesSlide11.xml><?xml version="1.0" encoding="utf-8"?>
+<file path=ppt/notesSlides/notesSlide24.xml><?xml version="1.0" encoding="utf-8"?>
 <p:notes xmlns:a="http://schemas.openxmlformats.org/drawingml/2006/main" xmlns:r="http://schemas.openxmlformats.org/officeDocument/2006/relationships" xmlns:mc="http://schemas.openxmlformats.org/markup-compatibility/2006" xmlns:mv="urn:schemas-microsoft-com:mac:vml" xmlns:p="http://schemas.openxmlformats.org/presentationml/2006/main" xmlns:c="http://schemas.openxmlformats.org/drawingml/2006/chart" xmlns:dgm="http://schemas.openxmlformats.org/drawingml/2006/diagram" xmlns:o="urn:schemas-microsoft-com:office:office" xmlns:v="urn:schemas-microsoft-com:vml" xmlns:pvml="urn:schemas-microsoft-com:office:powerpoint" xmlns:com="http://schemas.openxmlformats.org/drawingml/2006/compatibility" xmlns:p14="http://schemas.microsoft.com/office/powerpoint/2010/main" xmlns:p15="http://schemas.microsoft.com/office/powerpoint/2012/main" xmlns:ahyp="http://schemas.microsoft.com/office/drawing/2018/hyperlinkcolor" showMasterPhAnim="0" showMasterSp="0">
   <p:cSld>
     <p:spTree>
       <p:nvGrpSpPr>
-        <p:cNvPr id="187" name="Shape 187"/>
+        <p:cNvPr id="278" name="Shape 278"/>
         <p:cNvGrpSpPr/>
         <p:nvPr/>
       </p:nvGrpSpPr>
@@ -1478,7 +3449,7 @@
       </p:grpSpPr>
       <p:sp>
         <p:nvSpPr>
-          <p:cNvPr id="188" name="Google Shape;188;p8:notes"/>
+          <p:cNvPr id="279" name="Google Shape;279;p8:notes"/>
           <p:cNvSpPr/>
           <p:nvPr>
             <p:ph idx="2" type="sldImg"/>
@@ -1523,7 +3494,7 @@
       </p:sp>
       <p:sp>
         <p:nvSpPr>
-          <p:cNvPr id="189" name="Google Shape;189;p8:notes"/>
+          <p:cNvPr id="280" name="Google Shape;280;p8:notes"/>
           <p:cNvSpPr txBox="1"/>
           <p:nvPr>
             <p:ph idx="1" type="body"/>
@@ -1566,7 +3537,7 @@
       </p:sp>
       <p:sp>
         <p:nvSpPr>
-          <p:cNvPr id="190" name="Google Shape;190;p8:notes"/>
+          <p:cNvPr id="281" name="Google Shape;281;p8:notes"/>
           <p:cNvSpPr txBox="1"/>
           <p:nvPr>
             <p:ph idx="12" type="sldNum"/>
@@ -1616,12 +3587,12 @@
 </p:notes>
 </file>
 
-<file path=ppt/notesSlides/notesSlide12.xml><?xml version="1.0" encoding="utf-8"?>
+<file path=ppt/notesSlides/notesSlide25.xml><?xml version="1.0" encoding="utf-8"?>
 <p:notes xmlns:a="http://schemas.openxmlformats.org/drawingml/2006/main" xmlns:r="http://schemas.openxmlformats.org/officeDocument/2006/relationships" xmlns:mc="http://schemas.openxmlformats.org/markup-compatibility/2006" xmlns:mv="urn:schemas-microsoft-com:mac:vml" xmlns:p="http://schemas.openxmlformats.org/presentationml/2006/main" xmlns:c="http://schemas.openxmlformats.org/drawingml/2006/chart" xmlns:dgm="http://schemas.openxmlformats.org/drawingml/2006/diagram" xmlns:o="urn:schemas-microsoft-com:office:office" xmlns:v="urn:schemas-microsoft-com:vml" xmlns:pvml="urn:schemas-microsoft-com:office:powerpoint" xmlns:com="http://schemas.openxmlformats.org/drawingml/2006/compatibility" xmlns:p14="http://schemas.microsoft.com/office/powerpoint/2010/main" xmlns:p15="http://schemas.microsoft.com/office/powerpoint/2012/main" xmlns:ahyp="http://schemas.microsoft.com/office/drawing/2018/hyperlinkcolor" showMasterPhAnim="0" showMasterSp="0">
   <p:cSld>
     <p:spTree>
       <p:nvGrpSpPr>
-        <p:cNvPr id="203" name="Shape 203"/>
+        <p:cNvPr id="294" name="Shape 294"/>
         <p:cNvGrpSpPr/>
         <p:nvPr/>
       </p:nvGrpSpPr>
@@ -1635,7 +3606,7 @@
       </p:grpSpPr>
       <p:sp>
         <p:nvSpPr>
-          <p:cNvPr id="204" name="Google Shape;204;g33b135bed8a_1_253:notes"/>
+          <p:cNvPr id="295" name="Google Shape;295;g33b135bed8a_1_253:notes"/>
           <p:cNvSpPr/>
           <p:nvPr>
             <p:ph idx="2" type="sldImg"/>
@@ -1670,7 +3641,7 @@
       </p:sp>
       <p:sp>
         <p:nvSpPr>
-          <p:cNvPr id="205" name="Google Shape;205;g33b135bed8a_1_253:notes"/>
+          <p:cNvPr id="296" name="Google Shape;296;g33b135bed8a_1_253:notes"/>
           <p:cNvSpPr txBox="1"/>
           <p:nvPr>
             <p:ph idx="1" type="body"/>
@@ -1709,7 +3680,7 @@
       </p:sp>
       <p:sp>
         <p:nvSpPr>
-          <p:cNvPr id="206" name="Google Shape;206;g33b135bed8a_1_253:notes"/>
+          <p:cNvPr id="297" name="Google Shape;297;g33b135bed8a_1_253:notes"/>
           <p:cNvSpPr txBox="1"/>
           <p:nvPr>
             <p:ph idx="12" type="sldNum"/>
@@ -1750,105 +3721,6 @@
             <a:endParaRPr/>
           </a:p>
         </p:txBody>
-      </p:sp>
-    </p:spTree>
-  </p:cSld>
-  <p:clrMapOvr>
-    <a:masterClrMapping/>
-  </p:clrMapOvr>
-</p:notes>
-</file>
-
-<file path=ppt/notesSlides/notesSlide2.xml><?xml version="1.0" encoding="utf-8"?>
-<p:notes xmlns:a="http://schemas.openxmlformats.org/drawingml/2006/main" xmlns:r="http://schemas.openxmlformats.org/officeDocument/2006/relationships" xmlns:mc="http://schemas.openxmlformats.org/markup-compatibility/2006" xmlns:mv="urn:schemas-microsoft-com:mac:vml" xmlns:p="http://schemas.openxmlformats.org/presentationml/2006/main" xmlns:c="http://schemas.openxmlformats.org/drawingml/2006/chart" xmlns:dgm="http://schemas.openxmlformats.org/drawingml/2006/diagram" xmlns:o="urn:schemas-microsoft-com:office:office" xmlns:v="urn:schemas-microsoft-com:vml" xmlns:pvml="urn:schemas-microsoft-com:office:powerpoint" xmlns:com="http://schemas.openxmlformats.org/drawingml/2006/compatibility" xmlns:p14="http://schemas.microsoft.com/office/powerpoint/2010/main" xmlns:p15="http://schemas.microsoft.com/office/powerpoint/2012/main" xmlns:ahyp="http://schemas.microsoft.com/office/drawing/2018/hyperlinkcolor" showMasterPhAnim="0" showMasterSp="0">
-  <p:cSld>
-    <p:spTree>
-      <p:nvGrpSpPr>
-        <p:cNvPr id="69" name="Shape 69"/>
-        <p:cNvGrpSpPr/>
-        <p:nvPr/>
-      </p:nvGrpSpPr>
-      <p:grpSpPr>
-        <a:xfrm>
-          <a:off x="0" y="0"/>
-          <a:ext cx="0" cy="0"/>
-          <a:chOff x="0" y="0"/>
-          <a:chExt cx="0" cy="0"/>
-        </a:xfrm>
-      </p:grpSpPr>
-      <p:sp>
-        <p:nvSpPr>
-          <p:cNvPr id="70" name="Google Shape;70;g33b135bed8a_2_0:notes"/>
-          <p:cNvSpPr txBox="1"/>
-          <p:nvPr>
-            <p:ph idx="1" type="body"/>
-          </p:nvPr>
-        </p:nvSpPr>
-        <p:spPr>
-          <a:xfrm>
-            <a:off x="822960" y="7040880"/>
-            <a:ext cx="6583800" cy="5760900"/>
-          </a:xfrm>
-          <a:prstGeom prst="rect">
-            <a:avLst/>
-          </a:prstGeom>
-        </p:spPr>
-        <p:txBody>
-          <a:bodyPr anchorCtr="0" anchor="t" bIns="45700" lIns="91425" spcFirstLastPara="1" rIns="91425" wrap="square" tIns="45700">
-            <a:noAutofit/>
-          </a:bodyPr>
-          <a:lstStyle/>
-          <a:p>
-            <a:pPr indent="0" lvl="0" marL="0" rtl="0" algn="l">
-              <a:spcBef>
-                <a:spcPts val="0"/>
-              </a:spcBef>
-              <a:spcAft>
-                <a:spcPts val="0"/>
-              </a:spcAft>
-              <a:buNone/>
-            </a:pPr>
-            <a:r>
-              <a:t/>
-            </a:r>
-            <a:endParaRPr/>
-          </a:p>
-        </p:txBody>
-      </p:sp>
-      <p:sp>
-        <p:nvSpPr>
-          <p:cNvPr id="71" name="Google Shape;71;g33b135bed8a_2_0:notes"/>
-          <p:cNvSpPr/>
-          <p:nvPr>
-            <p:ph idx="2" type="sldImg"/>
-          </p:nvPr>
-        </p:nvSpPr>
-        <p:spPr>
-          <a:xfrm>
-            <a:off x="822960" y="1828800"/>
-            <a:ext cx="6583800" cy="4937700"/>
-          </a:xfrm>
-          <a:custGeom>
-            <a:rect b="b" l="l" r="r" t="t"/>
-            <a:pathLst>
-              <a:path extrusionOk="0" h="120000" w="120000">
-                <a:moveTo>
-                  <a:pt x="0" y="0"/>
-                </a:moveTo>
-                <a:lnTo>
-                  <a:pt x="120000" y="0"/>
-                </a:lnTo>
-                <a:lnTo>
-                  <a:pt x="120000" y="120000"/>
-                </a:lnTo>
-                <a:lnTo>
-                  <a:pt x="0" y="120000"/>
-                </a:lnTo>
-                <a:close/>
-              </a:path>
-            </a:pathLst>
-          </a:custGeom>
-        </p:spPr>
       </p:sp>
     </p:spTree>
   </p:cSld>
@@ -1863,7 +3735,7 @@
   <p:cSld>
     <p:spTree>
       <p:nvGrpSpPr>
-        <p:cNvPr id="78" name="Shape 78"/>
+        <p:cNvPr id="77" name="Shape 77"/>
         <p:cNvGrpSpPr/>
         <p:nvPr/>
       </p:nvGrpSpPr>
@@ -1877,7 +3749,7 @@
       </p:grpSpPr>
       <p:sp>
         <p:nvSpPr>
-          <p:cNvPr id="79" name="Google Shape;79;p1:notes"/>
+          <p:cNvPr id="78" name="Google Shape;78;p1:notes"/>
           <p:cNvSpPr/>
           <p:nvPr>
             <p:ph idx="2" type="sldImg"/>
@@ -1922,7 +3794,7 @@
       </p:sp>
       <p:sp>
         <p:nvSpPr>
-          <p:cNvPr id="80" name="Google Shape;80;p1:notes"/>
+          <p:cNvPr id="79" name="Google Shape;79;p1:notes"/>
           <p:cNvSpPr txBox="1"/>
           <p:nvPr>
             <p:ph idx="1" type="body"/>
@@ -1965,7 +3837,7 @@
       </p:sp>
       <p:sp>
         <p:nvSpPr>
-          <p:cNvPr id="81" name="Google Shape;81;p1:notes"/>
+          <p:cNvPr id="80" name="Google Shape;80;p1:notes"/>
           <p:cNvSpPr txBox="1"/>
           <p:nvPr>
             <p:ph idx="12" type="sldNum"/>
@@ -2020,7 +3892,7 @@
   <p:cSld>
     <p:spTree>
       <p:nvGrpSpPr>
-        <p:cNvPr id="85" name="Shape 85"/>
+        <p:cNvPr id="84" name="Shape 84"/>
         <p:cNvGrpSpPr/>
         <p:nvPr/>
       </p:nvGrpSpPr>
@@ -2034,7 +3906,7 @@
       </p:grpSpPr>
       <p:sp>
         <p:nvSpPr>
-          <p:cNvPr id="86" name="Google Shape;86;p2:notes"/>
+          <p:cNvPr id="85" name="Google Shape;85;p2:notes"/>
           <p:cNvSpPr/>
           <p:nvPr>
             <p:ph idx="2" type="sldImg"/>
@@ -2079,7 +3951,7 @@
       </p:sp>
       <p:sp>
         <p:nvSpPr>
-          <p:cNvPr id="87" name="Google Shape;87;p2:notes"/>
+          <p:cNvPr id="86" name="Google Shape;86;p2:notes"/>
           <p:cNvSpPr txBox="1"/>
           <p:nvPr>
             <p:ph idx="1" type="body"/>
@@ -2122,7 +3994,7 @@
       </p:sp>
       <p:sp>
         <p:nvSpPr>
-          <p:cNvPr id="88" name="Google Shape;88;p2:notes"/>
+          <p:cNvPr id="87" name="Google Shape;87;p2:notes"/>
           <p:cNvSpPr txBox="1"/>
           <p:nvPr>
             <p:ph idx="12" type="sldNum"/>
@@ -2177,7 +4049,7 @@
   <p:cSld>
     <p:spTree>
       <p:nvGrpSpPr>
-        <p:cNvPr id="103" name="Shape 103"/>
+        <p:cNvPr id="102" name="Shape 102"/>
         <p:cNvGrpSpPr/>
         <p:nvPr/>
       </p:nvGrpSpPr>
@@ -2191,7 +4063,7 @@
       </p:grpSpPr>
       <p:sp>
         <p:nvSpPr>
-          <p:cNvPr id="104" name="Google Shape;104;p3:notes"/>
+          <p:cNvPr id="103" name="Google Shape;103;p3:notes"/>
           <p:cNvSpPr/>
           <p:nvPr>
             <p:ph idx="2" type="sldImg"/>
@@ -2236,7 +4108,7 @@
       </p:sp>
       <p:sp>
         <p:nvSpPr>
-          <p:cNvPr id="105" name="Google Shape;105;p3:notes"/>
+          <p:cNvPr id="104" name="Google Shape;104;p3:notes"/>
           <p:cNvSpPr txBox="1"/>
           <p:nvPr>
             <p:ph idx="1" type="body"/>
@@ -2279,7 +4151,7 @@
       </p:sp>
       <p:sp>
         <p:nvSpPr>
-          <p:cNvPr id="106" name="Google Shape;106;p3:notes"/>
+          <p:cNvPr id="105" name="Google Shape;105;p3:notes"/>
           <p:cNvSpPr txBox="1"/>
           <p:nvPr>
             <p:ph idx="12" type="sldNum"/>
@@ -2334,7 +4206,7 @@
   <p:cSld>
     <p:spTree>
       <p:nvGrpSpPr>
-        <p:cNvPr id="121" name="Shape 121"/>
+        <p:cNvPr id="120" name="Shape 120"/>
         <p:cNvGrpSpPr/>
         <p:nvPr/>
       </p:nvGrpSpPr>
@@ -2348,7 +4220,7 @@
       </p:grpSpPr>
       <p:sp>
         <p:nvSpPr>
-          <p:cNvPr id="122" name="Google Shape;122;p4:notes"/>
+          <p:cNvPr id="121" name="Google Shape;121;p4:notes"/>
           <p:cNvSpPr/>
           <p:nvPr>
             <p:ph idx="2" type="sldImg"/>
@@ -2393,7 +4265,7 @@
       </p:sp>
       <p:sp>
         <p:nvSpPr>
-          <p:cNvPr id="123" name="Google Shape;123;p4:notes"/>
+          <p:cNvPr id="122" name="Google Shape;122;p4:notes"/>
           <p:cNvSpPr txBox="1"/>
           <p:nvPr>
             <p:ph idx="1" type="body"/>
@@ -2436,7 +4308,7 @@
       </p:sp>
       <p:sp>
         <p:nvSpPr>
-          <p:cNvPr id="124" name="Google Shape;124;p4:notes"/>
+          <p:cNvPr id="123" name="Google Shape;123;p4:notes"/>
           <p:cNvSpPr txBox="1"/>
           <p:nvPr>
             <p:ph idx="12" type="sldNum"/>
@@ -2491,7 +4363,7 @@
   <p:cSld>
     <p:spTree>
       <p:nvGrpSpPr>
-        <p:cNvPr id="135" name="Shape 135"/>
+        <p:cNvPr id="134" name="Shape 134"/>
         <p:cNvGrpSpPr/>
         <p:nvPr/>
       </p:nvGrpSpPr>
@@ -2505,7 +4377,7 @@
       </p:grpSpPr>
       <p:sp>
         <p:nvSpPr>
-          <p:cNvPr id="136" name="Google Shape;136;g33b135bed8a_1_0:notes"/>
+          <p:cNvPr id="135" name="Google Shape;135;g33b135bed8a_1_0:notes"/>
           <p:cNvSpPr txBox="1"/>
           <p:nvPr>
             <p:ph idx="1" type="body"/>
@@ -2544,7 +4416,7 @@
       </p:sp>
       <p:sp>
         <p:nvSpPr>
-          <p:cNvPr id="137" name="Google Shape;137;g33b135bed8a_1_0:notes"/>
+          <p:cNvPr id="136" name="Google Shape;136;g33b135bed8a_1_0:notes"/>
           <p:cNvSpPr/>
           <p:nvPr>
             <p:ph idx="2" type="sldImg"/>
@@ -2590,7 +4462,7 @@
   <p:cSld>
     <p:spTree>
       <p:nvGrpSpPr>
-        <p:cNvPr id="143" name="Shape 143"/>
+        <p:cNvPr id="142" name="Shape 142"/>
         <p:cNvGrpSpPr/>
         <p:nvPr/>
       </p:nvGrpSpPr>
@@ -2604,7 +4476,7 @@
       </p:grpSpPr>
       <p:sp>
         <p:nvSpPr>
-          <p:cNvPr id="144" name="Google Shape;144;p5:notes"/>
+          <p:cNvPr id="143" name="Google Shape;143;p5:notes"/>
           <p:cNvSpPr/>
           <p:nvPr>
             <p:ph idx="2" type="sldImg"/>
@@ -2649,7 +4521,7 @@
       </p:sp>
       <p:sp>
         <p:nvSpPr>
-          <p:cNvPr id="145" name="Google Shape;145;p5:notes"/>
+          <p:cNvPr id="144" name="Google Shape;144;p5:notes"/>
           <p:cNvSpPr txBox="1"/>
           <p:nvPr>
             <p:ph idx="1" type="body"/>
@@ -2692,7 +4564,7 @@
       </p:sp>
       <p:sp>
         <p:nvSpPr>
-          <p:cNvPr id="146" name="Google Shape;146;p5:notes"/>
+          <p:cNvPr id="145" name="Google Shape;145;p5:notes"/>
           <p:cNvSpPr txBox="1"/>
           <p:nvPr>
             <p:ph idx="12" type="sldNum"/>
@@ -2747,7 +4619,7 @@
   <p:cSld>
     <p:spTree>
       <p:nvGrpSpPr>
-        <p:cNvPr id="158" name="Shape 158"/>
+        <p:cNvPr id="157" name="Shape 157"/>
         <p:cNvGrpSpPr/>
         <p:nvPr/>
       </p:nvGrpSpPr>
@@ -2761,7 +4633,7 @@
       </p:grpSpPr>
       <p:sp>
         <p:nvSpPr>
-          <p:cNvPr id="159" name="Google Shape;159;p6:notes"/>
+          <p:cNvPr id="158" name="Google Shape;158;p6:notes"/>
           <p:cNvSpPr/>
           <p:nvPr>
             <p:ph idx="2" type="sldImg"/>
@@ -2806,7 +4678,7 @@
       </p:sp>
       <p:sp>
         <p:nvSpPr>
-          <p:cNvPr id="160" name="Google Shape;160;p6:notes"/>
+          <p:cNvPr id="159" name="Google Shape;159;p6:notes"/>
           <p:cNvSpPr txBox="1"/>
           <p:nvPr>
             <p:ph idx="1" type="body"/>
@@ -2849,7 +4721,7 @@
       </p:sp>
       <p:sp>
         <p:nvSpPr>
-          <p:cNvPr id="161" name="Google Shape;161;p6:notes"/>
+          <p:cNvPr id="160" name="Google Shape;160;p6:notes"/>
           <p:cNvSpPr txBox="1"/>
           <p:nvPr>
             <p:ph idx="12" type="sldNum"/>
@@ -6492,7 +8364,7 @@
         </p:nvSpPr>
         <p:spPr>
           <a:xfrm>
-            <a:off x="1261872" y="1718668"/>
+            <a:off x="1125422" y="1624043"/>
             <a:ext cx="11960100" cy="3642900"/>
           </a:xfrm>
           <a:prstGeom prst="rect">
@@ -6582,50 +8454,6 @@
       <p:sp>
         <p:nvSpPr>
           <p:cNvPr id="67" name="Google Shape;67;g33b135bed8a_1_246"/>
-          <p:cNvSpPr txBox="1"/>
-          <p:nvPr>
-            <p:ph idx="12" type="sldNum"/>
-          </p:nvPr>
-        </p:nvSpPr>
-        <p:spPr>
-          <a:xfrm>
-            <a:off x="11590848" y="5072634"/>
-            <a:ext cx="1432800" cy="768300"/>
-          </a:xfrm>
-          <a:prstGeom prst="rect">
-            <a:avLst/>
-          </a:prstGeom>
-          <a:noFill/>
-          <a:ln>
-            <a:noFill/>
-          </a:ln>
-        </p:spPr>
-        <p:txBody>
-          <a:bodyPr anchorCtr="0" anchor="ctr" bIns="67025" lIns="134100" spcFirstLastPara="1" rIns="134100" wrap="square" tIns="67025">
-            <a:noAutofit/>
-          </a:bodyPr>
-          <a:lstStyle/>
-          <a:p>
-            <a:pPr indent="0" lvl="0" marL="0" rtl="0" algn="ctr">
-              <a:spcBef>
-                <a:spcPts val="0"/>
-              </a:spcBef>
-              <a:spcAft>
-                <a:spcPts val="0"/>
-              </a:spcAft>
-              <a:buNone/>
-            </a:pPr>
-            <a:fld id="{00000000-1234-1234-1234-123412341234}" type="slidenum">
-              <a:rPr lang="en-US"/>
-              <a:t>‹#›</a:t>
-            </a:fld>
-            <a:endParaRPr/>
-          </a:p>
-        </p:txBody>
-      </p:sp>
-      <p:sp>
-        <p:nvSpPr>
-          <p:cNvPr id="68" name="Google Shape;68;g33b135bed8a_1_246"/>
           <p:cNvSpPr txBox="1"/>
           <p:nvPr/>
         </p:nvSpPr>
@@ -6705,7 +8533,7 @@
   <p:cSld>
     <p:spTree>
       <p:nvGrpSpPr>
-        <p:cNvPr id="176" name="Shape 176"/>
+        <p:cNvPr id="175" name="Shape 175"/>
         <p:cNvGrpSpPr/>
         <p:nvPr/>
       </p:nvGrpSpPr>
@@ -6717,16 +8545,24 @@
           <a:chExt cx="0" cy="0"/>
         </a:xfrm>
       </p:grpSpPr>
-      <p:sp>
-        <p:nvSpPr>
-          <p:cNvPr id="177" name="Google Shape;177;p7"/>
-          <p:cNvSpPr/>
+      <p:pic>
+        <p:nvPicPr>
+          <p:cNvPr id="176" name="Google Shape;176;g33b2a244876_0_0"/>
+          <p:cNvPicPr preferRelativeResize="0"/>
           <p:nvPr/>
-        </p:nvSpPr>
-        <p:spPr>
-          <a:xfrm>
-            <a:off x="776798" y="1270950"/>
-            <a:ext cx="6712500" cy="701400"/>
+        </p:nvPicPr>
+        <p:blipFill>
+          <a:blip r:embed="rId3">
+            <a:alphaModFix/>
+          </a:blip>
+          <a:stretch>
+            <a:fillRect/>
+          </a:stretch>
+        </p:blipFill>
+        <p:spPr>
+          <a:xfrm>
+            <a:off x="152400" y="1196325"/>
+            <a:ext cx="14325600" cy="6372204"/>
           </a:xfrm>
           <a:prstGeom prst="rect">
             <a:avLst/>
@@ -6736,528 +8572,7 @@
             <a:noFill/>
           </a:ln>
         </p:spPr>
-        <p:txBody>
-          <a:bodyPr anchorCtr="0" anchor="t" bIns="0" lIns="0" spcFirstLastPara="1" rIns="0" wrap="square" tIns="0">
-            <a:noAutofit/>
-          </a:bodyPr>
-          <a:lstStyle/>
-          <a:p>
-            <a:pPr indent="0" lvl="0" marL="0" marR="0" rtl="0" algn="l">
-              <a:lnSpc>
-                <a:spcPct val="125000"/>
-              </a:lnSpc>
-              <a:spcBef>
-                <a:spcPts val="0"/>
-              </a:spcBef>
-              <a:spcAft>
-                <a:spcPts val="0"/>
-              </a:spcAft>
-              <a:buClr>
-                <a:srgbClr val="FFFFFF"/>
-              </a:buClr>
-              <a:buSzPts val="4400"/>
-              <a:buFont typeface="Montserrat"/>
-              <a:buNone/>
-            </a:pPr>
-            <a:r>
-              <a:rPr b="1" i="0" lang="en-US" sz="4400" u="none" cap="none" strike="noStrike">
-                <a:solidFill>
-                  <a:srgbClr val="FFFFFF"/>
-                </a:solidFill>
-                <a:latin typeface="Montserrat"/>
-                <a:ea typeface="Montserrat"/>
-                <a:cs typeface="Montserrat"/>
-                <a:sym typeface="Montserrat"/>
-              </a:rPr>
-              <a:t>Conclusions &amp; Findings</a:t>
-            </a:r>
-            <a:endParaRPr b="0" i="0" sz="4400" u="none" cap="none" strike="noStrike"/>
-          </a:p>
-        </p:txBody>
-      </p:sp>
-      <p:sp>
-        <p:nvSpPr>
-          <p:cNvPr id="178" name="Google Shape;178;p7"/>
-          <p:cNvSpPr/>
-          <p:nvPr/>
-        </p:nvSpPr>
-        <p:spPr>
-          <a:xfrm>
-            <a:off x="863798" y="3994547"/>
-            <a:ext cx="555308" cy="555308"/>
-          </a:xfrm>
-          <a:prstGeom prst="roundRect">
-            <a:avLst>
-              <a:gd fmla="val 6667" name="adj"/>
-            </a:avLst>
-          </a:prstGeom>
-          <a:solidFill>
-            <a:srgbClr val="303132"/>
-          </a:solidFill>
-          <a:ln>
-            <a:noFill/>
-          </a:ln>
-        </p:spPr>
-        <p:txBody>
-          <a:bodyPr anchorCtr="0" anchor="ctr" bIns="91425" lIns="91425" spcFirstLastPara="1" rIns="91425" wrap="square" tIns="91425">
-            <a:noAutofit/>
-          </a:bodyPr>
-          <a:lstStyle/>
-          <a:p>
-            <a:pPr indent="0" lvl="0" marL="0" rtl="0" algn="l">
-              <a:spcBef>
-                <a:spcPts val="0"/>
-              </a:spcBef>
-              <a:spcAft>
-                <a:spcPts val="0"/>
-              </a:spcAft>
-              <a:buNone/>
-            </a:pPr>
-            <a:r>
-              <a:t/>
-            </a:r>
-            <a:endParaRPr/>
-          </a:p>
-        </p:txBody>
-      </p:sp>
-      <p:sp>
-        <p:nvSpPr>
-          <p:cNvPr id="179" name="Google Shape;179;p7"/>
-          <p:cNvSpPr/>
-          <p:nvPr/>
-        </p:nvSpPr>
-        <p:spPr>
-          <a:xfrm>
-            <a:off x="1665923" y="3994547"/>
-            <a:ext cx="3334226" cy="701278"/>
-          </a:xfrm>
-          <a:prstGeom prst="rect">
-            <a:avLst/>
-          </a:prstGeom>
-          <a:noFill/>
-          <a:ln>
-            <a:noFill/>
-          </a:ln>
-        </p:spPr>
-        <p:txBody>
-          <a:bodyPr anchorCtr="0" anchor="t" bIns="0" lIns="0" spcFirstLastPara="1" rIns="0" wrap="square" tIns="0">
-            <a:noAutofit/>
-          </a:bodyPr>
-          <a:lstStyle/>
-          <a:p>
-            <a:pPr indent="0" lvl="0" marL="0" marR="0" rtl="0" algn="l">
-              <a:lnSpc>
-                <a:spcPct val="125000"/>
-              </a:lnSpc>
-              <a:spcBef>
-                <a:spcPts val="0"/>
-              </a:spcBef>
-              <a:spcAft>
-                <a:spcPts val="0"/>
-              </a:spcAft>
-              <a:buClr>
-                <a:srgbClr val="E2E6E9"/>
-              </a:buClr>
-              <a:buSzPts val="2200"/>
-              <a:buFont typeface="Montserrat"/>
-              <a:buNone/>
-            </a:pPr>
-            <a:r>
-              <a:rPr b="1" i="0" lang="en-US" sz="2200" u="none" cap="none" strike="noStrike">
-                <a:solidFill>
-                  <a:srgbClr val="E2E6E9"/>
-                </a:solidFill>
-                <a:latin typeface="Montserrat"/>
-                <a:ea typeface="Montserrat"/>
-                <a:cs typeface="Montserrat"/>
-                <a:sym typeface="Montserrat"/>
-              </a:rPr>
-              <a:t>Technical Achievements</a:t>
-            </a:r>
-            <a:endParaRPr b="0" i="0" sz="2200" u="none" cap="none" strike="noStrike"/>
-          </a:p>
-        </p:txBody>
-      </p:sp>
-      <p:sp>
-        <p:nvSpPr>
-          <p:cNvPr id="180" name="Google Shape;180;p7"/>
-          <p:cNvSpPr/>
-          <p:nvPr/>
-        </p:nvSpPr>
-        <p:spPr>
-          <a:xfrm>
-            <a:off x="1665923" y="4843820"/>
-            <a:ext cx="3334226" cy="740331"/>
-          </a:xfrm>
-          <a:prstGeom prst="rect">
-            <a:avLst/>
-          </a:prstGeom>
-          <a:noFill/>
-          <a:ln>
-            <a:noFill/>
-          </a:ln>
-        </p:spPr>
-        <p:txBody>
-          <a:bodyPr anchorCtr="0" anchor="t" bIns="0" lIns="0" spcFirstLastPara="1" rIns="0" wrap="square" tIns="0">
-            <a:noAutofit/>
-          </a:bodyPr>
-          <a:lstStyle/>
-          <a:p>
-            <a:pPr indent="0" lvl="0" marL="0" marR="0" rtl="0" algn="l">
-              <a:lnSpc>
-                <a:spcPct val="152631"/>
-              </a:lnSpc>
-              <a:spcBef>
-                <a:spcPts val="0"/>
-              </a:spcBef>
-              <a:spcAft>
-                <a:spcPts val="0"/>
-              </a:spcAft>
-              <a:buClr>
-                <a:srgbClr val="E2E6E9"/>
-              </a:buClr>
-              <a:buSzPts val="1900"/>
-              <a:buFont typeface="Arial"/>
-              <a:buNone/>
-            </a:pPr>
-            <a:r>
-              <a:rPr b="0" i="0" lang="en-US" sz="1900" u="none" cap="none" strike="noStrike">
-                <a:solidFill>
-                  <a:srgbClr val="E2E6E9"/>
-                </a:solidFill>
-                <a:latin typeface="Arial"/>
-                <a:ea typeface="Arial"/>
-                <a:cs typeface="Arial"/>
-                <a:sym typeface="Arial"/>
-              </a:rPr>
-              <a:t>Integrated data sources and created optimized star schema.</a:t>
-            </a:r>
-            <a:endParaRPr b="0" i="0" sz="1900" u="none" cap="none" strike="noStrike"/>
-          </a:p>
-        </p:txBody>
-      </p:sp>
-      <p:sp>
-        <p:nvSpPr>
-          <p:cNvPr id="181" name="Google Shape;181;p7"/>
-          <p:cNvSpPr/>
-          <p:nvPr/>
-        </p:nvSpPr>
-        <p:spPr>
-          <a:xfrm>
-            <a:off x="5246965" y="3994547"/>
-            <a:ext cx="555308" cy="555308"/>
-          </a:xfrm>
-          <a:prstGeom prst="roundRect">
-            <a:avLst>
-              <a:gd fmla="val 6667" name="adj"/>
-            </a:avLst>
-          </a:prstGeom>
-          <a:solidFill>
-            <a:srgbClr val="303132"/>
-          </a:solidFill>
-          <a:ln>
-            <a:noFill/>
-          </a:ln>
-        </p:spPr>
-        <p:txBody>
-          <a:bodyPr anchorCtr="0" anchor="ctr" bIns="91425" lIns="91425" spcFirstLastPara="1" rIns="91425" wrap="square" tIns="91425">
-            <a:noAutofit/>
-          </a:bodyPr>
-          <a:lstStyle/>
-          <a:p>
-            <a:pPr indent="0" lvl="0" marL="0" rtl="0" algn="l">
-              <a:spcBef>
-                <a:spcPts val="0"/>
-              </a:spcBef>
-              <a:spcAft>
-                <a:spcPts val="0"/>
-              </a:spcAft>
-              <a:buNone/>
-            </a:pPr>
-            <a:r>
-              <a:t/>
-            </a:r>
-            <a:endParaRPr/>
-          </a:p>
-        </p:txBody>
-      </p:sp>
-      <p:sp>
-        <p:nvSpPr>
-          <p:cNvPr id="182" name="Google Shape;182;p7"/>
-          <p:cNvSpPr/>
-          <p:nvPr/>
-        </p:nvSpPr>
-        <p:spPr>
-          <a:xfrm>
-            <a:off x="6049089" y="3994547"/>
-            <a:ext cx="2804874" cy="350639"/>
-          </a:xfrm>
-          <a:prstGeom prst="rect">
-            <a:avLst/>
-          </a:prstGeom>
-          <a:noFill/>
-          <a:ln>
-            <a:noFill/>
-          </a:ln>
-        </p:spPr>
-        <p:txBody>
-          <a:bodyPr anchorCtr="0" anchor="t" bIns="0" lIns="0" spcFirstLastPara="1" rIns="0" wrap="square" tIns="0">
-            <a:noAutofit/>
-          </a:bodyPr>
-          <a:lstStyle/>
-          <a:p>
-            <a:pPr indent="0" lvl="0" marL="0" marR="0" rtl="0" algn="l">
-              <a:lnSpc>
-                <a:spcPct val="125000"/>
-              </a:lnSpc>
-              <a:spcBef>
-                <a:spcPts val="0"/>
-              </a:spcBef>
-              <a:spcAft>
-                <a:spcPts val="0"/>
-              </a:spcAft>
-              <a:buClr>
-                <a:srgbClr val="E2E6E9"/>
-              </a:buClr>
-              <a:buSzPts val="2200"/>
-              <a:buFont typeface="Montserrat"/>
-              <a:buNone/>
-            </a:pPr>
-            <a:r>
-              <a:rPr b="1" i="0" lang="en-US" sz="2200" u="none" cap="none" strike="noStrike">
-                <a:solidFill>
-                  <a:srgbClr val="E2E6E9"/>
-                </a:solidFill>
-                <a:latin typeface="Montserrat"/>
-                <a:ea typeface="Montserrat"/>
-                <a:cs typeface="Montserrat"/>
-                <a:sym typeface="Montserrat"/>
-              </a:rPr>
-              <a:t>Business Value</a:t>
-            </a:r>
-            <a:endParaRPr b="0" i="0" sz="2200" u="none" cap="none" strike="noStrike"/>
-          </a:p>
-        </p:txBody>
-      </p:sp>
-      <p:sp>
-        <p:nvSpPr>
-          <p:cNvPr id="183" name="Google Shape;183;p7"/>
-          <p:cNvSpPr/>
-          <p:nvPr/>
-        </p:nvSpPr>
-        <p:spPr>
-          <a:xfrm>
-            <a:off x="6049089" y="4493181"/>
-            <a:ext cx="3334226" cy="740331"/>
-          </a:xfrm>
-          <a:prstGeom prst="rect">
-            <a:avLst/>
-          </a:prstGeom>
-          <a:noFill/>
-          <a:ln>
-            <a:noFill/>
-          </a:ln>
-        </p:spPr>
-        <p:txBody>
-          <a:bodyPr anchorCtr="0" anchor="t" bIns="0" lIns="0" spcFirstLastPara="1" rIns="0" wrap="square" tIns="0">
-            <a:noAutofit/>
-          </a:bodyPr>
-          <a:lstStyle/>
-          <a:p>
-            <a:pPr indent="0" lvl="0" marL="0" marR="0" rtl="0" algn="l">
-              <a:lnSpc>
-                <a:spcPct val="152631"/>
-              </a:lnSpc>
-              <a:spcBef>
-                <a:spcPts val="0"/>
-              </a:spcBef>
-              <a:spcAft>
-                <a:spcPts val="0"/>
-              </a:spcAft>
-              <a:buClr>
-                <a:srgbClr val="E2E6E9"/>
-              </a:buClr>
-              <a:buSzPts val="1900"/>
-              <a:buFont typeface="Arial"/>
-              <a:buNone/>
-            </a:pPr>
-            <a:r>
-              <a:rPr b="0" i="0" lang="en-US" sz="1900" u="none" cap="none" strike="noStrike">
-                <a:solidFill>
-                  <a:srgbClr val="E2E6E9"/>
-                </a:solidFill>
-                <a:latin typeface="Arial"/>
-                <a:ea typeface="Arial"/>
-                <a:cs typeface="Arial"/>
-                <a:sym typeface="Arial"/>
-              </a:rPr>
-              <a:t>Enabled e-commerce analytics and data-driven decisions.</a:t>
-            </a:r>
-            <a:endParaRPr b="0" i="0" sz="1900" u="none" cap="none" strike="noStrike"/>
-          </a:p>
-        </p:txBody>
-      </p:sp>
-      <p:sp>
-        <p:nvSpPr>
-          <p:cNvPr id="184" name="Google Shape;184;p7"/>
-          <p:cNvSpPr/>
-          <p:nvPr/>
-        </p:nvSpPr>
-        <p:spPr>
-          <a:xfrm>
-            <a:off x="9630132" y="3994547"/>
-            <a:ext cx="555308" cy="555308"/>
-          </a:xfrm>
-          <a:prstGeom prst="roundRect">
-            <a:avLst>
-              <a:gd fmla="val 6667" name="adj"/>
-            </a:avLst>
-          </a:prstGeom>
-          <a:solidFill>
-            <a:srgbClr val="303132"/>
-          </a:solidFill>
-          <a:ln>
-            <a:noFill/>
-          </a:ln>
-        </p:spPr>
-        <p:txBody>
-          <a:bodyPr anchorCtr="0" anchor="ctr" bIns="91425" lIns="91425" spcFirstLastPara="1" rIns="91425" wrap="square" tIns="91425">
-            <a:noAutofit/>
-          </a:bodyPr>
-          <a:lstStyle/>
-          <a:p>
-            <a:pPr indent="0" lvl="0" marL="0" rtl="0" algn="l">
-              <a:spcBef>
-                <a:spcPts val="0"/>
-              </a:spcBef>
-              <a:spcAft>
-                <a:spcPts val="0"/>
-              </a:spcAft>
-              <a:buNone/>
-            </a:pPr>
-            <a:r>
-              <a:t/>
-            </a:r>
-            <a:endParaRPr/>
-          </a:p>
-        </p:txBody>
-      </p:sp>
-      <p:sp>
-        <p:nvSpPr>
-          <p:cNvPr id="185" name="Google Shape;185;p7"/>
-          <p:cNvSpPr/>
-          <p:nvPr/>
-        </p:nvSpPr>
-        <p:spPr>
-          <a:xfrm>
-            <a:off x="10432256" y="3994547"/>
-            <a:ext cx="3098125" cy="350639"/>
-          </a:xfrm>
-          <a:prstGeom prst="rect">
-            <a:avLst/>
-          </a:prstGeom>
-          <a:noFill/>
-          <a:ln>
-            <a:noFill/>
-          </a:ln>
-        </p:spPr>
-        <p:txBody>
-          <a:bodyPr anchorCtr="0" anchor="t" bIns="0" lIns="0" spcFirstLastPara="1" rIns="0" wrap="square" tIns="0">
-            <a:noAutofit/>
-          </a:bodyPr>
-          <a:lstStyle/>
-          <a:p>
-            <a:pPr indent="0" lvl="0" marL="0" marR="0" rtl="0" algn="l">
-              <a:lnSpc>
-                <a:spcPct val="125000"/>
-              </a:lnSpc>
-              <a:spcBef>
-                <a:spcPts val="0"/>
-              </a:spcBef>
-              <a:spcAft>
-                <a:spcPts val="0"/>
-              </a:spcAft>
-              <a:buClr>
-                <a:srgbClr val="E2E6E9"/>
-              </a:buClr>
-              <a:buSzPts val="2200"/>
-              <a:buFont typeface="Montserrat"/>
-              <a:buNone/>
-            </a:pPr>
-            <a:r>
-              <a:rPr b="1" i="0" lang="en-US" sz="2200" u="none" cap="none" strike="noStrike">
-                <a:solidFill>
-                  <a:srgbClr val="E2E6E9"/>
-                </a:solidFill>
-                <a:latin typeface="Montserrat"/>
-                <a:ea typeface="Montserrat"/>
-                <a:cs typeface="Montserrat"/>
-                <a:sym typeface="Montserrat"/>
-              </a:rPr>
-              <a:t>Scalable Architecture</a:t>
-            </a:r>
-            <a:endParaRPr b="0" i="0" sz="2200" u="none" cap="none" strike="noStrike"/>
-          </a:p>
-        </p:txBody>
-      </p:sp>
-      <p:sp>
-        <p:nvSpPr>
-          <p:cNvPr id="186" name="Google Shape;186;p7"/>
-          <p:cNvSpPr/>
-          <p:nvPr/>
-        </p:nvSpPr>
-        <p:spPr>
-          <a:xfrm>
-            <a:off x="10185456" y="4843794"/>
-            <a:ext cx="3334200" cy="740400"/>
-          </a:xfrm>
-          <a:prstGeom prst="rect">
-            <a:avLst/>
-          </a:prstGeom>
-          <a:noFill/>
-          <a:ln>
-            <a:noFill/>
-          </a:ln>
-        </p:spPr>
-        <p:txBody>
-          <a:bodyPr anchorCtr="0" anchor="t" bIns="0" lIns="0" spcFirstLastPara="1" rIns="0" wrap="square" tIns="0">
-            <a:noAutofit/>
-          </a:bodyPr>
-          <a:lstStyle/>
-          <a:p>
-            <a:pPr indent="0" lvl="0" marL="0" marR="0" rtl="0" algn="l">
-              <a:lnSpc>
-                <a:spcPct val="152631"/>
-              </a:lnSpc>
-              <a:spcBef>
-                <a:spcPts val="0"/>
-              </a:spcBef>
-              <a:spcAft>
-                <a:spcPts val="0"/>
-              </a:spcAft>
-              <a:buClr>
-                <a:srgbClr val="E2E6E9"/>
-              </a:buClr>
-              <a:buSzPts val="1900"/>
-              <a:buFont typeface="Arial"/>
-              <a:buNone/>
-            </a:pPr>
-            <a:r>
-              <a:rPr b="0" i="0" lang="en-US" sz="1900" u="none" cap="none" strike="noStrike">
-                <a:solidFill>
-                  <a:srgbClr val="E2E6E9"/>
-                </a:solidFill>
-                <a:latin typeface="Arial"/>
-                <a:ea typeface="Arial"/>
-                <a:cs typeface="Arial"/>
-                <a:sym typeface="Arial"/>
-              </a:rPr>
-              <a:t>Reduced time from data collection to insights.</a:t>
-            </a:r>
-            <a:endParaRPr b="0" i="0" sz="1900" u="none" cap="none" strike="noStrike"/>
-          </a:p>
-        </p:txBody>
-      </p:sp>
+      </p:pic>
     </p:spTree>
   </p:cSld>
   <p:clrMapOvr>
@@ -7271,7 +8586,7 @@
   <p:cSld>
     <p:spTree>
       <p:nvGrpSpPr>
-        <p:cNvPr id="191" name="Shape 191"/>
+        <p:cNvPr id="181" name="Shape 181"/>
         <p:cNvGrpSpPr/>
         <p:nvPr/>
       </p:nvGrpSpPr>
@@ -7285,21 +8600,22 @@
       </p:grpSpPr>
       <p:pic>
         <p:nvPicPr>
-          <p:cNvPr descr="preencoded.png" id="192" name="Google Shape;192;p8"/>
+          <p:cNvPr id="182" name="Google Shape;182;g33b2a244876_0_5"/>
           <p:cNvPicPr preferRelativeResize="0"/>
           <p:nvPr/>
         </p:nvPicPr>
-        <p:blipFill rotWithShape="1">
+        <p:blipFill>
           <a:blip r:embed="rId3">
             <a:alphaModFix/>
           </a:blip>
-          <a:srcRect b="0" l="0" r="0" t="0"/>
-          <a:stretch/>
+          <a:stretch>
+            <a:fillRect/>
+          </a:stretch>
         </p:blipFill>
         <p:spPr>
           <a:xfrm>
-            <a:off x="9144000" y="0"/>
-            <a:ext cx="5486400" cy="8229600"/>
+            <a:off x="304800" y="987525"/>
+            <a:ext cx="14325599" cy="6476282"/>
           </a:xfrm>
           <a:prstGeom prst="rect">
             <a:avLst/>
@@ -7310,547 +8626,6 @@
           </a:ln>
         </p:spPr>
       </p:pic>
-      <p:sp>
-        <p:nvSpPr>
-          <p:cNvPr id="193" name="Google Shape;193;p8"/>
-          <p:cNvSpPr/>
-          <p:nvPr/>
-        </p:nvSpPr>
-        <p:spPr>
-          <a:xfrm>
-            <a:off x="863798" y="1905595"/>
-            <a:ext cx="5609749" cy="701278"/>
-          </a:xfrm>
-          <a:prstGeom prst="rect">
-            <a:avLst/>
-          </a:prstGeom>
-          <a:noFill/>
-          <a:ln>
-            <a:noFill/>
-          </a:ln>
-        </p:spPr>
-        <p:txBody>
-          <a:bodyPr anchorCtr="0" anchor="t" bIns="0" lIns="0" spcFirstLastPara="1" rIns="0" wrap="square" tIns="0">
-            <a:noAutofit/>
-          </a:bodyPr>
-          <a:lstStyle/>
-          <a:p>
-            <a:pPr indent="0" lvl="0" marL="0" marR="0" rtl="0" algn="l">
-              <a:lnSpc>
-                <a:spcPct val="125000"/>
-              </a:lnSpc>
-              <a:spcBef>
-                <a:spcPts val="0"/>
-              </a:spcBef>
-              <a:spcAft>
-                <a:spcPts val="0"/>
-              </a:spcAft>
-              <a:buClr>
-                <a:srgbClr val="FFFFFF"/>
-              </a:buClr>
-              <a:buSzPts val="4400"/>
-              <a:buFont typeface="Montserrat"/>
-              <a:buNone/>
-            </a:pPr>
-            <a:r>
-              <a:rPr b="1" i="0" lang="en-US" sz="4400" u="none" cap="none" strike="noStrike">
-                <a:solidFill>
-                  <a:srgbClr val="FFFFFF"/>
-                </a:solidFill>
-                <a:latin typeface="Montserrat"/>
-                <a:ea typeface="Montserrat"/>
-                <a:cs typeface="Montserrat"/>
-                <a:sym typeface="Montserrat"/>
-              </a:rPr>
-              <a:t>Next Steps</a:t>
-            </a:r>
-            <a:endParaRPr b="0" i="0" sz="4400" u="none" cap="none" strike="noStrike"/>
-          </a:p>
-        </p:txBody>
-      </p:sp>
-      <p:sp>
-        <p:nvSpPr>
-          <p:cNvPr id="194" name="Google Shape;194;p8"/>
-          <p:cNvSpPr/>
-          <p:nvPr/>
-        </p:nvSpPr>
-        <p:spPr>
-          <a:xfrm>
-            <a:off x="863798" y="2977039"/>
-            <a:ext cx="185023" cy="868799"/>
-          </a:xfrm>
-          <a:prstGeom prst="roundRect">
-            <a:avLst>
-              <a:gd fmla="val 20011" name="adj"/>
-            </a:avLst>
-          </a:prstGeom>
-          <a:solidFill>
-            <a:srgbClr val="303132"/>
-          </a:solidFill>
-          <a:ln>
-            <a:noFill/>
-          </a:ln>
-        </p:spPr>
-        <p:txBody>
-          <a:bodyPr anchorCtr="0" anchor="ctr" bIns="91425" lIns="91425" spcFirstLastPara="1" rIns="91425" wrap="square" tIns="91425">
-            <a:noAutofit/>
-          </a:bodyPr>
-          <a:lstStyle/>
-          <a:p>
-            <a:pPr indent="0" lvl="0" marL="0" rtl="0" algn="l">
-              <a:spcBef>
-                <a:spcPts val="0"/>
-              </a:spcBef>
-              <a:spcAft>
-                <a:spcPts val="0"/>
-              </a:spcAft>
-              <a:buNone/>
-            </a:pPr>
-            <a:r>
-              <a:t/>
-            </a:r>
-            <a:endParaRPr/>
-          </a:p>
-        </p:txBody>
-      </p:sp>
-      <p:sp>
-        <p:nvSpPr>
-          <p:cNvPr id="195" name="Google Shape;195;p8"/>
-          <p:cNvSpPr/>
-          <p:nvPr/>
-        </p:nvSpPr>
-        <p:spPr>
-          <a:xfrm>
-            <a:off x="1418987" y="2977039"/>
-            <a:ext cx="2804874" cy="350639"/>
-          </a:xfrm>
-          <a:prstGeom prst="rect">
-            <a:avLst/>
-          </a:prstGeom>
-          <a:noFill/>
-          <a:ln>
-            <a:noFill/>
-          </a:ln>
-        </p:spPr>
-        <p:txBody>
-          <a:bodyPr anchorCtr="0" anchor="t" bIns="0" lIns="0" spcFirstLastPara="1" rIns="0" wrap="square" tIns="0">
-            <a:noAutofit/>
-          </a:bodyPr>
-          <a:lstStyle/>
-          <a:p>
-            <a:pPr indent="0" lvl="0" marL="0" marR="0" rtl="0" algn="l">
-              <a:lnSpc>
-                <a:spcPct val="125000"/>
-              </a:lnSpc>
-              <a:spcBef>
-                <a:spcPts val="0"/>
-              </a:spcBef>
-              <a:spcAft>
-                <a:spcPts val="0"/>
-              </a:spcAft>
-              <a:buClr>
-                <a:srgbClr val="E2E6E9"/>
-              </a:buClr>
-              <a:buSzPts val="2200"/>
-              <a:buFont typeface="Montserrat"/>
-              <a:buNone/>
-            </a:pPr>
-            <a:r>
-              <a:rPr b="1" i="0" lang="en-US" sz="2200" u="none" cap="none" strike="noStrike">
-                <a:solidFill>
-                  <a:srgbClr val="E2E6E9"/>
-                </a:solidFill>
-                <a:latin typeface="Montserrat"/>
-                <a:ea typeface="Montserrat"/>
-                <a:cs typeface="Montserrat"/>
-                <a:sym typeface="Montserrat"/>
-              </a:rPr>
-              <a:t>Enhancements</a:t>
-            </a:r>
-            <a:endParaRPr b="0" i="0" sz="2200" u="none" cap="none" strike="noStrike"/>
-          </a:p>
-        </p:txBody>
-      </p:sp>
-      <p:sp>
-        <p:nvSpPr>
-          <p:cNvPr id="196" name="Google Shape;196;p8"/>
-          <p:cNvSpPr/>
-          <p:nvPr/>
-        </p:nvSpPr>
-        <p:spPr>
-          <a:xfrm>
-            <a:off x="1418987" y="3475673"/>
-            <a:ext cx="6861215" cy="370165"/>
-          </a:xfrm>
-          <a:prstGeom prst="rect">
-            <a:avLst/>
-          </a:prstGeom>
-          <a:noFill/>
-          <a:ln>
-            <a:noFill/>
-          </a:ln>
-        </p:spPr>
-        <p:txBody>
-          <a:bodyPr anchorCtr="0" anchor="t" bIns="0" lIns="0" spcFirstLastPara="1" rIns="0" wrap="square" tIns="0">
-            <a:noAutofit/>
-          </a:bodyPr>
-          <a:lstStyle/>
-          <a:p>
-            <a:pPr indent="0" lvl="0" marL="0" marR="0" rtl="0" algn="l">
-              <a:lnSpc>
-                <a:spcPct val="152631"/>
-              </a:lnSpc>
-              <a:spcBef>
-                <a:spcPts val="0"/>
-              </a:spcBef>
-              <a:spcAft>
-                <a:spcPts val="0"/>
-              </a:spcAft>
-              <a:buClr>
-                <a:srgbClr val="E2E6E9"/>
-              </a:buClr>
-              <a:buSzPts val="1900"/>
-              <a:buFont typeface="Arial"/>
-              <a:buNone/>
-            </a:pPr>
-            <a:r>
-              <a:rPr b="0" i="0" lang="en-US" sz="1900" u="none" cap="none" strike="noStrike">
-                <a:solidFill>
-                  <a:srgbClr val="E2E6E9"/>
-                </a:solidFill>
-                <a:latin typeface="Arial"/>
-                <a:ea typeface="Arial"/>
-                <a:cs typeface="Arial"/>
-                <a:sym typeface="Arial"/>
-              </a:rPr>
-              <a:t>Real-time data streaming integration.</a:t>
-            </a:r>
-            <a:endParaRPr b="0" i="0" sz="1900" u="none" cap="none" strike="noStrike"/>
-          </a:p>
-        </p:txBody>
-      </p:sp>
-      <p:sp>
-        <p:nvSpPr>
-          <p:cNvPr id="197" name="Google Shape;197;p8"/>
-          <p:cNvSpPr/>
-          <p:nvPr/>
-        </p:nvSpPr>
-        <p:spPr>
-          <a:xfrm>
-            <a:off x="1233964" y="4092654"/>
-            <a:ext cx="185023" cy="868799"/>
-          </a:xfrm>
-          <a:prstGeom prst="roundRect">
-            <a:avLst>
-              <a:gd fmla="val 20011" name="adj"/>
-            </a:avLst>
-          </a:prstGeom>
-          <a:solidFill>
-            <a:srgbClr val="303132"/>
-          </a:solidFill>
-          <a:ln>
-            <a:noFill/>
-          </a:ln>
-        </p:spPr>
-        <p:txBody>
-          <a:bodyPr anchorCtr="0" anchor="ctr" bIns="91425" lIns="91425" spcFirstLastPara="1" rIns="91425" wrap="square" tIns="91425">
-            <a:noAutofit/>
-          </a:bodyPr>
-          <a:lstStyle/>
-          <a:p>
-            <a:pPr indent="0" lvl="0" marL="0" rtl="0" algn="l">
-              <a:spcBef>
-                <a:spcPts val="0"/>
-              </a:spcBef>
-              <a:spcAft>
-                <a:spcPts val="0"/>
-              </a:spcAft>
-              <a:buNone/>
-            </a:pPr>
-            <a:r>
-              <a:t/>
-            </a:r>
-            <a:endParaRPr/>
-          </a:p>
-        </p:txBody>
-      </p:sp>
-      <p:sp>
-        <p:nvSpPr>
-          <p:cNvPr id="198" name="Google Shape;198;p8"/>
-          <p:cNvSpPr/>
-          <p:nvPr/>
-        </p:nvSpPr>
-        <p:spPr>
-          <a:xfrm>
-            <a:off x="1789152" y="4092654"/>
-            <a:ext cx="2804874" cy="350639"/>
-          </a:xfrm>
-          <a:prstGeom prst="rect">
-            <a:avLst/>
-          </a:prstGeom>
-          <a:noFill/>
-          <a:ln>
-            <a:noFill/>
-          </a:ln>
-        </p:spPr>
-        <p:txBody>
-          <a:bodyPr anchorCtr="0" anchor="t" bIns="0" lIns="0" spcFirstLastPara="1" rIns="0" wrap="square" tIns="0">
-            <a:noAutofit/>
-          </a:bodyPr>
-          <a:lstStyle/>
-          <a:p>
-            <a:pPr indent="0" lvl="0" marL="0" marR="0" rtl="0" algn="l">
-              <a:lnSpc>
-                <a:spcPct val="125000"/>
-              </a:lnSpc>
-              <a:spcBef>
-                <a:spcPts val="0"/>
-              </a:spcBef>
-              <a:spcAft>
-                <a:spcPts val="0"/>
-              </a:spcAft>
-              <a:buClr>
-                <a:srgbClr val="E2E6E9"/>
-              </a:buClr>
-              <a:buSzPts val="2200"/>
-              <a:buFont typeface="Montserrat"/>
-              <a:buNone/>
-            </a:pPr>
-            <a:r>
-              <a:rPr b="1" i="0" lang="en-US" sz="2200" u="none" cap="none" strike="noStrike">
-                <a:solidFill>
-                  <a:srgbClr val="E2E6E9"/>
-                </a:solidFill>
-                <a:latin typeface="Montserrat"/>
-                <a:ea typeface="Montserrat"/>
-                <a:cs typeface="Montserrat"/>
-                <a:sym typeface="Montserrat"/>
-              </a:rPr>
-              <a:t>Data Quality</a:t>
-            </a:r>
-            <a:endParaRPr b="0" i="0" sz="2200" u="none" cap="none" strike="noStrike"/>
-          </a:p>
-        </p:txBody>
-      </p:sp>
-      <p:sp>
-        <p:nvSpPr>
-          <p:cNvPr id="199" name="Google Shape;199;p8"/>
-          <p:cNvSpPr/>
-          <p:nvPr/>
-        </p:nvSpPr>
-        <p:spPr>
-          <a:xfrm>
-            <a:off x="1789152" y="4591288"/>
-            <a:ext cx="6491049" cy="370165"/>
-          </a:xfrm>
-          <a:prstGeom prst="rect">
-            <a:avLst/>
-          </a:prstGeom>
-          <a:noFill/>
-          <a:ln>
-            <a:noFill/>
-          </a:ln>
-        </p:spPr>
-        <p:txBody>
-          <a:bodyPr anchorCtr="0" anchor="t" bIns="0" lIns="0" spcFirstLastPara="1" rIns="0" wrap="square" tIns="0">
-            <a:noAutofit/>
-          </a:bodyPr>
-          <a:lstStyle/>
-          <a:p>
-            <a:pPr indent="0" lvl="0" marL="0" marR="0" rtl="0" algn="l">
-              <a:lnSpc>
-                <a:spcPct val="152631"/>
-              </a:lnSpc>
-              <a:spcBef>
-                <a:spcPts val="0"/>
-              </a:spcBef>
-              <a:spcAft>
-                <a:spcPts val="0"/>
-              </a:spcAft>
-              <a:buClr>
-                <a:srgbClr val="E2E6E9"/>
-              </a:buClr>
-              <a:buSzPts val="1900"/>
-              <a:buFont typeface="Arial"/>
-              <a:buNone/>
-            </a:pPr>
-            <a:r>
-              <a:rPr b="0" i="0" lang="en-US" sz="1900" u="none" cap="none" strike="noStrike">
-                <a:solidFill>
-                  <a:srgbClr val="E2E6E9"/>
-                </a:solidFill>
-                <a:latin typeface="Arial"/>
-                <a:ea typeface="Arial"/>
-                <a:cs typeface="Arial"/>
-                <a:sym typeface="Arial"/>
-              </a:rPr>
-              <a:t>Advanced data quality monitoring.</a:t>
-            </a:r>
-            <a:endParaRPr b="0" i="0" sz="1900" u="none" cap="none" strike="noStrike"/>
-          </a:p>
-        </p:txBody>
-      </p:sp>
-      <p:sp>
-        <p:nvSpPr>
-          <p:cNvPr id="200" name="Google Shape;200;p8"/>
-          <p:cNvSpPr/>
-          <p:nvPr/>
-        </p:nvSpPr>
-        <p:spPr>
-          <a:xfrm>
-            <a:off x="1604248" y="5208270"/>
-            <a:ext cx="185023" cy="868799"/>
-          </a:xfrm>
-          <a:prstGeom prst="roundRect">
-            <a:avLst>
-              <a:gd fmla="val 20011" name="adj"/>
-            </a:avLst>
-          </a:prstGeom>
-          <a:solidFill>
-            <a:srgbClr val="303132"/>
-          </a:solidFill>
-          <a:ln>
-            <a:noFill/>
-          </a:ln>
-        </p:spPr>
-        <p:txBody>
-          <a:bodyPr anchorCtr="0" anchor="ctr" bIns="91425" lIns="91425" spcFirstLastPara="1" rIns="91425" wrap="square" tIns="91425">
-            <a:noAutofit/>
-          </a:bodyPr>
-          <a:lstStyle/>
-          <a:p>
-            <a:pPr indent="0" lvl="0" marL="0" rtl="0" algn="l">
-              <a:spcBef>
-                <a:spcPts val="0"/>
-              </a:spcBef>
-              <a:spcAft>
-                <a:spcPts val="0"/>
-              </a:spcAft>
-              <a:buNone/>
-            </a:pPr>
-            <a:r>
-              <a:t/>
-            </a:r>
-            <a:endParaRPr/>
-          </a:p>
-        </p:txBody>
-      </p:sp>
-      <p:sp>
-        <p:nvSpPr>
-          <p:cNvPr id="201" name="Google Shape;201;p8"/>
-          <p:cNvSpPr/>
-          <p:nvPr/>
-        </p:nvSpPr>
-        <p:spPr>
-          <a:xfrm>
-            <a:off x="2159437" y="5208270"/>
-            <a:ext cx="2845713" cy="350639"/>
-          </a:xfrm>
-          <a:prstGeom prst="rect">
-            <a:avLst/>
-          </a:prstGeom>
-          <a:noFill/>
-          <a:ln>
-            <a:noFill/>
-          </a:ln>
-        </p:spPr>
-        <p:txBody>
-          <a:bodyPr anchorCtr="0" anchor="t" bIns="0" lIns="0" spcFirstLastPara="1" rIns="0" wrap="square" tIns="0">
-            <a:noAutofit/>
-          </a:bodyPr>
-          <a:lstStyle/>
-          <a:p>
-            <a:pPr indent="0" lvl="0" marL="0" marR="0" rtl="0" algn="l">
-              <a:lnSpc>
-                <a:spcPct val="125000"/>
-              </a:lnSpc>
-              <a:spcBef>
-                <a:spcPts val="0"/>
-              </a:spcBef>
-              <a:spcAft>
-                <a:spcPts val="0"/>
-              </a:spcAft>
-              <a:buClr>
-                <a:srgbClr val="E2E6E9"/>
-              </a:buClr>
-              <a:buSzPts val="2200"/>
-              <a:buFont typeface="Montserrat"/>
-              <a:buNone/>
-            </a:pPr>
-            <a:r>
-              <a:rPr b="1" i="0" lang="en-US" sz="2200" u="none" cap="none" strike="noStrike">
-                <a:solidFill>
-                  <a:srgbClr val="E2E6E9"/>
-                </a:solidFill>
-                <a:latin typeface="Montserrat"/>
-                <a:ea typeface="Montserrat"/>
-                <a:cs typeface="Montserrat"/>
-                <a:sym typeface="Montserrat"/>
-              </a:rPr>
-              <a:t>Future Applications</a:t>
-            </a:r>
-            <a:endParaRPr b="0" i="0" sz="2200" u="none" cap="none" strike="noStrike"/>
-          </a:p>
-        </p:txBody>
-      </p:sp>
-      <p:sp>
-        <p:nvSpPr>
-          <p:cNvPr id="202" name="Google Shape;202;p8"/>
-          <p:cNvSpPr/>
-          <p:nvPr/>
-        </p:nvSpPr>
-        <p:spPr>
-          <a:xfrm>
-            <a:off x="2159437" y="5706904"/>
-            <a:ext cx="6120765" cy="370165"/>
-          </a:xfrm>
-          <a:prstGeom prst="rect">
-            <a:avLst/>
-          </a:prstGeom>
-          <a:noFill/>
-          <a:ln>
-            <a:noFill/>
-          </a:ln>
-        </p:spPr>
-        <p:txBody>
-          <a:bodyPr anchorCtr="0" anchor="t" bIns="0" lIns="0" spcFirstLastPara="1" rIns="0" wrap="square" tIns="0">
-            <a:noAutofit/>
-          </a:bodyPr>
-          <a:lstStyle/>
-          <a:p>
-            <a:pPr indent="0" lvl="0" marL="0" marR="0" rtl="0" algn="l">
-              <a:lnSpc>
-                <a:spcPct val="152631"/>
-              </a:lnSpc>
-              <a:spcBef>
-                <a:spcPts val="0"/>
-              </a:spcBef>
-              <a:spcAft>
-                <a:spcPts val="0"/>
-              </a:spcAft>
-              <a:buClr>
-                <a:srgbClr val="E2E6E9"/>
-              </a:buClr>
-              <a:buSzPts val="1900"/>
-              <a:buFont typeface="Arial"/>
-              <a:buNone/>
-            </a:pPr>
-            <a:r>
-              <a:rPr b="0" i="0" lang="en-US" sz="1900" u="none" cap="none" strike="noStrike">
-                <a:solidFill>
-                  <a:srgbClr val="E2E6E9"/>
-                </a:solidFill>
-                <a:latin typeface="Arial"/>
-                <a:ea typeface="Arial"/>
-                <a:cs typeface="Arial"/>
-                <a:sym typeface="Arial"/>
-              </a:rPr>
-              <a:t>Predictive analytics for sales forecasting.</a:t>
-            </a:r>
-            <a:endParaRPr b="0" i="0" sz="1900" u="none" cap="none" strike="noStrike"/>
-          </a:p>
-        </p:txBody>
-      </p:sp>
     </p:spTree>
   </p:cSld>
   <p:clrMapOvr>
@@ -7864,7 +8639,7 @@
   <p:cSld>
     <p:spTree>
       <p:nvGrpSpPr>
-        <p:cNvPr id="207" name="Shape 207"/>
+        <p:cNvPr id="187" name="Shape 187"/>
         <p:cNvGrpSpPr/>
         <p:nvPr/>
       </p:nvGrpSpPr>
@@ -7876,16 +8651,24 @@
           <a:chExt cx="0" cy="0"/>
         </a:xfrm>
       </p:grpSpPr>
-      <p:sp>
-        <p:nvSpPr>
-          <p:cNvPr id="208" name="Google Shape;208;g33b135bed8a_1_253"/>
-          <p:cNvSpPr txBox="1"/>
+      <p:pic>
+        <p:nvPicPr>
+          <p:cNvPr id="188" name="Google Shape;188;g33b2a244876_0_10"/>
+          <p:cNvPicPr preferRelativeResize="0"/>
           <p:nvPr/>
-        </p:nvSpPr>
-        <p:spPr>
-          <a:xfrm>
-            <a:off x="4022600" y="2964725"/>
-            <a:ext cx="6350400" cy="1246800"/>
+        </p:nvPicPr>
+        <p:blipFill>
+          <a:blip r:embed="rId3">
+            <a:alphaModFix/>
+          </a:blip>
+          <a:stretch>
+            <a:fillRect/>
+          </a:stretch>
+        </p:blipFill>
+        <p:spPr>
+          <a:xfrm>
+            <a:off x="1213725" y="117600"/>
+            <a:ext cx="12604350" cy="3804075"/>
           </a:xfrm>
           <a:prstGeom prst="rect">
             <a:avLst/>
@@ -7895,40 +8678,657 @@
             <a:noFill/>
           </a:ln>
         </p:spPr>
-        <p:txBody>
-          <a:bodyPr anchorCtr="0" anchor="t" bIns="91425" lIns="91425" spcFirstLastPara="1" rIns="91425" wrap="square" tIns="91425">
-            <a:spAutoFit/>
-          </a:bodyPr>
-          <a:lstStyle/>
-          <a:p>
-            <a:pPr indent="0" lvl="0" marL="0" rtl="0" algn="l">
-              <a:lnSpc>
-                <a:spcPct val="125000"/>
-              </a:lnSpc>
-              <a:spcBef>
-                <a:spcPts val="0"/>
-              </a:spcBef>
-              <a:spcAft>
-                <a:spcPts val="0"/>
-              </a:spcAft>
-              <a:buNone/>
-            </a:pPr>
-            <a:r>
-              <a:rPr b="1" lang="en-US" sz="6900">
-                <a:solidFill>
-                  <a:schemeClr val="lt1"/>
-                </a:solidFill>
-                <a:latin typeface="Montserrat"/>
-                <a:ea typeface="Montserrat"/>
-                <a:cs typeface="Montserrat"/>
-                <a:sym typeface="Montserrat"/>
-              </a:rPr>
-              <a:t>Thank You</a:t>
-            </a:r>
-            <a:endParaRPr sz="3900"/>
-          </a:p>
-        </p:txBody>
-      </p:sp>
+      </p:pic>
+      <p:pic>
+        <p:nvPicPr>
+          <p:cNvPr id="189" name="Google Shape;189;g33b2a244876_0_10"/>
+          <p:cNvPicPr preferRelativeResize="0"/>
+          <p:nvPr/>
+        </p:nvPicPr>
+        <p:blipFill>
+          <a:blip r:embed="rId4">
+            <a:alphaModFix/>
+          </a:blip>
+          <a:stretch>
+            <a:fillRect/>
+          </a:stretch>
+        </p:blipFill>
+        <p:spPr>
+          <a:xfrm>
+            <a:off x="1509500" y="4426250"/>
+            <a:ext cx="11856200" cy="3476975"/>
+          </a:xfrm>
+          <a:prstGeom prst="rect">
+            <a:avLst/>
+          </a:prstGeom>
+          <a:noFill/>
+          <a:ln>
+            <a:noFill/>
+          </a:ln>
+        </p:spPr>
+      </p:pic>
+    </p:spTree>
+  </p:cSld>
+  <p:clrMapOvr>
+    <a:masterClrMapping/>
+  </p:clrMapOvr>
+</p:sld>
+</file>
+
+<file path=ppt/slides/slide13.xml><?xml version="1.0" encoding="utf-8"?>
+<p:sld xmlns:a="http://schemas.openxmlformats.org/drawingml/2006/main" xmlns:r="http://schemas.openxmlformats.org/officeDocument/2006/relationships" xmlns:mc="http://schemas.openxmlformats.org/markup-compatibility/2006" xmlns:mv="urn:schemas-microsoft-com:mac:vml" xmlns:p="http://schemas.openxmlformats.org/presentationml/2006/main" xmlns:c="http://schemas.openxmlformats.org/drawingml/2006/chart" xmlns:dgm="http://schemas.openxmlformats.org/drawingml/2006/diagram" xmlns:o="urn:schemas-microsoft-com:office:office" xmlns:v="urn:schemas-microsoft-com:vml" xmlns:pvml="urn:schemas-microsoft-com:office:powerpoint" xmlns:com="http://schemas.openxmlformats.org/drawingml/2006/compatibility" xmlns:p14="http://schemas.microsoft.com/office/powerpoint/2010/main" xmlns:p15="http://schemas.microsoft.com/office/powerpoint/2012/main" xmlns:ahyp="http://schemas.microsoft.com/office/drawing/2018/hyperlinkcolor">
+  <p:cSld>
+    <p:spTree>
+      <p:nvGrpSpPr>
+        <p:cNvPr id="194" name="Shape 194"/>
+        <p:cNvGrpSpPr/>
+        <p:nvPr/>
+      </p:nvGrpSpPr>
+      <p:grpSpPr>
+        <a:xfrm>
+          <a:off x="0" y="0"/>
+          <a:ext cx="0" cy="0"/>
+          <a:chOff x="0" y="0"/>
+          <a:chExt cx="0" cy="0"/>
+        </a:xfrm>
+      </p:grpSpPr>
+      <p:pic>
+        <p:nvPicPr>
+          <p:cNvPr id="195" name="Google Shape;195;g33b2a244876_0_16"/>
+          <p:cNvPicPr preferRelativeResize="0"/>
+          <p:nvPr/>
+        </p:nvPicPr>
+        <p:blipFill>
+          <a:blip r:embed="rId3">
+            <a:alphaModFix/>
+          </a:blip>
+          <a:stretch>
+            <a:fillRect/>
+          </a:stretch>
+        </p:blipFill>
+        <p:spPr>
+          <a:xfrm>
+            <a:off x="152400" y="152400"/>
+            <a:ext cx="14325602" cy="4012850"/>
+          </a:xfrm>
+          <a:prstGeom prst="rect">
+            <a:avLst/>
+          </a:prstGeom>
+          <a:noFill/>
+          <a:ln>
+            <a:noFill/>
+          </a:ln>
+        </p:spPr>
+      </p:pic>
+      <p:pic>
+        <p:nvPicPr>
+          <p:cNvPr id="196" name="Google Shape;196;g33b2a244876_0_16"/>
+          <p:cNvPicPr preferRelativeResize="0"/>
+          <p:nvPr/>
+        </p:nvPicPr>
+        <p:blipFill>
+          <a:blip r:embed="rId4">
+            <a:alphaModFix/>
+          </a:blip>
+          <a:stretch>
+            <a:fillRect/>
+          </a:stretch>
+        </p:blipFill>
+        <p:spPr>
+          <a:xfrm>
+            <a:off x="152400" y="4165250"/>
+            <a:ext cx="14396426" cy="3911950"/>
+          </a:xfrm>
+          <a:prstGeom prst="rect">
+            <a:avLst/>
+          </a:prstGeom>
+          <a:noFill/>
+          <a:ln>
+            <a:noFill/>
+          </a:ln>
+        </p:spPr>
+      </p:pic>
+    </p:spTree>
+  </p:cSld>
+  <p:clrMapOvr>
+    <a:masterClrMapping/>
+  </p:clrMapOvr>
+</p:sld>
+</file>
+
+<file path=ppt/slides/slide14.xml><?xml version="1.0" encoding="utf-8"?>
+<p:sld xmlns:a="http://schemas.openxmlformats.org/drawingml/2006/main" xmlns:r="http://schemas.openxmlformats.org/officeDocument/2006/relationships" xmlns:mc="http://schemas.openxmlformats.org/markup-compatibility/2006" xmlns:mv="urn:schemas-microsoft-com:mac:vml" xmlns:p="http://schemas.openxmlformats.org/presentationml/2006/main" xmlns:c="http://schemas.openxmlformats.org/drawingml/2006/chart" xmlns:dgm="http://schemas.openxmlformats.org/drawingml/2006/diagram" xmlns:o="urn:schemas-microsoft-com:office:office" xmlns:v="urn:schemas-microsoft-com:vml" xmlns:pvml="urn:schemas-microsoft-com:office:powerpoint" xmlns:com="http://schemas.openxmlformats.org/drawingml/2006/compatibility" xmlns:p14="http://schemas.microsoft.com/office/powerpoint/2010/main" xmlns:p15="http://schemas.microsoft.com/office/powerpoint/2012/main" xmlns:ahyp="http://schemas.microsoft.com/office/drawing/2018/hyperlinkcolor">
+  <p:cSld>
+    <p:spTree>
+      <p:nvGrpSpPr>
+        <p:cNvPr id="201" name="Shape 201"/>
+        <p:cNvGrpSpPr/>
+        <p:nvPr/>
+      </p:nvGrpSpPr>
+      <p:grpSpPr>
+        <a:xfrm>
+          <a:off x="0" y="0"/>
+          <a:ext cx="0" cy="0"/>
+          <a:chOff x="0" y="0"/>
+          <a:chExt cx="0" cy="0"/>
+        </a:xfrm>
+      </p:grpSpPr>
+      <p:pic>
+        <p:nvPicPr>
+          <p:cNvPr id="202" name="Google Shape;202;g33b2a244876_0_22"/>
+          <p:cNvPicPr preferRelativeResize="0"/>
+          <p:nvPr/>
+        </p:nvPicPr>
+        <p:blipFill>
+          <a:blip r:embed="rId3">
+            <a:alphaModFix/>
+          </a:blip>
+          <a:stretch>
+            <a:fillRect/>
+          </a:stretch>
+        </p:blipFill>
+        <p:spPr>
+          <a:xfrm>
+            <a:off x="152400" y="152400"/>
+            <a:ext cx="14325598" cy="3943250"/>
+          </a:xfrm>
+          <a:prstGeom prst="rect">
+            <a:avLst/>
+          </a:prstGeom>
+          <a:noFill/>
+          <a:ln>
+            <a:noFill/>
+          </a:ln>
+        </p:spPr>
+      </p:pic>
+      <p:pic>
+        <p:nvPicPr>
+          <p:cNvPr id="203" name="Google Shape;203;g33b2a244876_0_22"/>
+          <p:cNvPicPr preferRelativeResize="0"/>
+          <p:nvPr/>
+        </p:nvPicPr>
+        <p:blipFill>
+          <a:blip r:embed="rId4">
+            <a:alphaModFix/>
+          </a:blip>
+          <a:stretch>
+            <a:fillRect/>
+          </a:stretch>
+        </p:blipFill>
+        <p:spPr>
+          <a:xfrm>
+            <a:off x="943000" y="4095650"/>
+            <a:ext cx="12509701" cy="3829150"/>
+          </a:xfrm>
+          <a:prstGeom prst="rect">
+            <a:avLst/>
+          </a:prstGeom>
+          <a:noFill/>
+          <a:ln>
+            <a:noFill/>
+          </a:ln>
+        </p:spPr>
+      </p:pic>
+    </p:spTree>
+  </p:cSld>
+  <p:clrMapOvr>
+    <a:masterClrMapping/>
+  </p:clrMapOvr>
+</p:sld>
+</file>
+
+<file path=ppt/slides/slide15.xml><?xml version="1.0" encoding="utf-8"?>
+<p:sld xmlns:a="http://schemas.openxmlformats.org/drawingml/2006/main" xmlns:r="http://schemas.openxmlformats.org/officeDocument/2006/relationships" xmlns:mc="http://schemas.openxmlformats.org/markup-compatibility/2006" xmlns:mv="urn:schemas-microsoft-com:mac:vml" xmlns:p="http://schemas.openxmlformats.org/presentationml/2006/main" xmlns:c="http://schemas.openxmlformats.org/drawingml/2006/chart" xmlns:dgm="http://schemas.openxmlformats.org/drawingml/2006/diagram" xmlns:o="urn:schemas-microsoft-com:office:office" xmlns:v="urn:schemas-microsoft-com:vml" xmlns:pvml="urn:schemas-microsoft-com:office:powerpoint" xmlns:com="http://schemas.openxmlformats.org/drawingml/2006/compatibility" xmlns:p14="http://schemas.microsoft.com/office/powerpoint/2010/main" xmlns:p15="http://schemas.microsoft.com/office/powerpoint/2012/main" xmlns:ahyp="http://schemas.microsoft.com/office/drawing/2018/hyperlinkcolor">
+  <p:cSld>
+    <p:spTree>
+      <p:nvGrpSpPr>
+        <p:cNvPr id="208" name="Shape 208"/>
+        <p:cNvGrpSpPr/>
+        <p:nvPr/>
+      </p:nvGrpSpPr>
+      <p:grpSpPr>
+        <a:xfrm>
+          <a:off x="0" y="0"/>
+          <a:ext cx="0" cy="0"/>
+          <a:chOff x="0" y="0"/>
+          <a:chExt cx="0" cy="0"/>
+        </a:xfrm>
+      </p:grpSpPr>
+      <p:pic>
+        <p:nvPicPr>
+          <p:cNvPr id="209" name="Google Shape;209;g33b2a244876_0_28"/>
+          <p:cNvPicPr preferRelativeResize="0"/>
+          <p:nvPr/>
+        </p:nvPicPr>
+        <p:blipFill>
+          <a:blip r:embed="rId3">
+            <a:alphaModFix/>
+          </a:blip>
+          <a:stretch>
+            <a:fillRect/>
+          </a:stretch>
+        </p:blipFill>
+        <p:spPr>
+          <a:xfrm>
+            <a:off x="152400" y="152400"/>
+            <a:ext cx="14477999" cy="1876425"/>
+          </a:xfrm>
+          <a:prstGeom prst="rect">
+            <a:avLst/>
+          </a:prstGeom>
+          <a:noFill/>
+          <a:ln>
+            <a:noFill/>
+          </a:ln>
+        </p:spPr>
+      </p:pic>
+      <p:pic>
+        <p:nvPicPr>
+          <p:cNvPr id="210" name="Google Shape;210;g33b2a244876_0_28"/>
+          <p:cNvPicPr preferRelativeResize="0"/>
+          <p:nvPr/>
+        </p:nvPicPr>
+        <p:blipFill rotWithShape="1">
+          <a:blip r:embed="rId4">
+            <a:alphaModFix/>
+          </a:blip>
+          <a:srcRect b="0" l="0" r="635" t="0"/>
+          <a:stretch/>
+        </p:blipFill>
+        <p:spPr>
+          <a:xfrm>
+            <a:off x="0" y="1886025"/>
+            <a:ext cx="14630400" cy="6191176"/>
+          </a:xfrm>
+          <a:prstGeom prst="rect">
+            <a:avLst/>
+          </a:prstGeom>
+          <a:noFill/>
+          <a:ln>
+            <a:noFill/>
+          </a:ln>
+        </p:spPr>
+      </p:pic>
+    </p:spTree>
+  </p:cSld>
+  <p:clrMapOvr>
+    <a:masterClrMapping/>
+  </p:clrMapOvr>
+</p:sld>
+</file>
+
+<file path=ppt/slides/slide16.xml><?xml version="1.0" encoding="utf-8"?>
+<p:sld xmlns:a="http://schemas.openxmlformats.org/drawingml/2006/main" xmlns:r="http://schemas.openxmlformats.org/officeDocument/2006/relationships" xmlns:mc="http://schemas.openxmlformats.org/markup-compatibility/2006" xmlns:mv="urn:schemas-microsoft-com:mac:vml" xmlns:p="http://schemas.openxmlformats.org/presentationml/2006/main" xmlns:c="http://schemas.openxmlformats.org/drawingml/2006/chart" xmlns:dgm="http://schemas.openxmlformats.org/drawingml/2006/diagram" xmlns:o="urn:schemas-microsoft-com:office:office" xmlns:v="urn:schemas-microsoft-com:vml" xmlns:pvml="urn:schemas-microsoft-com:office:powerpoint" xmlns:com="http://schemas.openxmlformats.org/drawingml/2006/compatibility" xmlns:p14="http://schemas.microsoft.com/office/powerpoint/2010/main" xmlns:p15="http://schemas.microsoft.com/office/powerpoint/2012/main" xmlns:ahyp="http://schemas.microsoft.com/office/drawing/2018/hyperlinkcolor">
+  <p:cSld>
+    <p:spTree>
+      <p:nvGrpSpPr>
+        <p:cNvPr id="215" name="Shape 215"/>
+        <p:cNvGrpSpPr/>
+        <p:nvPr/>
+      </p:nvGrpSpPr>
+      <p:grpSpPr>
+        <a:xfrm>
+          <a:off x="0" y="0"/>
+          <a:ext cx="0" cy="0"/>
+          <a:chOff x="0" y="0"/>
+          <a:chExt cx="0" cy="0"/>
+        </a:xfrm>
+      </p:grpSpPr>
+      <p:pic>
+        <p:nvPicPr>
+          <p:cNvPr id="216" name="Google Shape;216;g33b2a244876_1_0"/>
+          <p:cNvPicPr preferRelativeResize="0"/>
+          <p:nvPr/>
+        </p:nvPicPr>
+        <p:blipFill>
+          <a:blip r:embed="rId3">
+            <a:alphaModFix/>
+          </a:blip>
+          <a:stretch>
+            <a:fillRect/>
+          </a:stretch>
+        </p:blipFill>
+        <p:spPr>
+          <a:xfrm>
+            <a:off x="152400" y="152400"/>
+            <a:ext cx="11334249" cy="2203400"/>
+          </a:xfrm>
+          <a:prstGeom prst="rect">
+            <a:avLst/>
+          </a:prstGeom>
+          <a:noFill/>
+          <a:ln>
+            <a:noFill/>
+          </a:ln>
+        </p:spPr>
+      </p:pic>
+      <p:pic>
+        <p:nvPicPr>
+          <p:cNvPr id="217" name="Google Shape;217;g33b2a244876_1_0"/>
+          <p:cNvPicPr preferRelativeResize="0"/>
+          <p:nvPr/>
+        </p:nvPicPr>
+        <p:blipFill>
+          <a:blip r:embed="rId4">
+            <a:alphaModFix/>
+          </a:blip>
+          <a:stretch>
+            <a:fillRect/>
+          </a:stretch>
+        </p:blipFill>
+        <p:spPr>
+          <a:xfrm>
+            <a:off x="152400" y="2629975"/>
+            <a:ext cx="10272925" cy="2028825"/>
+          </a:xfrm>
+          <a:prstGeom prst="rect">
+            <a:avLst/>
+          </a:prstGeom>
+          <a:noFill/>
+          <a:ln>
+            <a:noFill/>
+          </a:ln>
+        </p:spPr>
+      </p:pic>
+      <p:pic>
+        <p:nvPicPr>
+          <p:cNvPr id="218" name="Google Shape;218;g33b2a244876_1_0"/>
+          <p:cNvPicPr preferRelativeResize="0"/>
+          <p:nvPr/>
+        </p:nvPicPr>
+        <p:blipFill>
+          <a:blip r:embed="rId5">
+            <a:alphaModFix/>
+          </a:blip>
+          <a:stretch>
+            <a:fillRect/>
+          </a:stretch>
+        </p:blipFill>
+        <p:spPr>
+          <a:xfrm>
+            <a:off x="21913" y="4932975"/>
+            <a:ext cx="10533900" cy="2124075"/>
+          </a:xfrm>
+          <a:prstGeom prst="rect">
+            <a:avLst/>
+          </a:prstGeom>
+          <a:noFill/>
+          <a:ln>
+            <a:noFill/>
+          </a:ln>
+        </p:spPr>
+      </p:pic>
+    </p:spTree>
+  </p:cSld>
+  <p:clrMapOvr>
+    <a:masterClrMapping/>
+  </p:clrMapOvr>
+</p:sld>
+</file>
+
+<file path=ppt/slides/slide17.xml><?xml version="1.0" encoding="utf-8"?>
+<p:sld xmlns:a="http://schemas.openxmlformats.org/drawingml/2006/main" xmlns:r="http://schemas.openxmlformats.org/officeDocument/2006/relationships" xmlns:mc="http://schemas.openxmlformats.org/markup-compatibility/2006" xmlns:mv="urn:schemas-microsoft-com:mac:vml" xmlns:p="http://schemas.openxmlformats.org/presentationml/2006/main" xmlns:c="http://schemas.openxmlformats.org/drawingml/2006/chart" xmlns:dgm="http://schemas.openxmlformats.org/drawingml/2006/diagram" xmlns:o="urn:schemas-microsoft-com:office:office" xmlns:v="urn:schemas-microsoft-com:vml" xmlns:pvml="urn:schemas-microsoft-com:office:powerpoint" xmlns:com="http://schemas.openxmlformats.org/drawingml/2006/compatibility" xmlns:p14="http://schemas.microsoft.com/office/powerpoint/2010/main" xmlns:p15="http://schemas.microsoft.com/office/powerpoint/2012/main" xmlns:ahyp="http://schemas.microsoft.com/office/drawing/2018/hyperlinkcolor">
+  <p:cSld>
+    <p:spTree>
+      <p:nvGrpSpPr>
+        <p:cNvPr id="223" name="Shape 223"/>
+        <p:cNvGrpSpPr/>
+        <p:nvPr/>
+      </p:nvGrpSpPr>
+      <p:grpSpPr>
+        <a:xfrm>
+          <a:off x="0" y="0"/>
+          <a:ext cx="0" cy="0"/>
+          <a:chOff x="0" y="0"/>
+          <a:chExt cx="0" cy="0"/>
+        </a:xfrm>
+      </p:grpSpPr>
+      <p:pic>
+        <p:nvPicPr>
+          <p:cNvPr id="224" name="Google Shape;224;g33b2a244876_1_7"/>
+          <p:cNvPicPr preferRelativeResize="0"/>
+          <p:nvPr/>
+        </p:nvPicPr>
+        <p:blipFill>
+          <a:blip r:embed="rId3">
+            <a:alphaModFix/>
+          </a:blip>
+          <a:stretch>
+            <a:fillRect/>
+          </a:stretch>
+        </p:blipFill>
+        <p:spPr>
+          <a:xfrm>
+            <a:off x="142675" y="4775250"/>
+            <a:ext cx="14179951" cy="2733675"/>
+          </a:xfrm>
+          <a:prstGeom prst="rect">
+            <a:avLst/>
+          </a:prstGeom>
+          <a:noFill/>
+          <a:ln>
+            <a:noFill/>
+          </a:ln>
+        </p:spPr>
+      </p:pic>
+      <p:pic>
+        <p:nvPicPr>
+          <p:cNvPr id="225" name="Google Shape;225;g33b2a244876_1_7"/>
+          <p:cNvPicPr preferRelativeResize="0"/>
+          <p:nvPr/>
+        </p:nvPicPr>
+        <p:blipFill>
+          <a:blip r:embed="rId4">
+            <a:alphaModFix/>
+          </a:blip>
+          <a:stretch>
+            <a:fillRect/>
+          </a:stretch>
+        </p:blipFill>
+        <p:spPr>
+          <a:xfrm>
+            <a:off x="142675" y="299575"/>
+            <a:ext cx="6628899" cy="4613824"/>
+          </a:xfrm>
+          <a:prstGeom prst="rect">
+            <a:avLst/>
+          </a:prstGeom>
+          <a:noFill/>
+          <a:ln>
+            <a:noFill/>
+          </a:ln>
+        </p:spPr>
+      </p:pic>
+      <p:pic>
+        <p:nvPicPr>
+          <p:cNvPr id="226" name="Google Shape;226;g33b2a244876_1_7"/>
+          <p:cNvPicPr preferRelativeResize="0"/>
+          <p:nvPr/>
+        </p:nvPicPr>
+        <p:blipFill>
+          <a:blip r:embed="rId5">
+            <a:alphaModFix/>
+          </a:blip>
+          <a:stretch>
+            <a:fillRect/>
+          </a:stretch>
+        </p:blipFill>
+        <p:spPr>
+          <a:xfrm>
+            <a:off x="7167575" y="299575"/>
+            <a:ext cx="6245775" cy="4683425"/>
+          </a:xfrm>
+          <a:prstGeom prst="rect">
+            <a:avLst/>
+          </a:prstGeom>
+          <a:noFill/>
+          <a:ln>
+            <a:noFill/>
+          </a:ln>
+        </p:spPr>
+      </p:pic>
+    </p:spTree>
+  </p:cSld>
+  <p:clrMapOvr>
+    <a:masterClrMapping/>
+  </p:clrMapOvr>
+</p:sld>
+</file>
+
+<file path=ppt/slides/slide18.xml><?xml version="1.0" encoding="utf-8"?>
+<p:sld xmlns:a="http://schemas.openxmlformats.org/drawingml/2006/main" xmlns:r="http://schemas.openxmlformats.org/officeDocument/2006/relationships" xmlns:mc="http://schemas.openxmlformats.org/markup-compatibility/2006" xmlns:mv="urn:schemas-microsoft-com:mac:vml" xmlns:p="http://schemas.openxmlformats.org/presentationml/2006/main" xmlns:c="http://schemas.openxmlformats.org/drawingml/2006/chart" xmlns:dgm="http://schemas.openxmlformats.org/drawingml/2006/diagram" xmlns:o="urn:schemas-microsoft-com:office:office" xmlns:v="urn:schemas-microsoft-com:vml" xmlns:pvml="urn:schemas-microsoft-com:office:powerpoint" xmlns:com="http://schemas.openxmlformats.org/drawingml/2006/compatibility" xmlns:p14="http://schemas.microsoft.com/office/powerpoint/2010/main" xmlns:p15="http://schemas.microsoft.com/office/powerpoint/2012/main" xmlns:ahyp="http://schemas.microsoft.com/office/drawing/2018/hyperlinkcolor">
+  <p:cSld>
+    <p:spTree>
+      <p:nvGrpSpPr>
+        <p:cNvPr id="231" name="Shape 231"/>
+        <p:cNvGrpSpPr/>
+        <p:nvPr/>
+      </p:nvGrpSpPr>
+      <p:grpSpPr>
+        <a:xfrm>
+          <a:off x="0" y="0"/>
+          <a:ext cx="0" cy="0"/>
+          <a:chOff x="0" y="0"/>
+          <a:chExt cx="0" cy="0"/>
+        </a:xfrm>
+      </p:grpSpPr>
+      <p:pic>
+        <p:nvPicPr>
+          <p:cNvPr id="232" name="Google Shape;232;g33b2a244876_1_17"/>
+          <p:cNvPicPr preferRelativeResize="0"/>
+          <p:nvPr/>
+        </p:nvPicPr>
+        <p:blipFill>
+          <a:blip r:embed="rId3">
+            <a:alphaModFix/>
+          </a:blip>
+          <a:stretch>
+            <a:fillRect/>
+          </a:stretch>
+        </p:blipFill>
+        <p:spPr>
+          <a:xfrm>
+            <a:off x="82825" y="93950"/>
+            <a:ext cx="12847899" cy="4593275"/>
+          </a:xfrm>
+          <a:prstGeom prst="rect">
+            <a:avLst/>
+          </a:prstGeom>
+          <a:noFill/>
+          <a:ln>
+            <a:noFill/>
+          </a:ln>
+        </p:spPr>
+      </p:pic>
+      <p:pic>
+        <p:nvPicPr>
+          <p:cNvPr id="233" name="Google Shape;233;g33b2a244876_1_17"/>
+          <p:cNvPicPr preferRelativeResize="0"/>
+          <p:nvPr/>
+        </p:nvPicPr>
+        <p:blipFill>
+          <a:blip r:embed="rId4">
+            <a:alphaModFix/>
+          </a:blip>
+          <a:stretch>
+            <a:fillRect/>
+          </a:stretch>
+        </p:blipFill>
+        <p:spPr>
+          <a:xfrm>
+            <a:off x="152400" y="4426508"/>
+            <a:ext cx="12344400" cy="3028950"/>
+          </a:xfrm>
+          <a:prstGeom prst="rect">
+            <a:avLst/>
+          </a:prstGeom>
+          <a:noFill/>
+          <a:ln>
+            <a:noFill/>
+          </a:ln>
+        </p:spPr>
+      </p:pic>
+    </p:spTree>
+  </p:cSld>
+  <p:clrMapOvr>
+    <a:masterClrMapping/>
+  </p:clrMapOvr>
+</p:sld>
+</file>
+
+<file path=ppt/slides/slide19.xml><?xml version="1.0" encoding="utf-8"?>
+<p:sld xmlns:a="http://schemas.openxmlformats.org/drawingml/2006/main" xmlns:r="http://schemas.openxmlformats.org/officeDocument/2006/relationships" xmlns:mc="http://schemas.openxmlformats.org/markup-compatibility/2006" xmlns:mv="urn:schemas-microsoft-com:mac:vml" xmlns:p="http://schemas.openxmlformats.org/presentationml/2006/main" xmlns:c="http://schemas.openxmlformats.org/drawingml/2006/chart" xmlns:dgm="http://schemas.openxmlformats.org/drawingml/2006/diagram" xmlns:o="urn:schemas-microsoft-com:office:office" xmlns:v="urn:schemas-microsoft-com:vml" xmlns:pvml="urn:schemas-microsoft-com:office:powerpoint" xmlns:com="http://schemas.openxmlformats.org/drawingml/2006/compatibility" xmlns:p14="http://schemas.microsoft.com/office/powerpoint/2010/main" xmlns:p15="http://schemas.microsoft.com/office/powerpoint/2012/main" xmlns:ahyp="http://schemas.microsoft.com/office/drawing/2018/hyperlinkcolor">
+  <p:cSld>
+    <p:spTree>
+      <p:nvGrpSpPr>
+        <p:cNvPr id="238" name="Shape 238"/>
+        <p:cNvGrpSpPr/>
+        <p:nvPr/>
+      </p:nvGrpSpPr>
+      <p:grpSpPr>
+        <a:xfrm>
+          <a:off x="0" y="0"/>
+          <a:ext cx="0" cy="0"/>
+          <a:chOff x="0" y="0"/>
+          <a:chExt cx="0" cy="0"/>
+        </a:xfrm>
+      </p:grpSpPr>
+      <p:pic>
+        <p:nvPicPr>
+          <p:cNvPr id="239" name="Google Shape;239;g33b2a244876_1_23"/>
+          <p:cNvPicPr preferRelativeResize="0"/>
+          <p:nvPr/>
+        </p:nvPicPr>
+        <p:blipFill>
+          <a:blip r:embed="rId3">
+            <a:alphaModFix/>
+          </a:blip>
+          <a:stretch>
+            <a:fillRect/>
+          </a:stretch>
+        </p:blipFill>
+        <p:spPr>
+          <a:xfrm>
+            <a:off x="152400" y="152400"/>
+            <a:ext cx="14325600" cy="5195975"/>
+          </a:xfrm>
+          <a:prstGeom prst="rect">
+            <a:avLst/>
+          </a:prstGeom>
+          <a:noFill/>
+          <a:ln>
+            <a:noFill/>
+          </a:ln>
+        </p:spPr>
+      </p:pic>
+      <p:pic>
+        <p:nvPicPr>
+          <p:cNvPr id="240" name="Google Shape;240;g33b2a244876_1_23"/>
+          <p:cNvPicPr preferRelativeResize="0"/>
+          <p:nvPr/>
+        </p:nvPicPr>
+        <p:blipFill>
+          <a:blip r:embed="rId4">
+            <a:alphaModFix/>
+          </a:blip>
+          <a:stretch>
+            <a:fillRect/>
+          </a:stretch>
+        </p:blipFill>
+        <p:spPr>
+          <a:xfrm>
+            <a:off x="152400" y="5500775"/>
+            <a:ext cx="14239825" cy="2576425"/>
+          </a:xfrm>
+          <a:prstGeom prst="rect">
+            <a:avLst/>
+          </a:prstGeom>
+          <a:noFill/>
+          <a:ln>
+            <a:noFill/>
+          </a:ln>
+        </p:spPr>
+      </p:pic>
     </p:spTree>
   </p:cSld>
   <p:clrMapOvr>
@@ -7949,7 +9349,7 @@
     </p:bg>
     <p:spTree>
       <p:nvGrpSpPr>
-        <p:cNvPr id="72" name="Shape 72"/>
+        <p:cNvPr id="71" name="Shape 71"/>
         <p:cNvGrpSpPr/>
         <p:nvPr/>
       </p:nvGrpSpPr>
@@ -7963,7 +9363,7 @@
       </p:grpSpPr>
       <p:sp>
         <p:nvSpPr>
-          <p:cNvPr id="73" name="Google Shape;73;g33b135bed8a_2_0"/>
+          <p:cNvPr id="72" name="Google Shape;72;g33b135bed8a_2_0"/>
           <p:cNvSpPr txBox="1"/>
           <p:nvPr>
             <p:ph type="title"/>
@@ -8012,7 +9412,7 @@
       </p:sp>
       <p:graphicFrame>
         <p:nvGraphicFramePr>
-          <p:cNvPr id="74" name="Google Shape;74;g33b135bed8a_2_0"/>
+          <p:cNvPr id="73" name="Google Shape;73;g33b135bed8a_2_0"/>
           <p:cNvGraphicFramePr/>
           <p:nvPr/>
         </p:nvGraphicFramePr>
@@ -8025,7 +9425,7 @@
             <a:tbl>
               <a:tblPr bandRow="1" firstRow="1">
                 <a:noFill/>
-                <a:tableStyleId>{90FEB36F-434B-43E3-A6BA-41DDFBB3F984}</a:tableStyleId>
+                <a:tableStyleId>{B9C0FD62-21BA-4921-A236-27C14B5AFE28}</a:tableStyleId>
               </a:tblPr>
               <a:tblGrid>
                 <a:gridCol w="967250"/>
@@ -8072,7 +9472,7 @@
                       </a:pPr>
                       <a:r>
                         <a:rPr lang="en-US" sz="2200"/>
-                        <a:t>INTRODUCTION</a:t>
+                        <a:t>Introduction</a:t>
                       </a:r>
                       <a:endParaRPr sz="1700"/>
                     </a:p>
@@ -8436,7 +9836,7 @@
                         <a:rPr lang="en-US" sz="2200"/>
                         <a:t>Challenges</a:t>
                       </a:r>
-                      <a:endParaRPr sz="1700"/>
+                      <a:endParaRPr sz="2200"/>
                     </a:p>
                   </a:txBody>
                   <a:tcPr marT="54875" marB="54875" marR="138150" marL="138150"/>
@@ -8482,6 +9882,76 @@
                       <a:r>
                         <a:rPr lang="en-US" sz="2200"/>
                         <a:t>7</a:t>
+                      </a:r>
+                      <a:endParaRPr sz="2200"/>
+                    </a:p>
+                  </a:txBody>
+                  <a:tcPr marT="54875" marB="54875" marR="138150" marL="138150"/>
+                </a:tc>
+                <a:tc>
+                  <a:txBody>
+                    <a:bodyPr/>
+                    <a:lstStyle/>
+                    <a:p>
+                      <a:pPr indent="0" lvl="0" marL="0" marR="0" rtl="0" algn="l">
+                        <a:spcBef>
+                          <a:spcPts val="0"/>
+                        </a:spcBef>
+                        <a:spcAft>
+                          <a:spcPts val="0"/>
+                        </a:spcAft>
+                        <a:buNone/>
+                      </a:pPr>
+                      <a:r>
+                        <a:rPr lang="en-US" sz="2200"/>
+                        <a:t>Analysis-Visualizations</a:t>
+                      </a:r>
+                      <a:endParaRPr sz="2200"/>
+                    </a:p>
+                  </a:txBody>
+                  <a:tcPr marT="54875" marB="54875" marR="138150" marL="138150"/>
+                </a:tc>
+                <a:tc>
+                  <a:txBody>
+                    <a:bodyPr/>
+                    <a:lstStyle/>
+                    <a:p>
+                      <a:pPr indent="0" lvl="0" marL="0" marR="0" rtl="0" algn="l">
+                        <a:spcBef>
+                          <a:spcPts val="0"/>
+                        </a:spcBef>
+                        <a:spcAft>
+                          <a:spcPts val="0"/>
+                        </a:spcAft>
+                        <a:buNone/>
+                      </a:pPr>
+                      <a:r>
+                        <a:t/>
+                      </a:r>
+                      <a:endParaRPr sz="2200"/>
+                    </a:p>
+                  </a:txBody>
+                  <a:tcPr marT="54875" marB="54875" marR="138150" marL="138150"/>
+                </a:tc>
+              </a:tr>
+              <a:tr h="652175">
+                <a:tc>
+                  <a:txBody>
+                    <a:bodyPr/>
+                    <a:lstStyle/>
+                    <a:p>
+                      <a:pPr indent="0" lvl="0" marL="0" marR="0" rtl="0" algn="l">
+                        <a:spcBef>
+                          <a:spcPts val="0"/>
+                        </a:spcBef>
+                        <a:spcAft>
+                          <a:spcPts val="0"/>
+                        </a:spcAft>
+                        <a:buNone/>
+                      </a:pPr>
+                      <a:r>
+                        <a:rPr lang="en-US" sz="2200"/>
+                        <a:t>8</a:t>
                       </a:r>
                       <a:endParaRPr sz="1700"/>
                     </a:p>
@@ -8540,7 +10010,7 @@
       </p:graphicFrame>
       <p:sp>
         <p:nvSpPr>
-          <p:cNvPr id="75" name="Google Shape;75;g33b135bed8a_2_0"/>
+          <p:cNvPr id="74" name="Google Shape;74;g33b135bed8a_2_0"/>
           <p:cNvSpPr txBox="1"/>
           <p:nvPr>
             <p:ph idx="12" type="sldNum"/>
@@ -8588,7 +10058,7 @@
       </p:sp>
       <p:sp>
         <p:nvSpPr>
-          <p:cNvPr id="76" name="Google Shape;76;g33b135bed8a_2_0"/>
+          <p:cNvPr id="75" name="Google Shape;75;g33b135bed8a_2_0"/>
           <p:cNvSpPr txBox="1"/>
           <p:nvPr/>
         </p:nvSpPr>
@@ -8621,23 +10091,7 @@
               <a:buNone/>
             </a:pPr>
             <a:r>
-              <a:rPr lang="en-US" sz="2600" u="sng">
-                <a:solidFill>
-                  <a:schemeClr val="dk1"/>
-                </a:solidFill>
-                <a:latin typeface="Trebuchet MS"/>
-                <a:ea typeface="Trebuchet MS"/>
-                <a:cs typeface="Trebuchet MS"/>
-                <a:sym typeface="Trebuchet MS"/>
-                <a:hlinkClick action="ppaction://hlinksldjump" r:id="rId3">
-                  <a:extLst>
-                    <a:ext uri="{A12FA001-AC4F-418D-AE19-62706E023703}">
-                      <ahyp:hlinkClr val="tx"/>
-                    </a:ext>
-                  </a:extLst>
-                </a:hlinkClick>
-              </a:rPr>
-              <a:t>Next</a:t>
+              <a:t/>
             </a:r>
             <a:endParaRPr sz="2600">
               <a:solidFill>
@@ -8653,7 +10107,7 @@
       </p:sp>
       <p:sp>
         <p:nvSpPr>
-          <p:cNvPr id="77" name="Google Shape;77;g33b135bed8a_2_0"/>
+          <p:cNvPr id="76" name="Google Shape;76;g33b135bed8a_2_0"/>
           <p:cNvSpPr txBox="1"/>
           <p:nvPr/>
         </p:nvSpPr>
@@ -8716,12 +10170,12 @@
 </p:sld>
 </file>
 
-<file path=ppt/slides/slide3.xml><?xml version="1.0" encoding="utf-8"?>
+<file path=ppt/slides/slide20.xml><?xml version="1.0" encoding="utf-8"?>
 <p:sld xmlns:a="http://schemas.openxmlformats.org/drawingml/2006/main" xmlns:r="http://schemas.openxmlformats.org/officeDocument/2006/relationships" xmlns:mc="http://schemas.openxmlformats.org/markup-compatibility/2006" xmlns:mv="urn:schemas-microsoft-com:mac:vml" xmlns:p="http://schemas.openxmlformats.org/presentationml/2006/main" xmlns:c="http://schemas.openxmlformats.org/drawingml/2006/chart" xmlns:dgm="http://schemas.openxmlformats.org/drawingml/2006/diagram" xmlns:o="urn:schemas-microsoft-com:office:office" xmlns:v="urn:schemas-microsoft-com:vml" xmlns:pvml="urn:schemas-microsoft-com:office:powerpoint" xmlns:com="http://schemas.openxmlformats.org/drawingml/2006/compatibility" xmlns:p14="http://schemas.microsoft.com/office/powerpoint/2010/main" xmlns:p15="http://schemas.microsoft.com/office/powerpoint/2012/main" xmlns:ahyp="http://schemas.microsoft.com/office/drawing/2018/hyperlinkcolor">
   <p:cSld>
     <p:spTree>
       <p:nvGrpSpPr>
-        <p:cNvPr id="82" name="Shape 82"/>
+        <p:cNvPr id="245" name="Shape 245"/>
         <p:cNvGrpSpPr/>
         <p:nvPr/>
       </p:nvGrpSpPr>
@@ -8733,9 +10187,1516 @@
           <a:chExt cx="0" cy="0"/>
         </a:xfrm>
       </p:grpSpPr>
-      <p:sp>
-        <p:nvSpPr>
-          <p:cNvPr id="83" name="Google Shape;83;p1"/>
+      <p:pic>
+        <p:nvPicPr>
+          <p:cNvPr id="246" name="Google Shape;246;g33b2a244876_1_31"/>
+          <p:cNvPicPr preferRelativeResize="0"/>
+          <p:nvPr/>
+        </p:nvPicPr>
+        <p:blipFill>
+          <a:blip r:embed="rId3">
+            <a:alphaModFix/>
+          </a:blip>
+          <a:stretch>
+            <a:fillRect/>
+          </a:stretch>
+        </p:blipFill>
+        <p:spPr>
+          <a:xfrm>
+            <a:off x="152400" y="152400"/>
+            <a:ext cx="12763500" cy="5126375"/>
+          </a:xfrm>
+          <a:prstGeom prst="rect">
+            <a:avLst/>
+          </a:prstGeom>
+          <a:noFill/>
+          <a:ln>
+            <a:noFill/>
+          </a:ln>
+        </p:spPr>
+      </p:pic>
+      <p:pic>
+        <p:nvPicPr>
+          <p:cNvPr id="247" name="Google Shape;247;g33b2a244876_1_31"/>
+          <p:cNvPicPr preferRelativeResize="0"/>
+          <p:nvPr/>
+        </p:nvPicPr>
+        <p:blipFill>
+          <a:blip r:embed="rId4">
+            <a:alphaModFix/>
+          </a:blip>
+          <a:stretch>
+            <a:fillRect/>
+          </a:stretch>
+        </p:blipFill>
+        <p:spPr>
+          <a:xfrm>
+            <a:off x="152400" y="5209175"/>
+            <a:ext cx="14152827" cy="2868025"/>
+          </a:xfrm>
+          <a:prstGeom prst="rect">
+            <a:avLst/>
+          </a:prstGeom>
+          <a:noFill/>
+          <a:ln>
+            <a:noFill/>
+          </a:ln>
+        </p:spPr>
+      </p:pic>
+    </p:spTree>
+  </p:cSld>
+  <p:clrMapOvr>
+    <a:masterClrMapping/>
+  </p:clrMapOvr>
+</p:sld>
+</file>
+
+<file path=ppt/slides/slide21.xml><?xml version="1.0" encoding="utf-8"?>
+<p:sld xmlns:a="http://schemas.openxmlformats.org/drawingml/2006/main" xmlns:r="http://schemas.openxmlformats.org/officeDocument/2006/relationships" xmlns:mc="http://schemas.openxmlformats.org/markup-compatibility/2006" xmlns:mv="urn:schemas-microsoft-com:mac:vml" xmlns:p="http://schemas.openxmlformats.org/presentationml/2006/main" xmlns:c="http://schemas.openxmlformats.org/drawingml/2006/chart" xmlns:dgm="http://schemas.openxmlformats.org/drawingml/2006/diagram" xmlns:o="urn:schemas-microsoft-com:office:office" xmlns:v="urn:schemas-microsoft-com:vml" xmlns:pvml="urn:schemas-microsoft-com:office:powerpoint" xmlns:com="http://schemas.openxmlformats.org/drawingml/2006/compatibility" xmlns:p14="http://schemas.microsoft.com/office/powerpoint/2010/main" xmlns:p15="http://schemas.microsoft.com/office/powerpoint/2012/main" xmlns:ahyp="http://schemas.microsoft.com/office/drawing/2018/hyperlinkcolor">
+  <p:cSld>
+    <p:spTree>
+      <p:nvGrpSpPr>
+        <p:cNvPr id="252" name="Shape 252"/>
+        <p:cNvGrpSpPr/>
+        <p:nvPr/>
+      </p:nvGrpSpPr>
+      <p:grpSpPr>
+        <a:xfrm>
+          <a:off x="0" y="0"/>
+          <a:ext cx="0" cy="0"/>
+          <a:chOff x="0" y="0"/>
+          <a:chExt cx="0" cy="0"/>
+        </a:xfrm>
+      </p:grpSpPr>
+      <p:pic>
+        <p:nvPicPr>
+          <p:cNvPr id="253" name="Google Shape;253;g33b2a244876_1_37"/>
+          <p:cNvPicPr preferRelativeResize="0"/>
+          <p:nvPr/>
+        </p:nvPicPr>
+        <p:blipFill>
+          <a:blip r:embed="rId3">
+            <a:alphaModFix/>
+          </a:blip>
+          <a:stretch>
+            <a:fillRect/>
+          </a:stretch>
+        </p:blipFill>
+        <p:spPr>
+          <a:xfrm>
+            <a:off x="152400" y="152400"/>
+            <a:ext cx="7106350" cy="4221650"/>
+          </a:xfrm>
+          <a:prstGeom prst="rect">
+            <a:avLst/>
+          </a:prstGeom>
+          <a:noFill/>
+          <a:ln>
+            <a:noFill/>
+          </a:ln>
+        </p:spPr>
+      </p:pic>
+      <p:pic>
+        <p:nvPicPr>
+          <p:cNvPr id="254" name="Google Shape;254;g33b2a244876_1_37"/>
+          <p:cNvPicPr preferRelativeResize="0"/>
+          <p:nvPr/>
+        </p:nvPicPr>
+        <p:blipFill rotWithShape="1">
+          <a:blip r:embed="rId4">
+            <a:alphaModFix/>
+          </a:blip>
+          <a:srcRect b="0" l="-5574" r="0" t="0"/>
+          <a:stretch/>
+        </p:blipFill>
+        <p:spPr>
+          <a:xfrm>
+            <a:off x="6736799" y="890100"/>
+            <a:ext cx="7760749" cy="2994001"/>
+          </a:xfrm>
+          <a:prstGeom prst="rect">
+            <a:avLst/>
+          </a:prstGeom>
+          <a:noFill/>
+          <a:ln>
+            <a:noFill/>
+          </a:ln>
+        </p:spPr>
+      </p:pic>
+      <p:pic>
+        <p:nvPicPr>
+          <p:cNvPr id="255" name="Google Shape;255;g33b2a244876_1_37"/>
+          <p:cNvPicPr preferRelativeResize="0"/>
+          <p:nvPr/>
+        </p:nvPicPr>
+        <p:blipFill>
+          <a:blip r:embed="rId5">
+            <a:alphaModFix/>
+          </a:blip>
+          <a:stretch>
+            <a:fillRect/>
+          </a:stretch>
+        </p:blipFill>
+        <p:spPr>
+          <a:xfrm>
+            <a:off x="152400" y="4304450"/>
+            <a:ext cx="14031051" cy="3772750"/>
+          </a:xfrm>
+          <a:prstGeom prst="rect">
+            <a:avLst/>
+          </a:prstGeom>
+          <a:noFill/>
+          <a:ln>
+            <a:noFill/>
+          </a:ln>
+        </p:spPr>
+      </p:pic>
+    </p:spTree>
+  </p:cSld>
+  <p:clrMapOvr>
+    <a:masterClrMapping/>
+  </p:clrMapOvr>
+</p:sld>
+</file>
+
+<file path=ppt/slides/slide22.xml><?xml version="1.0" encoding="utf-8"?>
+<p:sld xmlns:a="http://schemas.openxmlformats.org/drawingml/2006/main" xmlns:r="http://schemas.openxmlformats.org/officeDocument/2006/relationships" xmlns:mc="http://schemas.openxmlformats.org/markup-compatibility/2006" xmlns:mv="urn:schemas-microsoft-com:mac:vml" xmlns:p="http://schemas.openxmlformats.org/presentationml/2006/main" xmlns:c="http://schemas.openxmlformats.org/drawingml/2006/chart" xmlns:dgm="http://schemas.openxmlformats.org/drawingml/2006/diagram" xmlns:o="urn:schemas-microsoft-com:office:office" xmlns:v="urn:schemas-microsoft-com:vml" xmlns:pvml="urn:schemas-microsoft-com:office:powerpoint" xmlns:com="http://schemas.openxmlformats.org/drawingml/2006/compatibility" xmlns:p14="http://schemas.microsoft.com/office/powerpoint/2010/main" xmlns:p15="http://schemas.microsoft.com/office/powerpoint/2012/main" xmlns:ahyp="http://schemas.microsoft.com/office/drawing/2018/hyperlinkcolor">
+  <p:cSld>
+    <p:spTree>
+      <p:nvGrpSpPr>
+        <p:cNvPr id="260" name="Shape 260"/>
+        <p:cNvGrpSpPr/>
+        <p:nvPr/>
+      </p:nvGrpSpPr>
+      <p:grpSpPr>
+        <a:xfrm>
+          <a:off x="0" y="0"/>
+          <a:ext cx="0" cy="0"/>
+          <a:chOff x="0" y="0"/>
+          <a:chExt cx="0" cy="0"/>
+        </a:xfrm>
+      </p:grpSpPr>
+      <p:pic>
+        <p:nvPicPr>
+          <p:cNvPr id="261" name="Google Shape;261;g33b2a244876_1_44"/>
+          <p:cNvPicPr preferRelativeResize="0"/>
+          <p:nvPr/>
+        </p:nvPicPr>
+        <p:blipFill>
+          <a:blip r:embed="rId3">
+            <a:alphaModFix/>
+          </a:blip>
+          <a:stretch>
+            <a:fillRect/>
+          </a:stretch>
+        </p:blipFill>
+        <p:spPr>
+          <a:xfrm>
+            <a:off x="152400" y="152400"/>
+            <a:ext cx="9507373" cy="2881950"/>
+          </a:xfrm>
+          <a:prstGeom prst="rect">
+            <a:avLst/>
+          </a:prstGeom>
+          <a:noFill/>
+          <a:ln>
+            <a:noFill/>
+          </a:ln>
+        </p:spPr>
+      </p:pic>
+      <p:pic>
+        <p:nvPicPr>
+          <p:cNvPr id="262" name="Google Shape;262;g33b2a244876_1_44"/>
+          <p:cNvPicPr preferRelativeResize="0"/>
+          <p:nvPr/>
+        </p:nvPicPr>
+        <p:blipFill>
+          <a:blip r:embed="rId4">
+            <a:alphaModFix/>
+          </a:blip>
+          <a:stretch>
+            <a:fillRect/>
+          </a:stretch>
+        </p:blipFill>
+        <p:spPr>
+          <a:xfrm>
+            <a:off x="152400" y="3034350"/>
+            <a:ext cx="9316001" cy="5042850"/>
+          </a:xfrm>
+          <a:prstGeom prst="rect">
+            <a:avLst/>
+          </a:prstGeom>
+          <a:noFill/>
+          <a:ln>
+            <a:noFill/>
+          </a:ln>
+        </p:spPr>
+      </p:pic>
+    </p:spTree>
+  </p:cSld>
+  <p:clrMapOvr>
+    <a:masterClrMapping/>
+  </p:clrMapOvr>
+</p:sld>
+</file>
+
+<file path=ppt/slides/slide23.xml><?xml version="1.0" encoding="utf-8"?>
+<p:sld xmlns:a="http://schemas.openxmlformats.org/drawingml/2006/main" xmlns:r="http://schemas.openxmlformats.org/officeDocument/2006/relationships" xmlns:mc="http://schemas.openxmlformats.org/markup-compatibility/2006" xmlns:mv="urn:schemas-microsoft-com:mac:vml" xmlns:p="http://schemas.openxmlformats.org/presentationml/2006/main" xmlns:c="http://schemas.openxmlformats.org/drawingml/2006/chart" xmlns:dgm="http://schemas.openxmlformats.org/drawingml/2006/diagram" xmlns:o="urn:schemas-microsoft-com:office:office" xmlns:v="urn:schemas-microsoft-com:vml" xmlns:pvml="urn:schemas-microsoft-com:office:powerpoint" xmlns:com="http://schemas.openxmlformats.org/drawingml/2006/compatibility" xmlns:p14="http://schemas.microsoft.com/office/powerpoint/2010/main" xmlns:p15="http://schemas.microsoft.com/office/powerpoint/2012/main" xmlns:ahyp="http://schemas.microsoft.com/office/drawing/2018/hyperlinkcolor">
+  <p:cSld>
+    <p:spTree>
+      <p:nvGrpSpPr>
+        <p:cNvPr id="267" name="Shape 267"/>
+        <p:cNvGrpSpPr/>
+        <p:nvPr/>
+      </p:nvGrpSpPr>
+      <p:grpSpPr>
+        <a:xfrm>
+          <a:off x="0" y="0"/>
+          <a:ext cx="0" cy="0"/>
+          <a:chOff x="0" y="0"/>
+          <a:chExt cx="0" cy="0"/>
+        </a:xfrm>
+      </p:grpSpPr>
+      <p:sp>
+        <p:nvSpPr>
+          <p:cNvPr id="268" name="Google Shape;268;p7"/>
+          <p:cNvSpPr/>
+          <p:nvPr/>
+        </p:nvSpPr>
+        <p:spPr>
+          <a:xfrm>
+            <a:off x="776798" y="1270950"/>
+            <a:ext cx="6712500" cy="701400"/>
+          </a:xfrm>
+          <a:prstGeom prst="rect">
+            <a:avLst/>
+          </a:prstGeom>
+          <a:noFill/>
+          <a:ln>
+            <a:noFill/>
+          </a:ln>
+        </p:spPr>
+        <p:txBody>
+          <a:bodyPr anchorCtr="0" anchor="t" bIns="0" lIns="0" spcFirstLastPara="1" rIns="0" wrap="square" tIns="0">
+            <a:noAutofit/>
+          </a:bodyPr>
+          <a:lstStyle/>
+          <a:p>
+            <a:pPr indent="0" lvl="0" marL="0" marR="0" rtl="0" algn="l">
+              <a:lnSpc>
+                <a:spcPct val="125000"/>
+              </a:lnSpc>
+              <a:spcBef>
+                <a:spcPts val="0"/>
+              </a:spcBef>
+              <a:spcAft>
+                <a:spcPts val="0"/>
+              </a:spcAft>
+              <a:buClr>
+                <a:srgbClr val="FFFFFF"/>
+              </a:buClr>
+              <a:buSzPts val="4400"/>
+              <a:buFont typeface="Montserrat"/>
+              <a:buNone/>
+            </a:pPr>
+            <a:r>
+              <a:rPr b="1" i="0" lang="en-US" sz="4400" u="none" cap="none" strike="noStrike">
+                <a:solidFill>
+                  <a:srgbClr val="FFFFFF"/>
+                </a:solidFill>
+                <a:latin typeface="Montserrat"/>
+                <a:ea typeface="Montserrat"/>
+                <a:cs typeface="Montserrat"/>
+                <a:sym typeface="Montserrat"/>
+              </a:rPr>
+              <a:t>Conclusions &amp; Findings</a:t>
+            </a:r>
+            <a:endParaRPr b="0" i="0" sz="4400" u="none" cap="none" strike="noStrike"/>
+          </a:p>
+        </p:txBody>
+      </p:sp>
+      <p:sp>
+        <p:nvSpPr>
+          <p:cNvPr id="269" name="Google Shape;269;p7"/>
+          <p:cNvSpPr/>
+          <p:nvPr/>
+        </p:nvSpPr>
+        <p:spPr>
+          <a:xfrm>
+            <a:off x="863798" y="3994547"/>
+            <a:ext cx="555308" cy="555308"/>
+          </a:xfrm>
+          <a:prstGeom prst="roundRect">
+            <a:avLst>
+              <a:gd fmla="val 6667" name="adj"/>
+            </a:avLst>
+          </a:prstGeom>
+          <a:solidFill>
+            <a:srgbClr val="303132"/>
+          </a:solidFill>
+          <a:ln>
+            <a:noFill/>
+          </a:ln>
+        </p:spPr>
+        <p:txBody>
+          <a:bodyPr anchorCtr="0" anchor="ctr" bIns="91425" lIns="91425" spcFirstLastPara="1" rIns="91425" wrap="square" tIns="91425">
+            <a:noAutofit/>
+          </a:bodyPr>
+          <a:lstStyle/>
+          <a:p>
+            <a:pPr indent="0" lvl="0" marL="0" rtl="0" algn="l">
+              <a:spcBef>
+                <a:spcPts val="0"/>
+              </a:spcBef>
+              <a:spcAft>
+                <a:spcPts val="0"/>
+              </a:spcAft>
+              <a:buNone/>
+            </a:pPr>
+            <a:r>
+              <a:t/>
+            </a:r>
+            <a:endParaRPr/>
+          </a:p>
+        </p:txBody>
+      </p:sp>
+      <p:sp>
+        <p:nvSpPr>
+          <p:cNvPr id="270" name="Google Shape;270;p7"/>
+          <p:cNvSpPr/>
+          <p:nvPr/>
+        </p:nvSpPr>
+        <p:spPr>
+          <a:xfrm>
+            <a:off x="1665923" y="3994547"/>
+            <a:ext cx="3334226" cy="701278"/>
+          </a:xfrm>
+          <a:prstGeom prst="rect">
+            <a:avLst/>
+          </a:prstGeom>
+          <a:noFill/>
+          <a:ln>
+            <a:noFill/>
+          </a:ln>
+        </p:spPr>
+        <p:txBody>
+          <a:bodyPr anchorCtr="0" anchor="t" bIns="0" lIns="0" spcFirstLastPara="1" rIns="0" wrap="square" tIns="0">
+            <a:noAutofit/>
+          </a:bodyPr>
+          <a:lstStyle/>
+          <a:p>
+            <a:pPr indent="0" lvl="0" marL="0" marR="0" rtl="0" algn="l">
+              <a:lnSpc>
+                <a:spcPct val="125000"/>
+              </a:lnSpc>
+              <a:spcBef>
+                <a:spcPts val="0"/>
+              </a:spcBef>
+              <a:spcAft>
+                <a:spcPts val="0"/>
+              </a:spcAft>
+              <a:buClr>
+                <a:srgbClr val="E2E6E9"/>
+              </a:buClr>
+              <a:buSzPts val="2200"/>
+              <a:buFont typeface="Montserrat"/>
+              <a:buNone/>
+            </a:pPr>
+            <a:r>
+              <a:rPr b="1" i="0" lang="en-US" sz="2200" u="none" cap="none" strike="noStrike">
+                <a:solidFill>
+                  <a:srgbClr val="E2E6E9"/>
+                </a:solidFill>
+                <a:latin typeface="Montserrat"/>
+                <a:ea typeface="Montserrat"/>
+                <a:cs typeface="Montserrat"/>
+                <a:sym typeface="Montserrat"/>
+              </a:rPr>
+              <a:t>Technical Achievements</a:t>
+            </a:r>
+            <a:endParaRPr b="0" i="0" sz="2200" u="none" cap="none" strike="noStrike"/>
+          </a:p>
+        </p:txBody>
+      </p:sp>
+      <p:sp>
+        <p:nvSpPr>
+          <p:cNvPr id="271" name="Google Shape;271;p7"/>
+          <p:cNvSpPr/>
+          <p:nvPr/>
+        </p:nvSpPr>
+        <p:spPr>
+          <a:xfrm>
+            <a:off x="1665923" y="4843820"/>
+            <a:ext cx="3334226" cy="740331"/>
+          </a:xfrm>
+          <a:prstGeom prst="rect">
+            <a:avLst/>
+          </a:prstGeom>
+          <a:noFill/>
+          <a:ln>
+            <a:noFill/>
+          </a:ln>
+        </p:spPr>
+        <p:txBody>
+          <a:bodyPr anchorCtr="0" anchor="t" bIns="0" lIns="0" spcFirstLastPara="1" rIns="0" wrap="square" tIns="0">
+            <a:noAutofit/>
+          </a:bodyPr>
+          <a:lstStyle/>
+          <a:p>
+            <a:pPr indent="0" lvl="0" marL="0" marR="0" rtl="0" algn="l">
+              <a:lnSpc>
+                <a:spcPct val="152631"/>
+              </a:lnSpc>
+              <a:spcBef>
+                <a:spcPts val="0"/>
+              </a:spcBef>
+              <a:spcAft>
+                <a:spcPts val="0"/>
+              </a:spcAft>
+              <a:buClr>
+                <a:srgbClr val="E2E6E9"/>
+              </a:buClr>
+              <a:buSzPts val="1900"/>
+              <a:buFont typeface="Arial"/>
+              <a:buNone/>
+            </a:pPr>
+            <a:r>
+              <a:rPr b="0" i="0" lang="en-US" sz="1900" u="none" cap="none" strike="noStrike">
+                <a:solidFill>
+                  <a:srgbClr val="E2E6E9"/>
+                </a:solidFill>
+                <a:latin typeface="Arial"/>
+                <a:ea typeface="Arial"/>
+                <a:cs typeface="Arial"/>
+                <a:sym typeface="Arial"/>
+              </a:rPr>
+              <a:t>Integrated data sources and created optimized star schema.</a:t>
+            </a:r>
+            <a:endParaRPr b="0" i="0" sz="1900" u="none" cap="none" strike="noStrike"/>
+          </a:p>
+        </p:txBody>
+      </p:sp>
+      <p:sp>
+        <p:nvSpPr>
+          <p:cNvPr id="272" name="Google Shape;272;p7"/>
+          <p:cNvSpPr/>
+          <p:nvPr/>
+        </p:nvSpPr>
+        <p:spPr>
+          <a:xfrm>
+            <a:off x="5246965" y="3994547"/>
+            <a:ext cx="555308" cy="555308"/>
+          </a:xfrm>
+          <a:prstGeom prst="roundRect">
+            <a:avLst>
+              <a:gd fmla="val 6667" name="adj"/>
+            </a:avLst>
+          </a:prstGeom>
+          <a:solidFill>
+            <a:srgbClr val="303132"/>
+          </a:solidFill>
+          <a:ln>
+            <a:noFill/>
+          </a:ln>
+        </p:spPr>
+        <p:txBody>
+          <a:bodyPr anchorCtr="0" anchor="ctr" bIns="91425" lIns="91425" spcFirstLastPara="1" rIns="91425" wrap="square" tIns="91425">
+            <a:noAutofit/>
+          </a:bodyPr>
+          <a:lstStyle/>
+          <a:p>
+            <a:pPr indent="0" lvl="0" marL="0" rtl="0" algn="l">
+              <a:spcBef>
+                <a:spcPts val="0"/>
+              </a:spcBef>
+              <a:spcAft>
+                <a:spcPts val="0"/>
+              </a:spcAft>
+              <a:buNone/>
+            </a:pPr>
+            <a:r>
+              <a:t/>
+            </a:r>
+            <a:endParaRPr/>
+          </a:p>
+        </p:txBody>
+      </p:sp>
+      <p:sp>
+        <p:nvSpPr>
+          <p:cNvPr id="273" name="Google Shape;273;p7"/>
+          <p:cNvSpPr/>
+          <p:nvPr/>
+        </p:nvSpPr>
+        <p:spPr>
+          <a:xfrm>
+            <a:off x="6049089" y="3994547"/>
+            <a:ext cx="2804874" cy="350639"/>
+          </a:xfrm>
+          <a:prstGeom prst="rect">
+            <a:avLst/>
+          </a:prstGeom>
+          <a:noFill/>
+          <a:ln>
+            <a:noFill/>
+          </a:ln>
+        </p:spPr>
+        <p:txBody>
+          <a:bodyPr anchorCtr="0" anchor="t" bIns="0" lIns="0" spcFirstLastPara="1" rIns="0" wrap="square" tIns="0">
+            <a:noAutofit/>
+          </a:bodyPr>
+          <a:lstStyle/>
+          <a:p>
+            <a:pPr indent="0" lvl="0" marL="0" marR="0" rtl="0" algn="l">
+              <a:lnSpc>
+                <a:spcPct val="125000"/>
+              </a:lnSpc>
+              <a:spcBef>
+                <a:spcPts val="0"/>
+              </a:spcBef>
+              <a:spcAft>
+                <a:spcPts val="0"/>
+              </a:spcAft>
+              <a:buClr>
+                <a:srgbClr val="E2E6E9"/>
+              </a:buClr>
+              <a:buSzPts val="2200"/>
+              <a:buFont typeface="Montserrat"/>
+              <a:buNone/>
+            </a:pPr>
+            <a:r>
+              <a:rPr b="1" i="0" lang="en-US" sz="2200" u="none" cap="none" strike="noStrike">
+                <a:solidFill>
+                  <a:srgbClr val="E2E6E9"/>
+                </a:solidFill>
+                <a:latin typeface="Montserrat"/>
+                <a:ea typeface="Montserrat"/>
+                <a:cs typeface="Montserrat"/>
+                <a:sym typeface="Montserrat"/>
+              </a:rPr>
+              <a:t>Business Value</a:t>
+            </a:r>
+            <a:endParaRPr b="0" i="0" sz="2200" u="none" cap="none" strike="noStrike"/>
+          </a:p>
+        </p:txBody>
+      </p:sp>
+      <p:sp>
+        <p:nvSpPr>
+          <p:cNvPr id="274" name="Google Shape;274;p7"/>
+          <p:cNvSpPr/>
+          <p:nvPr/>
+        </p:nvSpPr>
+        <p:spPr>
+          <a:xfrm>
+            <a:off x="6049089" y="4493181"/>
+            <a:ext cx="3334226" cy="740331"/>
+          </a:xfrm>
+          <a:prstGeom prst="rect">
+            <a:avLst/>
+          </a:prstGeom>
+          <a:noFill/>
+          <a:ln>
+            <a:noFill/>
+          </a:ln>
+        </p:spPr>
+        <p:txBody>
+          <a:bodyPr anchorCtr="0" anchor="t" bIns="0" lIns="0" spcFirstLastPara="1" rIns="0" wrap="square" tIns="0">
+            <a:noAutofit/>
+          </a:bodyPr>
+          <a:lstStyle/>
+          <a:p>
+            <a:pPr indent="0" lvl="0" marL="0" marR="0" rtl="0" algn="l">
+              <a:lnSpc>
+                <a:spcPct val="152631"/>
+              </a:lnSpc>
+              <a:spcBef>
+                <a:spcPts val="0"/>
+              </a:spcBef>
+              <a:spcAft>
+                <a:spcPts val="0"/>
+              </a:spcAft>
+              <a:buClr>
+                <a:srgbClr val="E2E6E9"/>
+              </a:buClr>
+              <a:buSzPts val="1900"/>
+              <a:buFont typeface="Arial"/>
+              <a:buNone/>
+            </a:pPr>
+            <a:r>
+              <a:rPr b="0" i="0" lang="en-US" sz="1900" u="none" cap="none" strike="noStrike">
+                <a:solidFill>
+                  <a:srgbClr val="E2E6E9"/>
+                </a:solidFill>
+                <a:latin typeface="Arial"/>
+                <a:ea typeface="Arial"/>
+                <a:cs typeface="Arial"/>
+                <a:sym typeface="Arial"/>
+              </a:rPr>
+              <a:t>Enabled e-commerce analytics and data-driven decisions.</a:t>
+            </a:r>
+            <a:endParaRPr b="0" i="0" sz="1900" u="none" cap="none" strike="noStrike"/>
+          </a:p>
+        </p:txBody>
+      </p:sp>
+      <p:sp>
+        <p:nvSpPr>
+          <p:cNvPr id="275" name="Google Shape;275;p7"/>
+          <p:cNvSpPr/>
+          <p:nvPr/>
+        </p:nvSpPr>
+        <p:spPr>
+          <a:xfrm>
+            <a:off x="9630132" y="3994547"/>
+            <a:ext cx="555308" cy="555308"/>
+          </a:xfrm>
+          <a:prstGeom prst="roundRect">
+            <a:avLst>
+              <a:gd fmla="val 6667" name="adj"/>
+            </a:avLst>
+          </a:prstGeom>
+          <a:solidFill>
+            <a:srgbClr val="303132"/>
+          </a:solidFill>
+          <a:ln>
+            <a:noFill/>
+          </a:ln>
+        </p:spPr>
+        <p:txBody>
+          <a:bodyPr anchorCtr="0" anchor="ctr" bIns="91425" lIns="91425" spcFirstLastPara="1" rIns="91425" wrap="square" tIns="91425">
+            <a:noAutofit/>
+          </a:bodyPr>
+          <a:lstStyle/>
+          <a:p>
+            <a:pPr indent="0" lvl="0" marL="0" rtl="0" algn="l">
+              <a:spcBef>
+                <a:spcPts val="0"/>
+              </a:spcBef>
+              <a:spcAft>
+                <a:spcPts val="0"/>
+              </a:spcAft>
+              <a:buNone/>
+            </a:pPr>
+            <a:r>
+              <a:t/>
+            </a:r>
+            <a:endParaRPr/>
+          </a:p>
+        </p:txBody>
+      </p:sp>
+      <p:sp>
+        <p:nvSpPr>
+          <p:cNvPr id="276" name="Google Shape;276;p7"/>
+          <p:cNvSpPr/>
+          <p:nvPr/>
+        </p:nvSpPr>
+        <p:spPr>
+          <a:xfrm>
+            <a:off x="10432256" y="3994547"/>
+            <a:ext cx="3098125" cy="350639"/>
+          </a:xfrm>
+          <a:prstGeom prst="rect">
+            <a:avLst/>
+          </a:prstGeom>
+          <a:noFill/>
+          <a:ln>
+            <a:noFill/>
+          </a:ln>
+        </p:spPr>
+        <p:txBody>
+          <a:bodyPr anchorCtr="0" anchor="t" bIns="0" lIns="0" spcFirstLastPara="1" rIns="0" wrap="square" tIns="0">
+            <a:noAutofit/>
+          </a:bodyPr>
+          <a:lstStyle/>
+          <a:p>
+            <a:pPr indent="0" lvl="0" marL="0" marR="0" rtl="0" algn="l">
+              <a:lnSpc>
+                <a:spcPct val="125000"/>
+              </a:lnSpc>
+              <a:spcBef>
+                <a:spcPts val="0"/>
+              </a:spcBef>
+              <a:spcAft>
+                <a:spcPts val="0"/>
+              </a:spcAft>
+              <a:buClr>
+                <a:srgbClr val="E2E6E9"/>
+              </a:buClr>
+              <a:buSzPts val="2200"/>
+              <a:buFont typeface="Montserrat"/>
+              <a:buNone/>
+            </a:pPr>
+            <a:r>
+              <a:rPr b="1" i="0" lang="en-US" sz="2200" u="none" cap="none" strike="noStrike">
+                <a:solidFill>
+                  <a:srgbClr val="E2E6E9"/>
+                </a:solidFill>
+                <a:latin typeface="Montserrat"/>
+                <a:ea typeface="Montserrat"/>
+                <a:cs typeface="Montserrat"/>
+                <a:sym typeface="Montserrat"/>
+              </a:rPr>
+              <a:t>Scalable Architecture</a:t>
+            </a:r>
+            <a:endParaRPr b="0" i="0" sz="2200" u="none" cap="none" strike="noStrike"/>
+          </a:p>
+        </p:txBody>
+      </p:sp>
+      <p:sp>
+        <p:nvSpPr>
+          <p:cNvPr id="277" name="Google Shape;277;p7"/>
+          <p:cNvSpPr/>
+          <p:nvPr/>
+        </p:nvSpPr>
+        <p:spPr>
+          <a:xfrm>
+            <a:off x="10185456" y="4843794"/>
+            <a:ext cx="3334200" cy="740400"/>
+          </a:xfrm>
+          <a:prstGeom prst="rect">
+            <a:avLst/>
+          </a:prstGeom>
+          <a:noFill/>
+          <a:ln>
+            <a:noFill/>
+          </a:ln>
+        </p:spPr>
+        <p:txBody>
+          <a:bodyPr anchorCtr="0" anchor="t" bIns="0" lIns="0" spcFirstLastPara="1" rIns="0" wrap="square" tIns="0">
+            <a:noAutofit/>
+          </a:bodyPr>
+          <a:lstStyle/>
+          <a:p>
+            <a:pPr indent="0" lvl="0" marL="0" marR="0" rtl="0" algn="l">
+              <a:lnSpc>
+                <a:spcPct val="152631"/>
+              </a:lnSpc>
+              <a:spcBef>
+                <a:spcPts val="0"/>
+              </a:spcBef>
+              <a:spcAft>
+                <a:spcPts val="0"/>
+              </a:spcAft>
+              <a:buClr>
+                <a:srgbClr val="E2E6E9"/>
+              </a:buClr>
+              <a:buSzPts val="1900"/>
+              <a:buFont typeface="Arial"/>
+              <a:buNone/>
+            </a:pPr>
+            <a:r>
+              <a:rPr b="0" i="0" lang="en-US" sz="1900" u="none" cap="none" strike="noStrike">
+                <a:solidFill>
+                  <a:srgbClr val="E2E6E9"/>
+                </a:solidFill>
+                <a:latin typeface="Arial"/>
+                <a:ea typeface="Arial"/>
+                <a:cs typeface="Arial"/>
+                <a:sym typeface="Arial"/>
+              </a:rPr>
+              <a:t>Reduced time from data collection to insights.</a:t>
+            </a:r>
+            <a:endParaRPr b="0" i="0" sz="1900" u="none" cap="none" strike="noStrike"/>
+          </a:p>
+        </p:txBody>
+      </p:sp>
+    </p:spTree>
+  </p:cSld>
+  <p:clrMapOvr>
+    <a:masterClrMapping/>
+  </p:clrMapOvr>
+</p:sld>
+</file>
+
+<file path=ppt/slides/slide24.xml><?xml version="1.0" encoding="utf-8"?>
+<p:sld xmlns:a="http://schemas.openxmlformats.org/drawingml/2006/main" xmlns:r="http://schemas.openxmlformats.org/officeDocument/2006/relationships" xmlns:mc="http://schemas.openxmlformats.org/markup-compatibility/2006" xmlns:mv="urn:schemas-microsoft-com:mac:vml" xmlns:p="http://schemas.openxmlformats.org/presentationml/2006/main" xmlns:c="http://schemas.openxmlformats.org/drawingml/2006/chart" xmlns:dgm="http://schemas.openxmlformats.org/drawingml/2006/diagram" xmlns:o="urn:schemas-microsoft-com:office:office" xmlns:v="urn:schemas-microsoft-com:vml" xmlns:pvml="urn:schemas-microsoft-com:office:powerpoint" xmlns:com="http://schemas.openxmlformats.org/drawingml/2006/compatibility" xmlns:p14="http://schemas.microsoft.com/office/powerpoint/2010/main" xmlns:p15="http://schemas.microsoft.com/office/powerpoint/2012/main" xmlns:ahyp="http://schemas.microsoft.com/office/drawing/2018/hyperlinkcolor">
+  <p:cSld>
+    <p:spTree>
+      <p:nvGrpSpPr>
+        <p:cNvPr id="282" name="Shape 282"/>
+        <p:cNvGrpSpPr/>
+        <p:nvPr/>
+      </p:nvGrpSpPr>
+      <p:grpSpPr>
+        <a:xfrm>
+          <a:off x="0" y="0"/>
+          <a:ext cx="0" cy="0"/>
+          <a:chOff x="0" y="0"/>
+          <a:chExt cx="0" cy="0"/>
+        </a:xfrm>
+      </p:grpSpPr>
+      <p:pic>
+        <p:nvPicPr>
+          <p:cNvPr descr="preencoded.png" id="283" name="Google Shape;283;p8"/>
+          <p:cNvPicPr preferRelativeResize="0"/>
+          <p:nvPr/>
+        </p:nvPicPr>
+        <p:blipFill rotWithShape="1">
+          <a:blip r:embed="rId3">
+            <a:alphaModFix/>
+          </a:blip>
+          <a:srcRect b="0" l="0" r="0" t="0"/>
+          <a:stretch/>
+        </p:blipFill>
+        <p:spPr>
+          <a:xfrm>
+            <a:off x="9144000" y="0"/>
+            <a:ext cx="5486400" cy="8229600"/>
+          </a:xfrm>
+          <a:prstGeom prst="rect">
+            <a:avLst/>
+          </a:prstGeom>
+          <a:noFill/>
+          <a:ln>
+            <a:noFill/>
+          </a:ln>
+        </p:spPr>
+      </p:pic>
+      <p:sp>
+        <p:nvSpPr>
+          <p:cNvPr id="284" name="Google Shape;284;p8"/>
+          <p:cNvSpPr/>
+          <p:nvPr/>
+        </p:nvSpPr>
+        <p:spPr>
+          <a:xfrm>
+            <a:off x="863798" y="1905595"/>
+            <a:ext cx="5609749" cy="701278"/>
+          </a:xfrm>
+          <a:prstGeom prst="rect">
+            <a:avLst/>
+          </a:prstGeom>
+          <a:noFill/>
+          <a:ln>
+            <a:noFill/>
+          </a:ln>
+        </p:spPr>
+        <p:txBody>
+          <a:bodyPr anchorCtr="0" anchor="t" bIns="0" lIns="0" spcFirstLastPara="1" rIns="0" wrap="square" tIns="0">
+            <a:noAutofit/>
+          </a:bodyPr>
+          <a:lstStyle/>
+          <a:p>
+            <a:pPr indent="0" lvl="0" marL="0" marR="0" rtl="0" algn="l">
+              <a:lnSpc>
+                <a:spcPct val="125000"/>
+              </a:lnSpc>
+              <a:spcBef>
+                <a:spcPts val="0"/>
+              </a:spcBef>
+              <a:spcAft>
+                <a:spcPts val="0"/>
+              </a:spcAft>
+              <a:buClr>
+                <a:srgbClr val="FFFFFF"/>
+              </a:buClr>
+              <a:buSzPts val="4400"/>
+              <a:buFont typeface="Montserrat"/>
+              <a:buNone/>
+            </a:pPr>
+            <a:r>
+              <a:rPr b="1" i="0" lang="en-US" sz="4400" u="none" cap="none" strike="noStrike">
+                <a:solidFill>
+                  <a:srgbClr val="FFFFFF"/>
+                </a:solidFill>
+                <a:latin typeface="Montserrat"/>
+                <a:ea typeface="Montserrat"/>
+                <a:cs typeface="Montserrat"/>
+                <a:sym typeface="Montserrat"/>
+              </a:rPr>
+              <a:t>Next Steps</a:t>
+            </a:r>
+            <a:endParaRPr b="0" i="0" sz="4400" u="none" cap="none" strike="noStrike"/>
+          </a:p>
+        </p:txBody>
+      </p:sp>
+      <p:sp>
+        <p:nvSpPr>
+          <p:cNvPr id="285" name="Google Shape;285;p8"/>
+          <p:cNvSpPr/>
+          <p:nvPr/>
+        </p:nvSpPr>
+        <p:spPr>
+          <a:xfrm>
+            <a:off x="863798" y="2977039"/>
+            <a:ext cx="185023" cy="868799"/>
+          </a:xfrm>
+          <a:prstGeom prst="roundRect">
+            <a:avLst>
+              <a:gd fmla="val 20011" name="adj"/>
+            </a:avLst>
+          </a:prstGeom>
+          <a:solidFill>
+            <a:srgbClr val="303132"/>
+          </a:solidFill>
+          <a:ln>
+            <a:noFill/>
+          </a:ln>
+        </p:spPr>
+        <p:txBody>
+          <a:bodyPr anchorCtr="0" anchor="ctr" bIns="91425" lIns="91425" spcFirstLastPara="1" rIns="91425" wrap="square" tIns="91425">
+            <a:noAutofit/>
+          </a:bodyPr>
+          <a:lstStyle/>
+          <a:p>
+            <a:pPr indent="0" lvl="0" marL="0" rtl="0" algn="l">
+              <a:spcBef>
+                <a:spcPts val="0"/>
+              </a:spcBef>
+              <a:spcAft>
+                <a:spcPts val="0"/>
+              </a:spcAft>
+              <a:buNone/>
+            </a:pPr>
+            <a:r>
+              <a:t/>
+            </a:r>
+            <a:endParaRPr/>
+          </a:p>
+        </p:txBody>
+      </p:sp>
+      <p:sp>
+        <p:nvSpPr>
+          <p:cNvPr id="286" name="Google Shape;286;p8"/>
+          <p:cNvSpPr/>
+          <p:nvPr/>
+        </p:nvSpPr>
+        <p:spPr>
+          <a:xfrm>
+            <a:off x="1418987" y="2977039"/>
+            <a:ext cx="2804874" cy="350639"/>
+          </a:xfrm>
+          <a:prstGeom prst="rect">
+            <a:avLst/>
+          </a:prstGeom>
+          <a:noFill/>
+          <a:ln>
+            <a:noFill/>
+          </a:ln>
+        </p:spPr>
+        <p:txBody>
+          <a:bodyPr anchorCtr="0" anchor="t" bIns="0" lIns="0" spcFirstLastPara="1" rIns="0" wrap="square" tIns="0">
+            <a:noAutofit/>
+          </a:bodyPr>
+          <a:lstStyle/>
+          <a:p>
+            <a:pPr indent="0" lvl="0" marL="0" marR="0" rtl="0" algn="l">
+              <a:lnSpc>
+                <a:spcPct val="125000"/>
+              </a:lnSpc>
+              <a:spcBef>
+                <a:spcPts val="0"/>
+              </a:spcBef>
+              <a:spcAft>
+                <a:spcPts val="0"/>
+              </a:spcAft>
+              <a:buClr>
+                <a:srgbClr val="E2E6E9"/>
+              </a:buClr>
+              <a:buSzPts val="2200"/>
+              <a:buFont typeface="Montserrat"/>
+              <a:buNone/>
+            </a:pPr>
+            <a:r>
+              <a:rPr b="1" i="0" lang="en-US" sz="2200" u="none" cap="none" strike="noStrike">
+                <a:solidFill>
+                  <a:srgbClr val="E2E6E9"/>
+                </a:solidFill>
+                <a:latin typeface="Montserrat"/>
+                <a:ea typeface="Montserrat"/>
+                <a:cs typeface="Montserrat"/>
+                <a:sym typeface="Montserrat"/>
+              </a:rPr>
+              <a:t>Enhancements</a:t>
+            </a:r>
+            <a:endParaRPr b="0" i="0" sz="2200" u="none" cap="none" strike="noStrike"/>
+          </a:p>
+        </p:txBody>
+      </p:sp>
+      <p:sp>
+        <p:nvSpPr>
+          <p:cNvPr id="287" name="Google Shape;287;p8"/>
+          <p:cNvSpPr/>
+          <p:nvPr/>
+        </p:nvSpPr>
+        <p:spPr>
+          <a:xfrm>
+            <a:off x="1418987" y="3475673"/>
+            <a:ext cx="6861215" cy="370165"/>
+          </a:xfrm>
+          <a:prstGeom prst="rect">
+            <a:avLst/>
+          </a:prstGeom>
+          <a:noFill/>
+          <a:ln>
+            <a:noFill/>
+          </a:ln>
+        </p:spPr>
+        <p:txBody>
+          <a:bodyPr anchorCtr="0" anchor="t" bIns="0" lIns="0" spcFirstLastPara="1" rIns="0" wrap="square" tIns="0">
+            <a:noAutofit/>
+          </a:bodyPr>
+          <a:lstStyle/>
+          <a:p>
+            <a:pPr indent="0" lvl="0" marL="0" marR="0" rtl="0" algn="l">
+              <a:lnSpc>
+                <a:spcPct val="152631"/>
+              </a:lnSpc>
+              <a:spcBef>
+                <a:spcPts val="0"/>
+              </a:spcBef>
+              <a:spcAft>
+                <a:spcPts val="0"/>
+              </a:spcAft>
+              <a:buClr>
+                <a:srgbClr val="E2E6E9"/>
+              </a:buClr>
+              <a:buSzPts val="1900"/>
+              <a:buFont typeface="Arial"/>
+              <a:buNone/>
+            </a:pPr>
+            <a:r>
+              <a:rPr b="0" i="0" lang="en-US" sz="1900" u="none" cap="none" strike="noStrike">
+                <a:solidFill>
+                  <a:srgbClr val="E2E6E9"/>
+                </a:solidFill>
+                <a:latin typeface="Arial"/>
+                <a:ea typeface="Arial"/>
+                <a:cs typeface="Arial"/>
+                <a:sym typeface="Arial"/>
+              </a:rPr>
+              <a:t>Real-time data streaming integration.</a:t>
+            </a:r>
+            <a:endParaRPr b="0" i="0" sz="1900" u="none" cap="none" strike="noStrike"/>
+          </a:p>
+        </p:txBody>
+      </p:sp>
+      <p:sp>
+        <p:nvSpPr>
+          <p:cNvPr id="288" name="Google Shape;288;p8"/>
+          <p:cNvSpPr/>
+          <p:nvPr/>
+        </p:nvSpPr>
+        <p:spPr>
+          <a:xfrm>
+            <a:off x="1233964" y="4092654"/>
+            <a:ext cx="185023" cy="868799"/>
+          </a:xfrm>
+          <a:prstGeom prst="roundRect">
+            <a:avLst>
+              <a:gd fmla="val 20011" name="adj"/>
+            </a:avLst>
+          </a:prstGeom>
+          <a:solidFill>
+            <a:srgbClr val="303132"/>
+          </a:solidFill>
+          <a:ln>
+            <a:noFill/>
+          </a:ln>
+        </p:spPr>
+        <p:txBody>
+          <a:bodyPr anchorCtr="0" anchor="ctr" bIns="91425" lIns="91425" spcFirstLastPara="1" rIns="91425" wrap="square" tIns="91425">
+            <a:noAutofit/>
+          </a:bodyPr>
+          <a:lstStyle/>
+          <a:p>
+            <a:pPr indent="0" lvl="0" marL="0" rtl="0" algn="l">
+              <a:spcBef>
+                <a:spcPts val="0"/>
+              </a:spcBef>
+              <a:spcAft>
+                <a:spcPts val="0"/>
+              </a:spcAft>
+              <a:buNone/>
+            </a:pPr>
+            <a:r>
+              <a:t/>
+            </a:r>
+            <a:endParaRPr/>
+          </a:p>
+        </p:txBody>
+      </p:sp>
+      <p:sp>
+        <p:nvSpPr>
+          <p:cNvPr id="289" name="Google Shape;289;p8"/>
+          <p:cNvSpPr/>
+          <p:nvPr/>
+        </p:nvSpPr>
+        <p:spPr>
+          <a:xfrm>
+            <a:off x="1789152" y="4092654"/>
+            <a:ext cx="2804874" cy="350639"/>
+          </a:xfrm>
+          <a:prstGeom prst="rect">
+            <a:avLst/>
+          </a:prstGeom>
+          <a:noFill/>
+          <a:ln>
+            <a:noFill/>
+          </a:ln>
+        </p:spPr>
+        <p:txBody>
+          <a:bodyPr anchorCtr="0" anchor="t" bIns="0" lIns="0" spcFirstLastPara="1" rIns="0" wrap="square" tIns="0">
+            <a:noAutofit/>
+          </a:bodyPr>
+          <a:lstStyle/>
+          <a:p>
+            <a:pPr indent="0" lvl="0" marL="0" marR="0" rtl="0" algn="l">
+              <a:lnSpc>
+                <a:spcPct val="125000"/>
+              </a:lnSpc>
+              <a:spcBef>
+                <a:spcPts val="0"/>
+              </a:spcBef>
+              <a:spcAft>
+                <a:spcPts val="0"/>
+              </a:spcAft>
+              <a:buClr>
+                <a:srgbClr val="E2E6E9"/>
+              </a:buClr>
+              <a:buSzPts val="2200"/>
+              <a:buFont typeface="Montserrat"/>
+              <a:buNone/>
+            </a:pPr>
+            <a:r>
+              <a:rPr b="1" i="0" lang="en-US" sz="2200" u="none" cap="none" strike="noStrike">
+                <a:solidFill>
+                  <a:srgbClr val="E2E6E9"/>
+                </a:solidFill>
+                <a:latin typeface="Montserrat"/>
+                <a:ea typeface="Montserrat"/>
+                <a:cs typeface="Montserrat"/>
+                <a:sym typeface="Montserrat"/>
+              </a:rPr>
+              <a:t>Data Quality</a:t>
+            </a:r>
+            <a:endParaRPr b="0" i="0" sz="2200" u="none" cap="none" strike="noStrike"/>
+          </a:p>
+        </p:txBody>
+      </p:sp>
+      <p:sp>
+        <p:nvSpPr>
+          <p:cNvPr id="290" name="Google Shape;290;p8"/>
+          <p:cNvSpPr/>
+          <p:nvPr/>
+        </p:nvSpPr>
+        <p:spPr>
+          <a:xfrm>
+            <a:off x="1789152" y="4591288"/>
+            <a:ext cx="6491049" cy="370165"/>
+          </a:xfrm>
+          <a:prstGeom prst="rect">
+            <a:avLst/>
+          </a:prstGeom>
+          <a:noFill/>
+          <a:ln>
+            <a:noFill/>
+          </a:ln>
+        </p:spPr>
+        <p:txBody>
+          <a:bodyPr anchorCtr="0" anchor="t" bIns="0" lIns="0" spcFirstLastPara="1" rIns="0" wrap="square" tIns="0">
+            <a:noAutofit/>
+          </a:bodyPr>
+          <a:lstStyle/>
+          <a:p>
+            <a:pPr indent="0" lvl="0" marL="0" marR="0" rtl="0" algn="l">
+              <a:lnSpc>
+                <a:spcPct val="152631"/>
+              </a:lnSpc>
+              <a:spcBef>
+                <a:spcPts val="0"/>
+              </a:spcBef>
+              <a:spcAft>
+                <a:spcPts val="0"/>
+              </a:spcAft>
+              <a:buClr>
+                <a:srgbClr val="E2E6E9"/>
+              </a:buClr>
+              <a:buSzPts val="1900"/>
+              <a:buFont typeface="Arial"/>
+              <a:buNone/>
+            </a:pPr>
+            <a:r>
+              <a:rPr b="0" i="0" lang="en-US" sz="1900" u="none" cap="none" strike="noStrike">
+                <a:solidFill>
+                  <a:srgbClr val="E2E6E9"/>
+                </a:solidFill>
+                <a:latin typeface="Arial"/>
+                <a:ea typeface="Arial"/>
+                <a:cs typeface="Arial"/>
+                <a:sym typeface="Arial"/>
+              </a:rPr>
+              <a:t>Advanced data quality monitoring.</a:t>
+            </a:r>
+            <a:endParaRPr b="0" i="0" sz="1900" u="none" cap="none" strike="noStrike"/>
+          </a:p>
+        </p:txBody>
+      </p:sp>
+      <p:sp>
+        <p:nvSpPr>
+          <p:cNvPr id="291" name="Google Shape;291;p8"/>
+          <p:cNvSpPr/>
+          <p:nvPr/>
+        </p:nvSpPr>
+        <p:spPr>
+          <a:xfrm>
+            <a:off x="1604248" y="5208270"/>
+            <a:ext cx="185023" cy="868799"/>
+          </a:xfrm>
+          <a:prstGeom prst="roundRect">
+            <a:avLst>
+              <a:gd fmla="val 20011" name="adj"/>
+            </a:avLst>
+          </a:prstGeom>
+          <a:solidFill>
+            <a:srgbClr val="303132"/>
+          </a:solidFill>
+          <a:ln>
+            <a:noFill/>
+          </a:ln>
+        </p:spPr>
+        <p:txBody>
+          <a:bodyPr anchorCtr="0" anchor="ctr" bIns="91425" lIns="91425" spcFirstLastPara="1" rIns="91425" wrap="square" tIns="91425">
+            <a:noAutofit/>
+          </a:bodyPr>
+          <a:lstStyle/>
+          <a:p>
+            <a:pPr indent="0" lvl="0" marL="0" rtl="0" algn="l">
+              <a:spcBef>
+                <a:spcPts val="0"/>
+              </a:spcBef>
+              <a:spcAft>
+                <a:spcPts val="0"/>
+              </a:spcAft>
+              <a:buNone/>
+            </a:pPr>
+            <a:r>
+              <a:t/>
+            </a:r>
+            <a:endParaRPr/>
+          </a:p>
+        </p:txBody>
+      </p:sp>
+      <p:sp>
+        <p:nvSpPr>
+          <p:cNvPr id="292" name="Google Shape;292;p8"/>
+          <p:cNvSpPr/>
+          <p:nvPr/>
+        </p:nvSpPr>
+        <p:spPr>
+          <a:xfrm>
+            <a:off x="2159437" y="5208270"/>
+            <a:ext cx="2845713" cy="350639"/>
+          </a:xfrm>
+          <a:prstGeom prst="rect">
+            <a:avLst/>
+          </a:prstGeom>
+          <a:noFill/>
+          <a:ln>
+            <a:noFill/>
+          </a:ln>
+        </p:spPr>
+        <p:txBody>
+          <a:bodyPr anchorCtr="0" anchor="t" bIns="0" lIns="0" spcFirstLastPara="1" rIns="0" wrap="square" tIns="0">
+            <a:noAutofit/>
+          </a:bodyPr>
+          <a:lstStyle/>
+          <a:p>
+            <a:pPr indent="0" lvl="0" marL="0" marR="0" rtl="0" algn="l">
+              <a:lnSpc>
+                <a:spcPct val="125000"/>
+              </a:lnSpc>
+              <a:spcBef>
+                <a:spcPts val="0"/>
+              </a:spcBef>
+              <a:spcAft>
+                <a:spcPts val="0"/>
+              </a:spcAft>
+              <a:buClr>
+                <a:srgbClr val="E2E6E9"/>
+              </a:buClr>
+              <a:buSzPts val="2200"/>
+              <a:buFont typeface="Montserrat"/>
+              <a:buNone/>
+            </a:pPr>
+            <a:r>
+              <a:rPr b="1" i="0" lang="en-US" sz="2200" u="none" cap="none" strike="noStrike">
+                <a:solidFill>
+                  <a:srgbClr val="E2E6E9"/>
+                </a:solidFill>
+                <a:latin typeface="Montserrat"/>
+                <a:ea typeface="Montserrat"/>
+                <a:cs typeface="Montserrat"/>
+                <a:sym typeface="Montserrat"/>
+              </a:rPr>
+              <a:t>Future Applications</a:t>
+            </a:r>
+            <a:endParaRPr b="0" i="0" sz="2200" u="none" cap="none" strike="noStrike"/>
+          </a:p>
+        </p:txBody>
+      </p:sp>
+      <p:sp>
+        <p:nvSpPr>
+          <p:cNvPr id="293" name="Google Shape;293;p8"/>
+          <p:cNvSpPr/>
+          <p:nvPr/>
+        </p:nvSpPr>
+        <p:spPr>
+          <a:xfrm>
+            <a:off x="2560487" y="6323879"/>
+            <a:ext cx="6120900" cy="370200"/>
+          </a:xfrm>
+          <a:prstGeom prst="rect">
+            <a:avLst/>
+          </a:prstGeom>
+          <a:noFill/>
+          <a:ln>
+            <a:noFill/>
+          </a:ln>
+        </p:spPr>
+        <p:txBody>
+          <a:bodyPr anchorCtr="0" anchor="t" bIns="0" lIns="0" spcFirstLastPara="1" rIns="0" wrap="square" tIns="0">
+            <a:noAutofit/>
+          </a:bodyPr>
+          <a:lstStyle/>
+          <a:p>
+            <a:pPr indent="0" lvl="0" marL="0" marR="0" rtl="0" algn="l">
+              <a:lnSpc>
+                <a:spcPct val="152631"/>
+              </a:lnSpc>
+              <a:spcBef>
+                <a:spcPts val="0"/>
+              </a:spcBef>
+              <a:spcAft>
+                <a:spcPts val="0"/>
+              </a:spcAft>
+              <a:buClr>
+                <a:srgbClr val="E2E6E9"/>
+              </a:buClr>
+              <a:buSzPts val="1900"/>
+              <a:buFont typeface="Arial"/>
+              <a:buNone/>
+            </a:pPr>
+            <a:r>
+              <a:rPr b="0" i="0" lang="en-US" sz="1900" u="none" cap="none" strike="noStrike">
+                <a:solidFill>
+                  <a:srgbClr val="E2E6E9"/>
+                </a:solidFill>
+                <a:latin typeface="Arial"/>
+                <a:ea typeface="Arial"/>
+                <a:cs typeface="Arial"/>
+                <a:sym typeface="Arial"/>
+              </a:rPr>
+              <a:t>Predictive analytics for sales forecasting.</a:t>
+            </a:r>
+            <a:endParaRPr b="0" i="0" sz="1900" u="none" cap="none" strike="noStrike"/>
+          </a:p>
+        </p:txBody>
+      </p:sp>
+    </p:spTree>
+  </p:cSld>
+  <p:clrMapOvr>
+    <a:masterClrMapping/>
+  </p:clrMapOvr>
+</p:sld>
+</file>
+
+<file path=ppt/slides/slide25.xml><?xml version="1.0" encoding="utf-8"?>
+<p:sld xmlns:a="http://schemas.openxmlformats.org/drawingml/2006/main" xmlns:r="http://schemas.openxmlformats.org/officeDocument/2006/relationships" xmlns:mc="http://schemas.openxmlformats.org/markup-compatibility/2006" xmlns:mv="urn:schemas-microsoft-com:mac:vml" xmlns:p="http://schemas.openxmlformats.org/presentationml/2006/main" xmlns:c="http://schemas.openxmlformats.org/drawingml/2006/chart" xmlns:dgm="http://schemas.openxmlformats.org/drawingml/2006/diagram" xmlns:o="urn:schemas-microsoft-com:office:office" xmlns:v="urn:schemas-microsoft-com:vml" xmlns:pvml="urn:schemas-microsoft-com:office:powerpoint" xmlns:com="http://schemas.openxmlformats.org/drawingml/2006/compatibility" xmlns:p14="http://schemas.microsoft.com/office/powerpoint/2010/main" xmlns:p15="http://schemas.microsoft.com/office/powerpoint/2012/main" xmlns:ahyp="http://schemas.microsoft.com/office/drawing/2018/hyperlinkcolor">
+  <p:cSld>
+    <p:spTree>
+      <p:nvGrpSpPr>
+        <p:cNvPr id="298" name="Shape 298"/>
+        <p:cNvGrpSpPr/>
+        <p:nvPr/>
+      </p:nvGrpSpPr>
+      <p:grpSpPr>
+        <a:xfrm>
+          <a:off x="0" y="0"/>
+          <a:ext cx="0" cy="0"/>
+          <a:chOff x="0" y="0"/>
+          <a:chExt cx="0" cy="0"/>
+        </a:xfrm>
+      </p:grpSpPr>
+      <p:sp>
+        <p:nvSpPr>
+          <p:cNvPr id="299" name="Google Shape;299;g33b135bed8a_1_253"/>
+          <p:cNvSpPr txBox="1"/>
+          <p:nvPr/>
+        </p:nvSpPr>
+        <p:spPr>
+          <a:xfrm>
+            <a:off x="4022600" y="2964725"/>
+            <a:ext cx="6350400" cy="1246800"/>
+          </a:xfrm>
+          <a:prstGeom prst="rect">
+            <a:avLst/>
+          </a:prstGeom>
+          <a:noFill/>
+          <a:ln>
+            <a:noFill/>
+          </a:ln>
+        </p:spPr>
+        <p:txBody>
+          <a:bodyPr anchorCtr="0" anchor="t" bIns="91425" lIns="91425" spcFirstLastPara="1" rIns="91425" wrap="square" tIns="91425">
+            <a:spAutoFit/>
+          </a:bodyPr>
+          <a:lstStyle/>
+          <a:p>
+            <a:pPr indent="0" lvl="0" marL="0" rtl="0" algn="l">
+              <a:lnSpc>
+                <a:spcPct val="125000"/>
+              </a:lnSpc>
+              <a:spcBef>
+                <a:spcPts val="0"/>
+              </a:spcBef>
+              <a:spcAft>
+                <a:spcPts val="0"/>
+              </a:spcAft>
+              <a:buNone/>
+            </a:pPr>
+            <a:r>
+              <a:rPr b="1" lang="en-US" sz="6900">
+                <a:solidFill>
+                  <a:schemeClr val="lt1"/>
+                </a:solidFill>
+                <a:latin typeface="Montserrat"/>
+                <a:ea typeface="Montserrat"/>
+                <a:cs typeface="Montserrat"/>
+                <a:sym typeface="Montserrat"/>
+              </a:rPr>
+              <a:t>Thank You</a:t>
+            </a:r>
+            <a:endParaRPr sz="3900"/>
+          </a:p>
+        </p:txBody>
+      </p:sp>
+    </p:spTree>
+  </p:cSld>
+  <p:clrMapOvr>
+    <a:masterClrMapping/>
+  </p:clrMapOvr>
+</p:sld>
+</file>
+
+<file path=ppt/slides/slide3.xml><?xml version="1.0" encoding="utf-8"?>
+<p:sld xmlns:a="http://schemas.openxmlformats.org/drawingml/2006/main" xmlns:r="http://schemas.openxmlformats.org/officeDocument/2006/relationships" xmlns:mc="http://schemas.openxmlformats.org/markup-compatibility/2006" xmlns:mv="urn:schemas-microsoft-com:mac:vml" xmlns:p="http://schemas.openxmlformats.org/presentationml/2006/main" xmlns:c="http://schemas.openxmlformats.org/drawingml/2006/chart" xmlns:dgm="http://schemas.openxmlformats.org/drawingml/2006/diagram" xmlns:o="urn:schemas-microsoft-com:office:office" xmlns:v="urn:schemas-microsoft-com:vml" xmlns:pvml="urn:schemas-microsoft-com:office:powerpoint" xmlns:com="http://schemas.openxmlformats.org/drawingml/2006/compatibility" xmlns:p14="http://schemas.microsoft.com/office/powerpoint/2010/main" xmlns:p15="http://schemas.microsoft.com/office/powerpoint/2012/main" xmlns:ahyp="http://schemas.microsoft.com/office/drawing/2018/hyperlinkcolor">
+  <p:cSld>
+    <p:spTree>
+      <p:nvGrpSpPr>
+        <p:cNvPr id="81" name="Shape 81"/>
+        <p:cNvGrpSpPr/>
+        <p:nvPr/>
+      </p:nvGrpSpPr>
+      <p:grpSpPr>
+        <a:xfrm>
+          <a:off x="0" y="0"/>
+          <a:ext cx="0" cy="0"/>
+          <a:chOff x="0" y="0"/>
+          <a:chExt cx="0" cy="0"/>
+        </a:xfrm>
+      </p:grpSpPr>
+      <p:sp>
+        <p:nvSpPr>
+          <p:cNvPr id="82" name="Google Shape;82;p1"/>
           <p:cNvSpPr/>
           <p:nvPr/>
         </p:nvSpPr>
@@ -8793,7 +11754,7 @@
       </p:sp>
       <p:sp>
         <p:nvSpPr>
-          <p:cNvPr id="84" name="Google Shape;84;p1"/>
+          <p:cNvPr id="83" name="Google Shape;83;p1"/>
           <p:cNvSpPr/>
           <p:nvPr/>
         </p:nvSpPr>
@@ -8902,7 +11863,7 @@
   <p:cSld>
     <p:spTree>
       <p:nvGrpSpPr>
-        <p:cNvPr id="89" name="Shape 89"/>
+        <p:cNvPr id="88" name="Shape 88"/>
         <p:cNvGrpSpPr/>
         <p:nvPr/>
       </p:nvGrpSpPr>
@@ -8916,7 +11877,7 @@
       </p:grpSpPr>
       <p:sp>
         <p:nvSpPr>
-          <p:cNvPr id="90" name="Google Shape;90;p2"/>
+          <p:cNvPr id="89" name="Google Shape;89;p2"/>
           <p:cNvSpPr/>
           <p:nvPr/>
         </p:nvSpPr>
@@ -8974,7 +11935,7 @@
       </p:sp>
       <p:pic>
         <p:nvPicPr>
-          <p:cNvPr descr="preencoded.png" id="91" name="Google Shape;91;p2"/>
+          <p:cNvPr descr="preencoded.png" id="90" name="Google Shape;90;p2"/>
           <p:cNvPicPr preferRelativeResize="0"/>
           <p:nvPr/>
         </p:nvPicPr>
@@ -9001,7 +11962,7 @@
       </p:pic>
       <p:sp>
         <p:nvSpPr>
-          <p:cNvPr id="92" name="Google Shape;92;p2"/>
+          <p:cNvPr id="91" name="Google Shape;91;p2"/>
           <p:cNvSpPr/>
           <p:nvPr/>
         </p:nvSpPr>
@@ -9059,7 +12020,7 @@
       </p:sp>
       <p:sp>
         <p:nvSpPr>
-          <p:cNvPr id="93" name="Google Shape;93;p2"/>
+          <p:cNvPr id="92" name="Google Shape;92;p2"/>
           <p:cNvSpPr/>
           <p:nvPr/>
         </p:nvSpPr>
@@ -9117,7 +12078,7 @@
       </p:sp>
       <p:pic>
         <p:nvPicPr>
-          <p:cNvPr descr="preencoded.png" id="94" name="Google Shape;94;p2"/>
+          <p:cNvPr descr="preencoded.png" id="93" name="Google Shape;93;p2"/>
           <p:cNvPicPr preferRelativeResize="0"/>
           <p:nvPr/>
         </p:nvPicPr>
@@ -9144,7 +12105,7 @@
       </p:pic>
       <p:sp>
         <p:nvSpPr>
-          <p:cNvPr id="95" name="Google Shape;95;p2"/>
+          <p:cNvPr id="94" name="Google Shape;94;p2"/>
           <p:cNvSpPr/>
           <p:nvPr/>
         </p:nvSpPr>
@@ -9202,7 +12163,7 @@
       </p:sp>
       <p:sp>
         <p:nvSpPr>
-          <p:cNvPr id="96" name="Google Shape;96;p2"/>
+          <p:cNvPr id="95" name="Google Shape;95;p2"/>
           <p:cNvSpPr/>
           <p:nvPr/>
         </p:nvSpPr>
@@ -9260,7 +12221,7 @@
       </p:sp>
       <p:pic>
         <p:nvPicPr>
-          <p:cNvPr descr="preencoded.png" id="97" name="Google Shape;97;p2"/>
+          <p:cNvPr descr="preencoded.png" id="96" name="Google Shape;96;p2"/>
           <p:cNvPicPr preferRelativeResize="0"/>
           <p:nvPr/>
         </p:nvPicPr>
@@ -9287,7 +12248,7 @@
       </p:pic>
       <p:sp>
         <p:nvSpPr>
-          <p:cNvPr id="98" name="Google Shape;98;p2"/>
+          <p:cNvPr id="97" name="Google Shape;97;p2"/>
           <p:cNvSpPr/>
           <p:nvPr/>
         </p:nvSpPr>
@@ -9345,7 +12306,7 @@
       </p:sp>
       <p:sp>
         <p:nvSpPr>
-          <p:cNvPr id="99" name="Google Shape;99;p2"/>
+          <p:cNvPr id="98" name="Google Shape;98;p2"/>
           <p:cNvSpPr/>
           <p:nvPr/>
         </p:nvSpPr>
@@ -9403,7 +12364,7 @@
       </p:sp>
       <p:pic>
         <p:nvPicPr>
-          <p:cNvPr descr="preencoded.png" id="100" name="Google Shape;100;p2"/>
+          <p:cNvPr descr="preencoded.png" id="99" name="Google Shape;99;p2"/>
           <p:cNvPicPr preferRelativeResize="0"/>
           <p:nvPr/>
         </p:nvPicPr>
@@ -9430,7 +12391,7 @@
       </p:pic>
       <p:sp>
         <p:nvSpPr>
-          <p:cNvPr id="101" name="Google Shape;101;p2"/>
+          <p:cNvPr id="100" name="Google Shape;100;p2"/>
           <p:cNvSpPr/>
           <p:nvPr/>
         </p:nvSpPr>
@@ -9488,7 +12449,7 @@
       </p:sp>
       <p:sp>
         <p:nvSpPr>
-          <p:cNvPr id="102" name="Google Shape;102;p2"/>
+          <p:cNvPr id="101" name="Google Shape;101;p2"/>
           <p:cNvSpPr/>
           <p:nvPr/>
         </p:nvSpPr>
@@ -9597,7 +12558,7 @@
   <p:cSld>
     <p:spTree>
       <p:nvGrpSpPr>
-        <p:cNvPr id="107" name="Shape 107"/>
+        <p:cNvPr id="106" name="Shape 106"/>
         <p:cNvGrpSpPr/>
         <p:nvPr/>
       </p:nvGrpSpPr>
@@ -9611,7 +12572,7 @@
       </p:grpSpPr>
       <p:sp>
         <p:nvSpPr>
-          <p:cNvPr id="108" name="Google Shape;108;p3"/>
+          <p:cNvPr id="107" name="Google Shape;107;p3"/>
           <p:cNvSpPr/>
           <p:nvPr/>
         </p:nvSpPr>
@@ -9669,7 +12630,7 @@
       </p:sp>
       <p:pic>
         <p:nvPicPr>
-          <p:cNvPr descr="preencoded.png" id="109" name="Google Shape;109;p3"/>
+          <p:cNvPr descr="preencoded.png" id="108" name="Google Shape;108;p3"/>
           <p:cNvPicPr preferRelativeResize="0"/>
           <p:nvPr/>
         </p:nvPicPr>
@@ -9696,7 +12657,7 @@
       </p:pic>
       <p:sp>
         <p:nvSpPr>
-          <p:cNvPr id="110" name="Google Shape;110;p3"/>
+          <p:cNvPr id="109" name="Google Shape;109;p3"/>
           <p:cNvSpPr/>
           <p:nvPr/>
         </p:nvSpPr>
@@ -9754,7 +12715,7 @@
       </p:sp>
       <p:sp>
         <p:nvSpPr>
-          <p:cNvPr id="111" name="Google Shape;111;p3"/>
+          <p:cNvPr id="110" name="Google Shape;110;p3"/>
           <p:cNvSpPr/>
           <p:nvPr/>
         </p:nvSpPr>
@@ -9812,7 +12773,7 @@
       </p:sp>
       <p:pic>
         <p:nvPicPr>
-          <p:cNvPr descr="preencoded.png" id="112" name="Google Shape;112;p3"/>
+          <p:cNvPr descr="preencoded.png" id="111" name="Google Shape;111;p3"/>
           <p:cNvPicPr preferRelativeResize="0"/>
           <p:nvPr/>
         </p:nvPicPr>
@@ -9839,7 +12800,7 @@
       </p:pic>
       <p:sp>
         <p:nvSpPr>
-          <p:cNvPr id="113" name="Google Shape;113;p3"/>
+          <p:cNvPr id="112" name="Google Shape;112;p3"/>
           <p:cNvSpPr/>
           <p:nvPr/>
         </p:nvSpPr>
@@ -9897,7 +12858,7 @@
       </p:sp>
       <p:sp>
         <p:nvSpPr>
-          <p:cNvPr id="114" name="Google Shape;114;p3"/>
+          <p:cNvPr id="113" name="Google Shape;113;p3"/>
           <p:cNvSpPr/>
           <p:nvPr/>
         </p:nvSpPr>
@@ -9955,7 +12916,7 @@
       </p:sp>
       <p:pic>
         <p:nvPicPr>
-          <p:cNvPr descr="preencoded.png" id="115" name="Google Shape;115;p3"/>
+          <p:cNvPr descr="preencoded.png" id="114" name="Google Shape;114;p3"/>
           <p:cNvPicPr preferRelativeResize="0"/>
           <p:nvPr/>
         </p:nvPicPr>
@@ -9982,7 +12943,7 @@
       </p:pic>
       <p:sp>
         <p:nvSpPr>
-          <p:cNvPr id="116" name="Google Shape;116;p3"/>
+          <p:cNvPr id="115" name="Google Shape;115;p3"/>
           <p:cNvSpPr/>
           <p:nvPr/>
         </p:nvSpPr>
@@ -10040,7 +13001,7 @@
       </p:sp>
       <p:sp>
         <p:nvSpPr>
-          <p:cNvPr id="117" name="Google Shape;117;p3"/>
+          <p:cNvPr id="116" name="Google Shape;116;p3"/>
           <p:cNvSpPr/>
           <p:nvPr/>
         </p:nvSpPr>
@@ -10098,7 +13059,7 @@
       </p:sp>
       <p:pic>
         <p:nvPicPr>
-          <p:cNvPr descr="preencoded.png" id="118" name="Google Shape;118;p3"/>
+          <p:cNvPr descr="preencoded.png" id="117" name="Google Shape;117;p3"/>
           <p:cNvPicPr preferRelativeResize="0"/>
           <p:nvPr/>
         </p:nvPicPr>
@@ -10125,7 +13086,7 @@
       </p:pic>
       <p:sp>
         <p:nvSpPr>
-          <p:cNvPr id="119" name="Google Shape;119;p3"/>
+          <p:cNvPr id="118" name="Google Shape;118;p3"/>
           <p:cNvSpPr/>
           <p:nvPr/>
         </p:nvSpPr>
@@ -10183,7 +13144,7 @@
       </p:sp>
       <p:sp>
         <p:nvSpPr>
-          <p:cNvPr id="120" name="Google Shape;120;p3"/>
+          <p:cNvPr id="119" name="Google Shape;119;p3"/>
           <p:cNvSpPr/>
           <p:nvPr/>
         </p:nvSpPr>
@@ -10252,7 +13213,7 @@
   <p:cSld>
     <p:spTree>
       <p:nvGrpSpPr>
-        <p:cNvPr id="125" name="Shape 125"/>
+        <p:cNvPr id="124" name="Shape 124"/>
         <p:cNvGrpSpPr/>
         <p:nvPr/>
       </p:nvGrpSpPr>
@@ -10266,7 +13227,7 @@
       </p:grpSpPr>
       <p:sp>
         <p:nvSpPr>
-          <p:cNvPr id="126" name="Google Shape;126;p4"/>
+          <p:cNvPr id="125" name="Google Shape;125;p4"/>
           <p:cNvSpPr/>
           <p:nvPr/>
         </p:nvSpPr>
@@ -10324,7 +13285,7 @@
       </p:sp>
       <p:sp>
         <p:nvSpPr>
-          <p:cNvPr id="127" name="Google Shape;127;p4"/>
+          <p:cNvPr id="126" name="Google Shape;126;p4"/>
           <p:cNvSpPr/>
           <p:nvPr/>
         </p:nvSpPr>
@@ -10382,7 +13343,7 @@
       </p:sp>
       <p:sp>
         <p:nvSpPr>
-          <p:cNvPr id="128" name="Google Shape;128;p4"/>
+          <p:cNvPr id="127" name="Google Shape;127;p4"/>
           <p:cNvSpPr/>
           <p:nvPr/>
         </p:nvSpPr>
@@ -10440,7 +13401,7 @@
       </p:sp>
       <p:sp>
         <p:nvSpPr>
-          <p:cNvPr id="129" name="Google Shape;129;p4"/>
+          <p:cNvPr id="128" name="Google Shape;128;p4"/>
           <p:cNvSpPr/>
           <p:nvPr/>
         </p:nvSpPr>
@@ -10498,7 +13459,7 @@
       </p:sp>
       <p:sp>
         <p:nvSpPr>
-          <p:cNvPr id="130" name="Google Shape;130;p4"/>
+          <p:cNvPr id="129" name="Google Shape;129;p4"/>
           <p:cNvSpPr/>
           <p:nvPr/>
         </p:nvSpPr>
@@ -10556,7 +13517,7 @@
       </p:sp>
       <p:sp>
         <p:nvSpPr>
-          <p:cNvPr id="131" name="Google Shape;131;p4"/>
+          <p:cNvPr id="130" name="Google Shape;130;p4"/>
           <p:cNvSpPr/>
           <p:nvPr/>
         </p:nvSpPr>
@@ -10614,7 +13575,7 @@
       </p:sp>
       <p:sp>
         <p:nvSpPr>
-          <p:cNvPr id="132" name="Google Shape;132;p4"/>
+          <p:cNvPr id="131" name="Google Shape;131;p4"/>
           <p:cNvSpPr/>
           <p:nvPr/>
         </p:nvSpPr>
@@ -10672,7 +13633,7 @@
       </p:sp>
       <p:sp>
         <p:nvSpPr>
-          <p:cNvPr id="133" name="Google Shape;133;p4"/>
+          <p:cNvPr id="132" name="Google Shape;132;p4"/>
           <p:cNvSpPr/>
           <p:nvPr/>
         </p:nvSpPr>
@@ -10730,7 +13691,7 @@
       </p:sp>
       <p:sp>
         <p:nvSpPr>
-          <p:cNvPr id="134" name="Google Shape;134;p4"/>
+          <p:cNvPr id="133" name="Google Shape;133;p4"/>
           <p:cNvSpPr/>
           <p:nvPr/>
         </p:nvSpPr>
@@ -10806,7 +13767,7 @@
     </p:bg>
     <p:spTree>
       <p:nvGrpSpPr>
-        <p:cNvPr id="138" name="Shape 138"/>
+        <p:cNvPr id="137" name="Shape 137"/>
         <p:cNvGrpSpPr/>
         <p:nvPr/>
       </p:nvGrpSpPr>
@@ -10820,7 +13781,7 @@
       </p:grpSpPr>
       <p:sp>
         <p:nvSpPr>
-          <p:cNvPr id="139" name="Google Shape;139;g33b135bed8a_1_0"/>
+          <p:cNvPr id="138" name="Google Shape;138;g33b135bed8a_1_0"/>
           <p:cNvSpPr txBox="1"/>
           <p:nvPr>
             <p:ph type="title"/>
@@ -10841,13 +13802,13 @@
         </p:spPr>
         <p:txBody>
           <a:bodyPr anchorCtr="0" anchor="ctr" bIns="67025" lIns="134100" spcFirstLastPara="1" rIns="134100" wrap="square" tIns="67025">
-            <a:normAutofit/>
+            <a:normAutofit fontScale="90000"/>
           </a:bodyPr>
           <a:lstStyle/>
           <a:p>
-            <a:pPr indent="0" lvl="0" marL="0" rtl="0" algn="ctr">
+            <a:pPr indent="0" lvl="0" marL="0" rtl="0" algn="l">
               <a:lnSpc>
-                <a:spcPct val="90000"/>
+                <a:spcPct val="125000"/>
               </a:lnSpc>
               <a:spcBef>
                 <a:spcPts val="0"/>
@@ -10855,50 +13816,32 @@
               <a:spcAft>
                 <a:spcPts val="0"/>
               </a:spcAft>
-              <a:buSzPts val="6200"/>
-              <a:buFont typeface="Georgia"/>
+              <a:buClr>
+                <a:schemeClr val="lt1"/>
+              </a:buClr>
+              <a:buSzPct val="100000"/>
+              <a:buFont typeface="Montserrat"/>
               <a:buNone/>
             </a:pPr>
             <a:r>
-              <a:rPr lang="en-US"/>
-              <a:t>Star Schema</a:t>
+              <a:rPr b="1" lang="en-US" sz="4400">
+                <a:solidFill>
+                  <a:schemeClr val="lt1"/>
+                </a:solidFill>
+                <a:latin typeface="Montserrat"/>
+                <a:ea typeface="Montserrat"/>
+                <a:cs typeface="Montserrat"/>
+                <a:sym typeface="Montserrat"/>
+              </a:rPr>
+              <a:t>Star Schema Design</a:t>
             </a:r>
             <a:endParaRPr/>
           </a:p>
         </p:txBody>
       </p:sp>
-      <p:pic>
-        <p:nvPicPr>
-          <p:cNvPr id="140" name="Google Shape;140;g33b135bed8a_1_0"/>
-          <p:cNvPicPr preferRelativeResize="0"/>
-          <p:nvPr>
-            <p:ph idx="1" type="body"/>
-          </p:nvPr>
-        </p:nvPicPr>
-        <p:blipFill rotWithShape="1">
-          <a:blip r:embed="rId3">
-            <a:alphaModFix/>
-          </a:blip>
-          <a:srcRect b="5516" l="2010" r="1789" t="5356"/>
-          <a:stretch/>
-        </p:blipFill>
-        <p:spPr>
-          <a:xfrm>
-            <a:off x="219454" y="1202436"/>
-            <a:ext cx="14122200" cy="6012300"/>
-          </a:xfrm>
-          <a:prstGeom prst="rect">
-            <a:avLst/>
-          </a:prstGeom>
-          <a:noFill/>
-          <a:ln>
-            <a:noFill/>
-          </a:ln>
-        </p:spPr>
-      </p:pic>
-      <p:sp>
-        <p:nvSpPr>
-          <p:cNvPr id="141" name="Google Shape;141;g33b135bed8a_1_0"/>
+      <p:sp>
+        <p:nvSpPr>
+          <p:cNvPr id="139" name="Google Shape;139;g33b135bed8a_1_0"/>
           <p:cNvSpPr txBox="1"/>
           <p:nvPr>
             <p:ph idx="12" type="sldNum"/>
@@ -10942,7 +13885,7 @@
       </p:sp>
       <p:sp>
         <p:nvSpPr>
-          <p:cNvPr id="142" name="Google Shape;142;g33b135bed8a_1_0"/>
+          <p:cNvPr id="140" name="Google Shape;140;g33b135bed8a_1_0"/>
           <p:cNvSpPr txBox="1"/>
           <p:nvPr/>
         </p:nvSpPr>
@@ -10983,7 +13926,7 @@
                 <a:ea typeface="Trebuchet MS"/>
                 <a:cs typeface="Trebuchet MS"/>
                 <a:sym typeface="Trebuchet MS"/>
-                <a:hlinkClick action="ppaction://hlinksldjump" r:id="rId4">
+                <a:hlinkClick action="ppaction://hlinksldjump" r:id="rId3">
                   <a:extLst>
                     <a:ext uri="{A12FA001-AC4F-418D-AE19-62706E023703}">
                       <ahyp:hlinkClr val="tx"/>
@@ -11014,7 +13957,7 @@
                 <a:ea typeface="Trebuchet MS"/>
                 <a:cs typeface="Trebuchet MS"/>
                 <a:sym typeface="Trebuchet MS"/>
-                <a:hlinkClick action="ppaction://hlinksldjump" r:id="rId5">
+                <a:hlinkClick action="ppaction://hlinksldjump" r:id="rId4">
                   <a:extLst>
                     <a:ext uri="{A12FA001-AC4F-418D-AE19-62706E023703}">
                       <ahyp:hlinkClr val="tx"/>
@@ -11045,7 +13988,7 @@
                 <a:ea typeface="Trebuchet MS"/>
                 <a:cs typeface="Trebuchet MS"/>
                 <a:sym typeface="Trebuchet MS"/>
-                <a:hlinkClick action="ppaction://hlinksldjump" r:id="rId6">
+                <a:hlinkClick action="ppaction://hlinksldjump" r:id="rId5">
                   <a:extLst>
                     <a:ext uri="{A12FA001-AC4F-418D-AE19-62706E023703}">
                       <ahyp:hlinkClr val="tx"/>
@@ -11067,6 +14010,34 @@
           </a:p>
         </p:txBody>
       </p:sp>
+      <p:pic>
+        <p:nvPicPr>
+          <p:cNvPr id="141" name="Google Shape;141;g33b135bed8a_1_0" title="Schema_.png"/>
+          <p:cNvPicPr preferRelativeResize="0"/>
+          <p:nvPr/>
+        </p:nvPicPr>
+        <p:blipFill>
+          <a:blip r:embed="rId6">
+            <a:alphaModFix/>
+          </a:blip>
+          <a:stretch>
+            <a:fillRect/>
+          </a:stretch>
+        </p:blipFill>
+        <p:spPr>
+          <a:xfrm>
+            <a:off x="939125" y="1516600"/>
+            <a:ext cx="11580400" cy="6010751"/>
+          </a:xfrm>
+          <a:prstGeom prst="rect">
+            <a:avLst/>
+          </a:prstGeom>
+          <a:noFill/>
+          <a:ln>
+            <a:noFill/>
+          </a:ln>
+        </p:spPr>
+      </p:pic>
     </p:spTree>
   </p:cSld>
   <p:clrMapOvr>
@@ -11080,7 +14051,7 @@
   <p:cSld>
     <p:spTree>
       <p:nvGrpSpPr>
-        <p:cNvPr id="147" name="Shape 147"/>
+        <p:cNvPr id="146" name="Shape 146"/>
         <p:cNvGrpSpPr/>
         <p:nvPr/>
       </p:nvGrpSpPr>
@@ -11094,7 +14065,7 @@
       </p:grpSpPr>
       <p:sp>
         <p:nvSpPr>
-          <p:cNvPr id="148" name="Google Shape;148;p5"/>
+          <p:cNvPr id="147" name="Google Shape;147;p5"/>
           <p:cNvSpPr/>
           <p:nvPr/>
         </p:nvSpPr>
@@ -11152,7 +14123,7 @@
       </p:sp>
       <p:sp>
         <p:nvSpPr>
-          <p:cNvPr id="149" name="Google Shape;149;p5"/>
+          <p:cNvPr id="148" name="Google Shape;148;p5"/>
           <p:cNvSpPr/>
           <p:nvPr/>
         </p:nvSpPr>
@@ -11197,7 +14168,7 @@
       </p:sp>
       <p:sp>
         <p:nvSpPr>
-          <p:cNvPr id="150" name="Google Shape;150;p5"/>
+          <p:cNvPr id="149" name="Google Shape;149;p5"/>
           <p:cNvSpPr/>
           <p:nvPr/>
         </p:nvSpPr>
@@ -11255,7 +14226,7 @@
       </p:sp>
       <p:sp>
         <p:nvSpPr>
-          <p:cNvPr id="151" name="Google Shape;151;p5"/>
+          <p:cNvPr id="150" name="Google Shape;150;p5"/>
           <p:cNvSpPr/>
           <p:nvPr/>
         </p:nvSpPr>
@@ -11313,7 +14284,7 @@
       </p:sp>
       <p:sp>
         <p:nvSpPr>
-          <p:cNvPr id="152" name="Google Shape;152;p5"/>
+          <p:cNvPr id="151" name="Google Shape;151;p5"/>
           <p:cNvSpPr/>
           <p:nvPr/>
         </p:nvSpPr>
@@ -11358,7 +14329,7 @@
       </p:sp>
       <p:sp>
         <p:nvSpPr>
-          <p:cNvPr id="153" name="Google Shape;153;p5"/>
+          <p:cNvPr id="152" name="Google Shape;152;p5"/>
           <p:cNvSpPr/>
           <p:nvPr/>
         </p:nvSpPr>
@@ -11416,7 +14387,7 @@
       </p:sp>
       <p:sp>
         <p:nvSpPr>
-          <p:cNvPr id="154" name="Google Shape;154;p5"/>
+          <p:cNvPr id="153" name="Google Shape;153;p5"/>
           <p:cNvSpPr/>
           <p:nvPr/>
         </p:nvSpPr>
@@ -11474,7 +14445,7 @@
       </p:sp>
       <p:sp>
         <p:nvSpPr>
-          <p:cNvPr id="155" name="Google Shape;155;p5"/>
+          <p:cNvPr id="154" name="Google Shape;154;p5"/>
           <p:cNvSpPr/>
           <p:nvPr/>
         </p:nvSpPr>
@@ -11519,7 +14490,7 @@
       </p:sp>
       <p:sp>
         <p:nvSpPr>
-          <p:cNvPr id="156" name="Google Shape;156;p5"/>
+          <p:cNvPr id="155" name="Google Shape;155;p5"/>
           <p:cNvSpPr/>
           <p:nvPr/>
         </p:nvSpPr>
@@ -11577,7 +14548,7 @@
       </p:sp>
       <p:sp>
         <p:nvSpPr>
-          <p:cNvPr id="157" name="Google Shape;157;p5"/>
+          <p:cNvPr id="156" name="Google Shape;156;p5"/>
           <p:cNvSpPr/>
           <p:nvPr/>
         </p:nvSpPr>
@@ -11646,7 +14617,7 @@
   <p:cSld>
     <p:spTree>
       <p:nvGrpSpPr>
-        <p:cNvPr id="162" name="Shape 162"/>
+        <p:cNvPr id="161" name="Shape 161"/>
         <p:cNvGrpSpPr/>
         <p:nvPr/>
       </p:nvGrpSpPr>
@@ -11660,7 +14631,7 @@
       </p:grpSpPr>
       <p:sp>
         <p:nvSpPr>
-          <p:cNvPr id="163" name="Google Shape;163;p6"/>
+          <p:cNvPr id="162" name="Google Shape;162;p6"/>
           <p:cNvSpPr/>
           <p:nvPr/>
         </p:nvSpPr>
@@ -11718,7 +14689,7 @@
       </p:sp>
       <p:sp>
         <p:nvSpPr>
-          <p:cNvPr id="164" name="Google Shape;164;p6"/>
+          <p:cNvPr id="163" name="Google Shape;163;p6"/>
           <p:cNvSpPr/>
           <p:nvPr/>
         </p:nvSpPr>
@@ -11776,7 +14747,7 @@
       </p:sp>
       <p:sp>
         <p:nvSpPr>
-          <p:cNvPr id="165" name="Google Shape;165;p6"/>
+          <p:cNvPr id="164" name="Google Shape;164;p6"/>
           <p:cNvSpPr/>
           <p:nvPr/>
         </p:nvSpPr>
@@ -11834,7 +14805,7 @@
       </p:sp>
       <p:sp>
         <p:nvSpPr>
-          <p:cNvPr id="166" name="Google Shape;166;p6"/>
+          <p:cNvPr id="165" name="Google Shape;165;p6"/>
           <p:cNvSpPr/>
           <p:nvPr/>
         </p:nvSpPr>
@@ -11892,7 +14863,7 @@
       </p:sp>
       <p:sp>
         <p:nvSpPr>
-          <p:cNvPr id="167" name="Google Shape;167;p6"/>
+          <p:cNvPr id="166" name="Google Shape;166;p6"/>
           <p:cNvSpPr/>
           <p:nvPr/>
         </p:nvSpPr>
@@ -11950,7 +14921,7 @@
       </p:sp>
       <p:sp>
         <p:nvSpPr>
-          <p:cNvPr id="168" name="Google Shape;168;p6"/>
+          <p:cNvPr id="167" name="Google Shape;167;p6"/>
           <p:cNvSpPr/>
           <p:nvPr/>
         </p:nvSpPr>
@@ -12008,7 +14979,7 @@
       </p:sp>
       <p:sp>
         <p:nvSpPr>
-          <p:cNvPr id="169" name="Google Shape;169;p6"/>
+          <p:cNvPr id="168" name="Google Shape;168;p6"/>
           <p:cNvSpPr/>
           <p:nvPr/>
         </p:nvSpPr>
@@ -12066,7 +15037,7 @@
       </p:sp>
       <p:sp>
         <p:nvSpPr>
-          <p:cNvPr id="170" name="Google Shape;170;p6"/>
+          <p:cNvPr id="169" name="Google Shape;169;p6"/>
           <p:cNvSpPr/>
           <p:nvPr/>
         </p:nvSpPr>
@@ -12124,7 +15095,7 @@
       </p:sp>
       <p:sp>
         <p:nvSpPr>
-          <p:cNvPr id="171" name="Google Shape;171;p6"/>
+          <p:cNvPr id="170" name="Google Shape;170;p6"/>
           <p:cNvSpPr/>
           <p:nvPr/>
         </p:nvSpPr>
